--- a/media/exports/reports/2026-10/board.pptx
+++ b/media/exports/reports/2026-10/board.pptx
@@ -3131,11 +3131,17 @@
           <a:bodyPr rtlCol="0" anchor="ctr"/>
           <a:lstStyle/>
           <a:p>
+            <a:pPr>
+              <a:defRPr>
+                <a:latin typeface="Roboto"/>
+              </a:defRPr>
+            </a:pPr>
             <a:r>
               <a:rPr sz="1600" b="1">
                 <a:solidFill>
                   <a:srgbClr val="FFFFFF"/>
                 </a:solidFill>
+                <a:latin typeface="Roboto"/>
               </a:rPr>
               <a:t>4th</a:t>
             </a:r>
@@ -3164,14 +3170,19 @@
           </a:bodyPr>
           <a:lstStyle/>
           <a:p>
+            <a:pPr>
+              <a:defRPr>
+                <a:latin typeface="Roboto"/>
+              </a:defRPr>
+            </a:pPr>
             <a:r>
               <a:rPr sz="1800" b="1">
                 <a:solidFill>
                   <a:srgbClr val="25342A"/>
                 </a:solidFill>
-                <a:latin typeface="Arial"/>
+                <a:latin typeface="Roboto"/>
               </a:rPr>
-              <a:t>The 4th Sheet</a:t>
+              <a:t>The Fourth Sheet</a:t>
             </a:r>
           </a:p>
         </p:txBody>
@@ -3198,12 +3209,17 @@
           </a:bodyPr>
           <a:lstStyle/>
           <a:p>
+            <a:pPr>
+              <a:defRPr>
+                <a:latin typeface="Roboto"/>
+              </a:defRPr>
+            </a:pPr>
             <a:r>
               <a:rPr sz="1100" b="1">
                 <a:solidFill>
                   <a:srgbClr val="8A7A52"/>
                 </a:solidFill>
-                <a:latin typeface="Arial"/>
+                <a:latin typeface="Roboto"/>
               </a:rPr>
               <a:t>SAMPLE DATA · invented figures for demonstration</a:t>
             </a:r>
@@ -3232,12 +3248,17 @@
           </a:bodyPr>
           <a:lstStyle/>
           <a:p>
+            <a:pPr>
+              <a:defRPr>
+                <a:latin typeface="Roboto"/>
+              </a:defRPr>
+            </a:pPr>
             <a:r>
               <a:rPr sz="3400" b="1">
                 <a:solidFill>
                   <a:srgbClr val="25342A"/>
                 </a:solidFill>
-                <a:latin typeface="Arial"/>
+                <a:latin typeface="Roboto"/>
               </a:rPr>
               <a:t>What does the board need to see?</a:t>
             </a:r>
@@ -3266,12 +3287,17 @@
           </a:bodyPr>
           <a:lstStyle/>
           <a:p>
+            <a:pPr>
+              <a:defRPr>
+                <a:latin typeface="Roboto"/>
+              </a:defRPr>
+            </a:pPr>
             <a:r>
               <a:rPr sz="1600" b="0">
                 <a:solidFill>
                   <a:srgbClr val="5F6F63"/>
                 </a:solidFill>
-                <a:latin typeface="Arial"/>
+                <a:latin typeface="Roboto"/>
               </a:rPr>
               <a:t>Sample Community Services Ltd</a:t>
             </a:r>
@@ -3300,12 +3326,17 @@
           </a:bodyPr>
           <a:lstStyle/>
           <a:p>
+            <a:pPr>
+              <a:defRPr>
+                <a:latin typeface="Roboto"/>
+              </a:defRPr>
+            </a:pPr>
             <a:r>
               <a:rPr sz="1400" b="0">
                 <a:solidFill>
                   <a:srgbClr val="25342A"/>
                 </a:solidFill>
-                <a:latin typeface="Arial"/>
+                <a:latin typeface="Roboto"/>
               </a:rPr>
               <a:t>Period: October 2026 to date. A one-page board summary for October 2026 to date: the result, the money, the risks, and the decisions to make. The full statements are in the downloads.</a:t>
             </a:r>
@@ -3334,34 +3365,49 @@
           </a:bodyPr>
           <a:lstStyle/>
           <a:p>
+            <a:pPr>
+              <a:defRPr>
+                <a:latin typeface="Roboto"/>
+              </a:defRPr>
+            </a:pPr>
             <a:r>
               <a:rPr sz="1100" b="0">
                 <a:solidFill>
                   <a:srgbClr val="5F6F63"/>
                 </a:solidFill>
-                <a:latin typeface="Arial"/>
+                <a:latin typeface="Roboto"/>
               </a:rPr>
               <a:t>How final is this data?</a:t>
             </a:r>
           </a:p>
           <a:p>
+            <a:pPr>
+              <a:defRPr>
+                <a:latin typeface="Roboto"/>
+              </a:defRPr>
+            </a:pPr>
             <a:r>
               <a:rPr sz="1100" b="0">
                 <a:solidFill>
                   <a:srgbClr val="5F6F63"/>
                 </a:solidFill>
-                <a:latin typeface="Arial"/>
+                <a:latin typeface="Roboto"/>
               </a:rPr>
               <a:t>September 2026: Locked. September 2026 is locked (closed 2 Oct 2026). These numbers won't change.</a:t>
             </a:r>
           </a:p>
           <a:p>
+            <a:pPr>
+              <a:defRPr>
+                <a:latin typeface="Roboto"/>
+              </a:defRPr>
+            </a:pPr>
             <a:r>
               <a:rPr sz="1100" b="0">
                 <a:solidFill>
                   <a:srgbClr val="5F6F63"/>
                 </a:solidFill>
-                <a:latin typeface="Arial"/>
+                <a:latin typeface="Roboto"/>
               </a:rPr>
               <a:t>October 2026: Incomplete. October 2026 is still in progress: figures to 6 Oct only.</a:t>
             </a:r>
@@ -3390,12 +3436,17 @@
           </a:bodyPr>
           <a:lstStyle/>
           <a:p>
+            <a:pPr>
+              <a:defRPr>
+                <a:latin typeface="Roboto"/>
+              </a:defRPr>
+            </a:pPr>
             <a:r>
               <a:rPr sz="900" b="0">
                 <a:solidFill>
                   <a:srgbClr val="5F6F63"/>
                 </a:solidFill>
-                <a:latin typeface="Arial"/>
+                <a:latin typeface="Roboto"/>
               </a:rPr>
               <a:t>board.pptx</a:t>
             </a:r>
@@ -3424,13 +3475,17 @@
           </a:bodyPr>
           <a:lstStyle/>
           <a:p>
-            <a:pPr algn="ctr"/>
+            <a:pPr algn="ctr">
+              <a:defRPr>
+                <a:latin typeface="Roboto"/>
+              </a:defRPr>
+            </a:pPr>
             <a:r>
               <a:rPr sz="900" b="0">
                 <a:solidFill>
                   <a:srgbClr val="5F6F63"/>
                 </a:solidFill>
-                <a:latin typeface="Arial"/>
+                <a:latin typeface="Roboto"/>
               </a:rPr>
               <a:t>Data retrieved 2pm, Tue 6 Oct 2026 · Sample data</a:t>
             </a:r>
@@ -3459,13 +3514,17 @@
           </a:bodyPr>
           <a:lstStyle/>
           <a:p>
-            <a:pPr algn="r"/>
+            <a:pPr algn="r">
+              <a:defRPr>
+                <a:latin typeface="Roboto"/>
+              </a:defRPr>
+            </a:pPr>
             <a:r>
               <a:rPr sz="900" b="0">
                 <a:solidFill>
                   <a:srgbClr val="5F6F63"/>
                 </a:solidFill>
-                <a:latin typeface="Arial"/>
+                <a:latin typeface="Roboto"/>
               </a:rPr>
               <a:t>Slide 1 of 5</a:t>
             </a:r>
@@ -3529,7 +3588,11 @@
           <a:bodyPr rtlCol="0" anchor="ctr"/>
           <a:lstStyle/>
           <a:p>
-            <a:pPr algn="ctr"/>
+            <a:pPr algn="ctr">
+              <a:defRPr>
+                <a:latin typeface="Roboto"/>
+              </a:defRPr>
+            </a:pPr>
           </a:p>
         </p:txBody>
       </p:sp>
@@ -3555,12 +3618,17 @@
           </a:bodyPr>
           <a:lstStyle/>
           <a:p>
+            <a:pPr>
+              <a:defRPr>
+                <a:latin typeface="Roboto"/>
+              </a:defRPr>
+            </a:pPr>
             <a:r>
               <a:rPr sz="1000" b="0">
                 <a:solidFill>
                   <a:srgbClr val="5F6F63"/>
                 </a:solidFill>
-                <a:latin typeface="Arial"/>
+                <a:latin typeface="Roboto"/>
               </a:rPr>
               <a:t>Sample Community Services Ltd · What does the board need to see?</a:t>
             </a:r>
@@ -3589,12 +3657,17 @@
           </a:bodyPr>
           <a:lstStyle/>
           <a:p>
+            <a:pPr>
+              <a:defRPr>
+                <a:latin typeface="Roboto"/>
+              </a:defRPr>
+            </a:pPr>
             <a:r>
               <a:rPr sz="2400" b="1">
                 <a:solidFill>
                   <a:srgbClr val="25342A"/>
                 </a:solidFill>
-                <a:latin typeface="Arial"/>
+                <a:latin typeface="Roboto"/>
               </a:rPr>
               <a:t>Headline numbers</a:t>
             </a:r>
@@ -3642,7 +3715,11 @@
           <a:bodyPr rtlCol="0" anchor="ctr"/>
           <a:lstStyle/>
           <a:p>
-            <a:pPr algn="ctr"/>
+            <a:pPr algn="ctr">
+              <a:defRPr>
+                <a:latin typeface="Roboto"/>
+              </a:defRPr>
+            </a:pPr>
           </a:p>
         </p:txBody>
       </p:sp>
@@ -3668,12 +3745,17 @@
           </a:bodyPr>
           <a:lstStyle/>
           <a:p>
+            <a:pPr>
+              <a:defRPr>
+                <a:latin typeface="Roboto"/>
+              </a:defRPr>
+            </a:pPr>
             <a:r>
               <a:rPr sz="1200" b="0">
                 <a:solidFill>
                   <a:srgbClr val="5F6F63"/>
                 </a:solidFill>
-                <a:latin typeface="Arial"/>
+                <a:latin typeface="Roboto"/>
               </a:rPr>
               <a:t>Surplus, October so far</a:t>
             </a:r>
@@ -3702,12 +3784,17 @@
           </a:bodyPr>
           <a:lstStyle/>
           <a:p>
+            <a:pPr>
+              <a:defRPr>
+                <a:latin typeface="Roboto"/>
+              </a:defRPr>
+            </a:pPr>
             <a:r>
               <a:rPr sz="3000" b="1">
                 <a:solidFill>
                   <a:srgbClr val="B42318"/>
                 </a:solidFill>
-                <a:latin typeface="Arial"/>
+                <a:latin typeface="Roboto"/>
               </a:rPr>
               <a:t>($10,737)</a:t>
             </a:r>
@@ -3736,12 +3823,17 @@
           </a:bodyPr>
           <a:lstStyle/>
           <a:p>
+            <a:pPr>
+              <a:defRPr>
+                <a:latin typeface="Roboto"/>
+              </a:defRPr>
+            </a:pPr>
             <a:r>
               <a:rPr sz="1100" b="0">
                 <a:solidFill>
                   <a:srgbClr val="5F6F63"/>
                 </a:solidFill>
-                <a:latin typeface="Arial"/>
+                <a:latin typeface="Roboto"/>
               </a:rPr>
               <a:t>September $10,380</a:t>
             </a:r>
@@ -3789,7 +3881,11 @@
           <a:bodyPr rtlCol="0" anchor="ctr"/>
           <a:lstStyle/>
           <a:p>
-            <a:pPr algn="ctr"/>
+            <a:pPr algn="ctr">
+              <a:defRPr>
+                <a:latin typeface="Roboto"/>
+              </a:defRPr>
+            </a:pPr>
           </a:p>
         </p:txBody>
       </p:sp>
@@ -3815,12 +3911,17 @@
           </a:bodyPr>
           <a:lstStyle/>
           <a:p>
+            <a:pPr>
+              <a:defRPr>
+                <a:latin typeface="Roboto"/>
+              </a:defRPr>
+            </a:pPr>
             <a:r>
               <a:rPr sz="1200" b="0">
                 <a:solidFill>
                   <a:srgbClr val="5F6F63"/>
                 </a:solidFill>
-                <a:latin typeface="Arial"/>
+                <a:latin typeface="Roboto"/>
               </a:rPr>
               <a:t>Surplus (deficit), year to date</a:t>
             </a:r>
@@ -3849,12 +3950,17 @@
           </a:bodyPr>
           <a:lstStyle/>
           <a:p>
+            <a:pPr>
+              <a:defRPr>
+                <a:latin typeface="Roboto"/>
+              </a:defRPr>
+            </a:pPr>
             <a:r>
               <a:rPr sz="3000" b="1">
                 <a:solidFill>
                   <a:srgbClr val="B42318"/>
                 </a:solidFill>
-                <a:latin typeface="Arial"/>
+                <a:latin typeface="Roboto"/>
               </a:rPr>
               <a:t>($49,527)</a:t>
             </a:r>
@@ -3883,12 +3989,17 @@
           </a:bodyPr>
           <a:lstStyle/>
           <a:p>
+            <a:pPr>
+              <a:defRPr>
+                <a:latin typeface="Roboto"/>
+              </a:defRPr>
+            </a:pPr>
             <a:r>
               <a:rPr sz="1100" b="0">
                 <a:solidFill>
                   <a:srgbClr val="5F6F63"/>
                 </a:solidFill>
-                <a:latin typeface="Arial"/>
+                <a:latin typeface="Roboto"/>
               </a:rPr>
               <a:t>Jul to Oct 2026</a:t>
             </a:r>
@@ -3936,7 +4047,11 @@
           <a:bodyPr rtlCol="0" anchor="ctr"/>
           <a:lstStyle/>
           <a:p>
-            <a:pPr algn="ctr"/>
+            <a:pPr algn="ctr">
+              <a:defRPr>
+                <a:latin typeface="Roboto"/>
+              </a:defRPr>
+            </a:pPr>
           </a:p>
         </p:txBody>
       </p:sp>
@@ -3962,12 +4077,17 @@
           </a:bodyPr>
           <a:lstStyle/>
           <a:p>
+            <a:pPr>
+              <a:defRPr>
+                <a:latin typeface="Roboto"/>
+              </a:defRPr>
+            </a:pPr>
             <a:r>
               <a:rPr sz="1200" b="0">
                 <a:solidFill>
                   <a:srgbClr val="5F6F63"/>
                 </a:solidFill>
-                <a:latin typeface="Arial"/>
+                <a:latin typeface="Roboto"/>
               </a:rPr>
               <a:t>Unrestricted cash runway</a:t>
             </a:r>
@@ -3996,12 +4116,17 @@
           </a:bodyPr>
           <a:lstStyle/>
           <a:p>
+            <a:pPr>
+              <a:defRPr>
+                <a:latin typeface="Roboto"/>
+              </a:defRPr>
+            </a:pPr>
             <a:r>
               <a:rPr sz="3000" b="1">
                 <a:solidFill>
                   <a:srgbClr val="2F7A5D"/>
                 </a:solidFill>
-                <a:latin typeface="Arial"/>
+                <a:latin typeface="Roboto"/>
               </a:rPr>
               <a:t>1.8 months</a:t>
             </a:r>
@@ -4030,12 +4155,17 @@
           </a:bodyPr>
           <a:lstStyle/>
           <a:p>
+            <a:pPr>
+              <a:defRPr>
+                <a:latin typeface="Roboto"/>
+              </a:defRPr>
+            </a:pPr>
             <a:r>
               <a:rPr sz="1100" b="0">
                 <a:solidFill>
                   <a:srgbClr val="5F6F63"/>
                 </a:solidFill>
-                <a:latin typeface="Arial"/>
+                <a:latin typeface="Roboto"/>
               </a:rPr>
               <a:t>reserves target 3.0 months</a:t>
             </a:r>
@@ -4083,7 +4213,11 @@
           <a:bodyPr rtlCol="0" anchor="ctr"/>
           <a:lstStyle/>
           <a:p>
-            <a:pPr algn="ctr"/>
+            <a:pPr algn="ctr">
+              <a:defRPr>
+                <a:latin typeface="Roboto"/>
+              </a:defRPr>
+            </a:pPr>
           </a:p>
         </p:txBody>
       </p:sp>
@@ -4109,12 +4243,17 @@
           </a:bodyPr>
           <a:lstStyle/>
           <a:p>
+            <a:pPr>
+              <a:defRPr>
+                <a:latin typeface="Roboto"/>
+              </a:defRPr>
+            </a:pPr>
             <a:r>
               <a:rPr sz="1200" b="0">
                 <a:solidFill>
                   <a:srgbClr val="5F6F63"/>
                 </a:solidFill>
-                <a:latin typeface="Arial"/>
+                <a:latin typeface="Roboto"/>
               </a:rPr>
               <a:t>Cost to raise a dollar, October so far</a:t>
             </a:r>
@@ -4143,12 +4282,17 @@
           </a:bodyPr>
           <a:lstStyle/>
           <a:p>
+            <a:pPr>
+              <a:defRPr>
+                <a:latin typeface="Roboto"/>
+              </a:defRPr>
+            </a:pPr>
             <a:r>
               <a:rPr sz="3000" b="1">
                 <a:solidFill>
                   <a:srgbClr val="2F7A5D"/>
                 </a:solidFill>
-                <a:latin typeface="Arial"/>
+                <a:latin typeface="Roboto"/>
               </a:rPr>
               <a:t>9¢</a:t>
             </a:r>
@@ -4177,12 +4321,17 @@
           </a:bodyPr>
           <a:lstStyle/>
           <a:p>
+            <a:pPr>
+              <a:defRPr>
+                <a:latin typeface="Roboto"/>
+              </a:defRPr>
+            </a:pPr>
             <a:r>
               <a:rPr sz="1100" b="0">
                 <a:solidFill>
                   <a:srgbClr val="5F6F63"/>
                 </a:solidFill>
-                <a:latin typeface="Arial"/>
+                <a:latin typeface="Roboto"/>
               </a:rPr>
               <a:t>September 20¢</a:t>
             </a:r>
@@ -4211,12 +4360,17 @@
           </a:bodyPr>
           <a:lstStyle/>
           <a:p>
+            <a:pPr>
+              <a:defRPr>
+                <a:latin typeface="Roboto"/>
+              </a:defRPr>
+            </a:pPr>
             <a:r>
               <a:rPr sz="900" b="0">
                 <a:solidFill>
                   <a:srgbClr val="5F6F63"/>
                 </a:solidFill>
-                <a:latin typeface="Arial"/>
+                <a:latin typeface="Roboto"/>
               </a:rPr>
               <a:t>board.pptx</a:t>
             </a:r>
@@ -4245,13 +4399,17 @@
           </a:bodyPr>
           <a:lstStyle/>
           <a:p>
-            <a:pPr algn="ctr"/>
+            <a:pPr algn="ctr">
+              <a:defRPr>
+                <a:latin typeface="Roboto"/>
+              </a:defRPr>
+            </a:pPr>
             <a:r>
               <a:rPr sz="900" b="0">
                 <a:solidFill>
                   <a:srgbClr val="5F6F63"/>
                 </a:solidFill>
-                <a:latin typeface="Arial"/>
+                <a:latin typeface="Roboto"/>
               </a:rPr>
               <a:t>Data retrieved 2pm, Tue 6 Oct 2026 · Sample data</a:t>
             </a:r>
@@ -4280,13 +4438,17 @@
           </a:bodyPr>
           <a:lstStyle/>
           <a:p>
-            <a:pPr algn="r"/>
+            <a:pPr algn="r">
+              <a:defRPr>
+                <a:latin typeface="Roboto"/>
+              </a:defRPr>
+            </a:pPr>
             <a:r>
               <a:rPr sz="900" b="0">
                 <a:solidFill>
                   <a:srgbClr val="5F6F63"/>
                 </a:solidFill>
-                <a:latin typeface="Arial"/>
+                <a:latin typeface="Roboto"/>
               </a:rPr>
               <a:t>Slide 2 of 5</a:t>
             </a:r>
@@ -4350,7 +4512,11 @@
           <a:bodyPr rtlCol="0" anchor="ctr"/>
           <a:lstStyle/>
           <a:p>
-            <a:pPr algn="ctr"/>
+            <a:pPr algn="ctr">
+              <a:defRPr>
+                <a:latin typeface="Roboto"/>
+              </a:defRPr>
+            </a:pPr>
           </a:p>
         </p:txBody>
       </p:sp>
@@ -4376,12 +4542,17 @@
           </a:bodyPr>
           <a:lstStyle/>
           <a:p>
+            <a:pPr>
+              <a:defRPr>
+                <a:latin typeface="Roboto"/>
+              </a:defRPr>
+            </a:pPr>
             <a:r>
               <a:rPr sz="1000" b="0">
                 <a:solidFill>
                   <a:srgbClr val="5F6F63"/>
                 </a:solidFill>
-                <a:latin typeface="Arial"/>
+                <a:latin typeface="Roboto"/>
               </a:rPr>
               <a:t>Sample Community Services Ltd · What does the board need to see?</a:t>
             </a:r>
@@ -4410,12 +4581,17 @@
           </a:bodyPr>
           <a:lstStyle/>
           <a:p>
+            <a:pPr>
+              <a:defRPr>
+                <a:latin typeface="Roboto"/>
+              </a:defRPr>
+            </a:pPr>
             <a:r>
               <a:rPr sz="2400" b="1">
                 <a:solidFill>
                   <a:srgbClr val="25342A"/>
                 </a:solidFill>
-                <a:latin typeface="Arial"/>
+                <a:latin typeface="Roboto"/>
               </a:rPr>
               <a:t>What the board should note</a:t>
             </a:r>
@@ -4463,7 +4639,11 @@
           <a:bodyPr rtlCol="0" anchor="ctr"/>
           <a:lstStyle/>
           <a:p>
-            <a:pPr algn="ctr"/>
+            <a:pPr algn="ctr">
+              <a:defRPr>
+                <a:latin typeface="Roboto"/>
+              </a:defRPr>
+            </a:pPr>
           </a:p>
         </p:txBody>
       </p:sp>
@@ -4489,12 +4669,17 @@
           </a:bodyPr>
           <a:lstStyle/>
           <a:p>
+            <a:pPr>
+              <a:defRPr>
+                <a:latin typeface="Roboto"/>
+              </a:defRPr>
+            </a:pPr>
             <a:r>
               <a:rPr sz="1100" b="1">
                 <a:solidFill>
                   <a:srgbClr val="5F6F63"/>
                 </a:solidFill>
-                <a:latin typeface="Arial"/>
+                <a:latin typeface="Roboto"/>
               </a:rPr>
               <a:t>WHAT THE BOARD SHOULD NOTE</a:t>
             </a:r>
@@ -4523,34 +4708,49 @@
           </a:bodyPr>
           <a:lstStyle/>
           <a:p>
+            <a:pPr>
+              <a:defRPr>
+                <a:latin typeface="Roboto"/>
+              </a:defRPr>
+            </a:pPr>
             <a:r>
               <a:rPr sz="1600" b="0">
                 <a:solidFill>
                   <a:srgbClr val="25342A"/>
                 </a:solidFill>
-                <a:latin typeface="Arial"/>
+                <a:latin typeface="Roboto"/>
               </a:rPr>
               <a:t>• Unrestricted cash covers 1.8 months of spending, against a 3.0 months reserves target.</a:t>
             </a:r>
           </a:p>
           <a:p>
+            <a:pPr>
+              <a:defRPr>
+                <a:latin typeface="Roboto"/>
+              </a:defRPr>
+            </a:pPr>
             <a:r>
               <a:rPr sz="1600" b="0">
                 <a:solidFill>
                   <a:srgbClr val="25342A"/>
                 </a:solidFill>
-                <a:latin typeface="Arial"/>
+                <a:latin typeface="Roboto"/>
               </a:rPr>
               <a:t>• 4 grant(s) end within 6 months with $203,366 still to spend. Housing support: $97,842 left in 2 months ($48,921 a month needed, against $4,458 spent in October so far).</a:t>
             </a:r>
           </a:p>
           <a:p>
+            <a:pPr>
+              <a:defRPr>
+                <a:latin typeface="Roboto"/>
+              </a:defRPr>
+            </a:pPr>
             <a:r>
               <a:rPr sz="1600" b="0">
                 <a:solidFill>
                   <a:srgbClr val="25342A"/>
                 </a:solidFill>
-                <a:latin typeface="Arial"/>
+                <a:latin typeface="Roboto"/>
               </a:rPr>
               <a:t>• Fundraising cost 9¢ per dollar in October so far: grants the cheapest (9¢), donations the dearest (10¢).</a:t>
             </a:r>
@@ -4579,12 +4779,17 @@
           </a:bodyPr>
           <a:lstStyle/>
           <a:p>
+            <a:pPr>
+              <a:defRPr>
+                <a:latin typeface="Roboto"/>
+              </a:defRPr>
+            </a:pPr>
             <a:r>
               <a:rPr sz="900" b="0">
                 <a:solidFill>
                   <a:srgbClr val="5F6F63"/>
                 </a:solidFill>
-                <a:latin typeface="Arial"/>
+                <a:latin typeface="Roboto"/>
               </a:rPr>
               <a:t>board.pptx</a:t>
             </a:r>
@@ -4613,13 +4818,17 @@
           </a:bodyPr>
           <a:lstStyle/>
           <a:p>
-            <a:pPr algn="ctr"/>
+            <a:pPr algn="ctr">
+              <a:defRPr>
+                <a:latin typeface="Roboto"/>
+              </a:defRPr>
+            </a:pPr>
             <a:r>
               <a:rPr sz="900" b="0">
                 <a:solidFill>
                   <a:srgbClr val="5F6F63"/>
                 </a:solidFill>
-                <a:latin typeface="Arial"/>
+                <a:latin typeface="Roboto"/>
               </a:rPr>
               <a:t>Data retrieved 2pm, Tue 6 Oct 2026 · Sample data</a:t>
             </a:r>
@@ -4648,13 +4857,17 @@
           </a:bodyPr>
           <a:lstStyle/>
           <a:p>
-            <a:pPr algn="r"/>
+            <a:pPr algn="r">
+              <a:defRPr>
+                <a:latin typeface="Roboto"/>
+              </a:defRPr>
+            </a:pPr>
             <a:r>
               <a:rPr sz="900" b="0">
                 <a:solidFill>
                   <a:srgbClr val="5F6F63"/>
                 </a:solidFill>
-                <a:latin typeface="Arial"/>
+                <a:latin typeface="Roboto"/>
               </a:rPr>
               <a:t>Slide 3 of 5</a:t>
             </a:r>
@@ -4718,7 +4931,11 @@
           <a:bodyPr rtlCol="0" anchor="ctr"/>
           <a:lstStyle/>
           <a:p>
-            <a:pPr algn="ctr"/>
+            <a:pPr algn="ctr">
+              <a:defRPr>
+                <a:latin typeface="Roboto"/>
+              </a:defRPr>
+            </a:pPr>
           </a:p>
         </p:txBody>
       </p:sp>
@@ -4744,12 +4961,17 @@
           </a:bodyPr>
           <a:lstStyle/>
           <a:p>
+            <a:pPr>
+              <a:defRPr>
+                <a:latin typeface="Roboto"/>
+              </a:defRPr>
+            </a:pPr>
             <a:r>
               <a:rPr sz="1000" b="0">
                 <a:solidFill>
                   <a:srgbClr val="5F6F63"/>
                 </a:solidFill>
-                <a:latin typeface="Arial"/>
+                <a:latin typeface="Roboto"/>
               </a:rPr>
               <a:t>Sample Community Services Ltd · What does the board need to see?</a:t>
             </a:r>
@@ -4778,12 +5000,17 @@
           </a:bodyPr>
           <a:lstStyle/>
           <a:p>
+            <a:pPr>
+              <a:defRPr>
+                <a:latin typeface="Roboto"/>
+              </a:defRPr>
+            </a:pPr>
             <a:r>
               <a:rPr sz="2400" b="1">
                 <a:solidFill>
                   <a:srgbClr val="25342A"/>
                 </a:solidFill>
-                <a:latin typeface="Arial"/>
+                <a:latin typeface="Roboto"/>
               </a:rPr>
               <a:t>Grants</a:t>
             </a:r>
@@ -4822,11 +5049,17 @@
                     <a:bodyPr/>
                     <a:lstStyle/>
                     <a:p>
+                      <a:pPr>
+                        <a:defRPr>
+                          <a:latin typeface="Roboto"/>
+                        </a:defRPr>
+                      </a:pPr>
                       <a:r>
                         <a:rPr sz="1100" b="1">
                           <a:solidFill>
                             <a:srgbClr val="FFFFFF"/>
                           </a:solidFill>
+                          <a:latin typeface="Roboto"/>
                         </a:rPr>
                         <a:t>Program</a:t>
                       </a:r>
@@ -4843,12 +5076,17 @@
                     <a:bodyPr/>
                     <a:lstStyle/>
                     <a:p>
-                      <a:pPr algn="r"/>
+                      <a:pPr algn="r">
+                        <a:defRPr>
+                          <a:latin typeface="Roboto"/>
+                        </a:defRPr>
+                      </a:pPr>
                       <a:r>
                         <a:rPr sz="1100" b="1">
                           <a:solidFill>
                             <a:srgbClr val="FFFFFF"/>
                           </a:solidFill>
+                          <a:latin typeface="Roboto"/>
                         </a:rPr>
                         <a:t>Spent to date</a:t>
                       </a:r>
@@ -4865,12 +5103,17 @@
                     <a:bodyPr/>
                     <a:lstStyle/>
                     <a:p>
-                      <a:pPr algn="r"/>
+                      <a:pPr algn="r">
+                        <a:defRPr>
+                          <a:latin typeface="Roboto"/>
+                        </a:defRPr>
+                      </a:pPr>
                       <a:r>
                         <a:rPr sz="1100" b="1">
                           <a:solidFill>
                             <a:srgbClr val="FFFFFF"/>
                           </a:solidFill>
+                          <a:latin typeface="Roboto"/>
                         </a:rPr>
                         <a:t>Budget to date</a:t>
                       </a:r>
@@ -4887,12 +5130,17 @@
                     <a:bodyPr/>
                     <a:lstStyle/>
                     <a:p>
-                      <a:pPr algn="r"/>
+                      <a:pPr algn="r">
+                        <a:defRPr>
+                          <a:latin typeface="Roboto"/>
+                        </a:defRPr>
+                      </a:pPr>
                       <a:r>
                         <a:rPr sz="1100" b="1">
                           <a:solidFill>
                             <a:srgbClr val="FFFFFF"/>
                           </a:solidFill>
+                          <a:latin typeface="Roboto"/>
                         </a:rPr>
                         <a:t>Against budget</a:t>
                       </a:r>
@@ -4909,12 +5157,17 @@
                     <a:bodyPr/>
                     <a:lstStyle/>
                     <a:p>
-                      <a:pPr algn="r"/>
+                      <a:pPr algn="r">
+                        <a:defRPr>
+                          <a:latin typeface="Roboto"/>
+                        </a:defRPr>
+                      </a:pPr>
                       <a:r>
                         <a:rPr sz="1100" b="1">
                           <a:solidFill>
                             <a:srgbClr val="FFFFFF"/>
                           </a:solidFill>
+                          <a:latin typeface="Roboto"/>
                         </a:rPr>
                         <a:t>Still to spend</a:t>
                       </a:r>
@@ -4931,12 +5184,17 @@
                     <a:bodyPr/>
                     <a:lstStyle/>
                     <a:p>
-                      <a:pPr algn="r"/>
+                      <a:pPr algn="r">
+                        <a:defRPr>
+                          <a:latin typeface="Roboto"/>
+                        </a:defRPr>
+                      </a:pPr>
                       <a:r>
                         <a:rPr sz="1100" b="1">
                           <a:solidFill>
                             <a:srgbClr val="FFFFFF"/>
                           </a:solidFill>
+                          <a:latin typeface="Roboto"/>
                         </a:rPr>
                         <a:t>Months left</a:t>
                       </a:r>
@@ -4955,11 +5213,17 @@
                     <a:bodyPr/>
                     <a:lstStyle/>
                     <a:p>
+                      <a:pPr>
+                        <a:defRPr>
+                          <a:latin typeface="Roboto"/>
+                        </a:defRPr>
+                      </a:pPr>
                       <a:r>
                         <a:rPr sz="1050">
                           <a:solidFill>
                             <a:srgbClr val="25342A"/>
                           </a:solidFill>
+                          <a:latin typeface="Roboto"/>
                         </a:rPr>
                         <a:t>Housing support</a:t>
                       </a:r>
@@ -4976,12 +5240,17 @@
                     <a:bodyPr/>
                     <a:lstStyle/>
                     <a:p>
-                      <a:pPr algn="r"/>
+                      <a:pPr algn="r">
+                        <a:defRPr>
+                          <a:latin typeface="Roboto"/>
+                        </a:defRPr>
+                      </a:pPr>
                       <a:r>
                         <a:rPr sz="1050">
                           <a:solidFill>
                             <a:srgbClr val="25342A"/>
                           </a:solidFill>
+                          <a:latin typeface="Roboto"/>
                         </a:rPr>
                         <a:t>$262,158</a:t>
                       </a:r>
@@ -4998,12 +5267,17 @@
                     <a:bodyPr/>
                     <a:lstStyle/>
                     <a:p>
-                      <a:pPr algn="r"/>
+                      <a:pPr algn="r">
+                        <a:defRPr>
+                          <a:latin typeface="Roboto"/>
+                        </a:defRPr>
+                      </a:pPr>
                       <a:r>
                         <a:rPr sz="1050">
                           <a:solidFill>
                             <a:srgbClr val="25342A"/>
                           </a:solidFill>
+                          <a:latin typeface="Roboto"/>
                         </a:rPr>
                         <a:t>$300,000</a:t>
                       </a:r>
@@ -5020,12 +5294,17 @@
                     <a:bodyPr/>
                     <a:lstStyle/>
                     <a:p>
-                      <a:pPr algn="r"/>
+                      <a:pPr algn="r">
+                        <a:defRPr>
+                          <a:latin typeface="Roboto"/>
+                        </a:defRPr>
+                      </a:pPr>
                       <a:r>
                         <a:rPr sz="1050">
                           <a:solidFill>
                             <a:srgbClr val="25342A"/>
                           </a:solidFill>
+                          <a:latin typeface="Roboto"/>
                         </a:rPr>
                         <a:t>87.4%</a:t>
                       </a:r>
@@ -5042,12 +5321,17 @@
                     <a:bodyPr/>
                     <a:lstStyle/>
                     <a:p>
-                      <a:pPr algn="r"/>
+                      <a:pPr algn="r">
+                        <a:defRPr>
+                          <a:latin typeface="Roboto"/>
+                        </a:defRPr>
+                      </a:pPr>
                       <a:r>
                         <a:rPr sz="1050">
                           <a:solidFill>
                             <a:srgbClr val="25342A"/>
                           </a:solidFill>
+                          <a:latin typeface="Roboto"/>
                         </a:rPr>
                         <a:t>$97,842</a:t>
                       </a:r>
@@ -5064,12 +5348,17 @@
                     <a:bodyPr/>
                     <a:lstStyle/>
                     <a:p>
-                      <a:pPr algn="r"/>
+                      <a:pPr algn="r">
+                        <a:defRPr>
+                          <a:latin typeface="Roboto"/>
+                        </a:defRPr>
+                      </a:pPr>
                       <a:r>
                         <a:rPr sz="1050">
                           <a:solidFill>
                             <a:srgbClr val="25342A"/>
                           </a:solidFill>
+                          <a:latin typeface="Roboto"/>
                         </a:rPr>
                         <a:t>2</a:t>
                       </a:r>
@@ -5088,11 +5377,17 @@
                     <a:bodyPr/>
                     <a:lstStyle/>
                     <a:p>
+                      <a:pPr>
+                        <a:defRPr>
+                          <a:latin typeface="Roboto"/>
+                        </a:defRPr>
+                      </a:pPr>
                       <a:r>
                         <a:rPr sz="1050">
                           <a:solidFill>
                             <a:srgbClr val="25342A"/>
                           </a:solidFill>
+                          <a:latin typeface="Roboto"/>
                         </a:rPr>
                         <a:t>Volunteer coordinator</a:t>
                       </a:r>
@@ -5109,12 +5404,17 @@
                     <a:bodyPr/>
                     <a:lstStyle/>
                     <a:p>
-                      <a:pPr algn="r"/>
+                      <a:pPr algn="r">
+                        <a:defRPr>
+                          <a:latin typeface="Roboto"/>
+                        </a:defRPr>
+                      </a:pPr>
                       <a:r>
                         <a:rPr sz="1050">
                           <a:solidFill>
                             <a:srgbClr val="25342A"/>
                           </a:solidFill>
+                          <a:latin typeface="Roboto"/>
                         </a:rPr>
                         <a:t>$21,429</a:t>
                       </a:r>
@@ -5131,12 +5431,17 @@
                     <a:bodyPr/>
                     <a:lstStyle/>
                     <a:p>
-                      <a:pPr algn="r"/>
+                      <a:pPr algn="r">
+                        <a:defRPr>
+                          <a:latin typeface="Roboto"/>
+                        </a:defRPr>
+                      </a:pPr>
                       <a:r>
                         <a:rPr sz="1050">
                           <a:solidFill>
                             <a:srgbClr val="25342A"/>
                           </a:solidFill>
+                          <a:latin typeface="Roboto"/>
                         </a:rPr>
                         <a:t>$24,000</a:t>
                       </a:r>
@@ -5153,12 +5458,17 @@
                     <a:bodyPr/>
                     <a:lstStyle/>
                     <a:p>
-                      <a:pPr algn="r"/>
+                      <a:pPr algn="r">
+                        <a:defRPr>
+                          <a:latin typeface="Roboto"/>
+                        </a:defRPr>
+                      </a:pPr>
                       <a:r>
                         <a:rPr sz="1050">
                           <a:solidFill>
                             <a:srgbClr val="25342A"/>
                           </a:solidFill>
+                          <a:latin typeface="Roboto"/>
                         </a:rPr>
                         <a:t>89.3%</a:t>
                       </a:r>
@@ -5175,12 +5485,17 @@
                     <a:bodyPr/>
                     <a:lstStyle/>
                     <a:p>
-                      <a:pPr algn="r"/>
+                      <a:pPr algn="r">
+                        <a:defRPr>
+                          <a:latin typeface="Roboto"/>
+                        </a:defRPr>
+                      </a:pPr>
                       <a:r>
                         <a:rPr sz="1050">
                           <a:solidFill>
                             <a:srgbClr val="25342A"/>
                           </a:solidFill>
+                          <a:latin typeface="Roboto"/>
                         </a:rPr>
                         <a:t>$14,571</a:t>
                       </a:r>
@@ -5197,12 +5512,17 @@
                     <a:bodyPr/>
                     <a:lstStyle/>
                     <a:p>
-                      <a:pPr algn="r"/>
+                      <a:pPr algn="r">
+                        <a:defRPr>
+                          <a:latin typeface="Roboto"/>
+                        </a:defRPr>
+                      </a:pPr>
                       <a:r>
                         <a:rPr sz="1050">
                           <a:solidFill>
                             <a:srgbClr val="25342A"/>
                           </a:solidFill>
+                          <a:latin typeface="Roboto"/>
                         </a:rPr>
                         <a:t>4</a:t>
                       </a:r>
@@ -5221,11 +5541,17 @@
                     <a:bodyPr/>
                     <a:lstStyle/>
                     <a:p>
+                      <a:pPr>
+                        <a:defRPr>
+                          <a:latin typeface="Roboto"/>
+                        </a:defRPr>
+                      </a:pPr>
                       <a:r>
                         <a:rPr sz="1050">
                           <a:solidFill>
                             <a:srgbClr val="25342A"/>
                           </a:solidFill>
+                          <a:latin typeface="Roboto"/>
                         </a:rPr>
                         <a:t>Digital literacy</a:t>
                       </a:r>
@@ -5242,12 +5568,17 @@
                     <a:bodyPr/>
                     <a:lstStyle/>
                     <a:p>
-                      <a:pPr algn="r"/>
+                      <a:pPr algn="r">
+                        <a:defRPr>
+                          <a:latin typeface="Roboto"/>
+                        </a:defRPr>
+                      </a:pPr>
                       <a:r>
                         <a:rPr sz="1050">
                           <a:solidFill>
                             <a:srgbClr val="25342A"/>
                           </a:solidFill>
+                          <a:latin typeface="Roboto"/>
                         </a:rPr>
                         <a:t>$60,302</a:t>
                       </a:r>
@@ -5264,12 +5595,17 @@
                     <a:bodyPr/>
                     <a:lstStyle/>
                     <a:p>
-                      <a:pPr algn="r"/>
+                      <a:pPr algn="r">
+                        <a:defRPr>
+                          <a:latin typeface="Roboto"/>
+                        </a:defRPr>
+                      </a:pPr>
                       <a:r>
                         <a:rPr sz="1050">
                           <a:solidFill>
                             <a:srgbClr val="25342A"/>
                           </a:solidFill>
+                          <a:latin typeface="Roboto"/>
                         </a:rPr>
                         <a:t>$65,000</a:t>
                       </a:r>
@@ -5286,12 +5622,17 @@
                     <a:bodyPr/>
                     <a:lstStyle/>
                     <a:p>
-                      <a:pPr algn="r"/>
+                      <a:pPr algn="r">
+                        <a:defRPr>
+                          <a:latin typeface="Roboto"/>
+                        </a:defRPr>
+                      </a:pPr>
                       <a:r>
                         <a:rPr sz="1050">
                           <a:solidFill>
                             <a:srgbClr val="25342A"/>
                           </a:solidFill>
+                          <a:latin typeface="Roboto"/>
                         </a:rPr>
                         <a:t>92.8%</a:t>
                       </a:r>
@@ -5308,12 +5649,17 @@
                     <a:bodyPr/>
                     <a:lstStyle/>
                     <a:p>
-                      <a:pPr algn="r"/>
+                      <a:pPr algn="r">
+                        <a:defRPr>
+                          <a:latin typeface="Roboto"/>
+                        </a:defRPr>
+                      </a:pPr>
                       <a:r>
                         <a:rPr sz="1050">
                           <a:solidFill>
                             <a:srgbClr val="25342A"/>
                           </a:solidFill>
+                          <a:latin typeface="Roboto"/>
                         </a:rPr>
                         <a:t>$29,698</a:t>
                       </a:r>
@@ -5330,12 +5676,17 @@
                     <a:bodyPr/>
                     <a:lstStyle/>
                     <a:p>
-                      <a:pPr algn="r"/>
+                      <a:pPr algn="r">
+                        <a:defRPr>
+                          <a:latin typeface="Roboto"/>
+                        </a:defRPr>
+                      </a:pPr>
                       <a:r>
                         <a:rPr sz="1050">
                           <a:solidFill>
                             <a:srgbClr val="25342A"/>
                           </a:solidFill>
+                          <a:latin typeface="Roboto"/>
                         </a:rPr>
                         <a:t>5</a:t>
                       </a:r>
@@ -5354,11 +5705,17 @@
                     <a:bodyPr/>
                     <a:lstStyle/>
                     <a:p>
+                      <a:pPr>
+                        <a:defRPr>
+                          <a:latin typeface="Roboto"/>
+                        </a:defRPr>
+                      </a:pPr>
                       <a:r>
                         <a:rPr sz="1050">
                           <a:solidFill>
                             <a:srgbClr val="25342A"/>
                           </a:solidFill>
+                          <a:latin typeface="Roboto"/>
                         </a:rPr>
                         <a:t>Mental health first aid</a:t>
                       </a:r>
@@ -5375,12 +5732,17 @@
                     <a:bodyPr/>
                     <a:lstStyle/>
                     <a:p>
-                      <a:pPr algn="r"/>
+                      <a:pPr algn="r">
+                        <a:defRPr>
+                          <a:latin typeface="Roboto"/>
+                        </a:defRPr>
+                      </a:pPr>
                       <a:r>
                         <a:rPr sz="1050">
                           <a:solidFill>
                             <a:srgbClr val="25342A"/>
                           </a:solidFill>
+                          <a:latin typeface="Roboto"/>
                         </a:rPr>
                         <a:t>$58,745</a:t>
                       </a:r>
@@ -5397,12 +5759,17 @@
                     <a:bodyPr/>
                     <a:lstStyle/>
                     <a:p>
-                      <a:pPr algn="r"/>
+                      <a:pPr algn="r">
+                        <a:defRPr>
+                          <a:latin typeface="Roboto"/>
+                        </a:defRPr>
+                      </a:pPr>
                       <a:r>
                         <a:rPr sz="1050">
                           <a:solidFill>
                             <a:srgbClr val="25342A"/>
                           </a:solidFill>
+                          <a:latin typeface="Roboto"/>
                         </a:rPr>
                         <a:t>$70,000</a:t>
                       </a:r>
@@ -5419,12 +5786,17 @@
                     <a:bodyPr/>
                     <a:lstStyle/>
                     <a:p>
-                      <a:pPr algn="r"/>
+                      <a:pPr algn="r">
+                        <a:defRPr>
+                          <a:latin typeface="Roboto"/>
+                        </a:defRPr>
+                      </a:pPr>
                       <a:r>
                         <a:rPr sz="1050">
                           <a:solidFill>
                             <a:srgbClr val="25342A"/>
                           </a:solidFill>
+                          <a:latin typeface="Roboto"/>
                         </a:rPr>
                         <a:t>83.9%</a:t>
                       </a:r>
@@ -5441,12 +5813,17 @@
                     <a:bodyPr/>
                     <a:lstStyle/>
                     <a:p>
-                      <a:pPr algn="r"/>
+                      <a:pPr algn="r">
+                        <a:defRPr>
+                          <a:latin typeface="Roboto"/>
+                        </a:defRPr>
+                      </a:pPr>
                       <a:r>
                         <a:rPr sz="1050">
                           <a:solidFill>
                             <a:srgbClr val="25342A"/>
                           </a:solidFill>
+                          <a:latin typeface="Roboto"/>
                         </a:rPr>
                         <a:t>$61,255</a:t>
                       </a:r>
@@ -5463,12 +5840,17 @@
                     <a:bodyPr/>
                     <a:lstStyle/>
                     <a:p>
-                      <a:pPr algn="r"/>
+                      <a:pPr algn="r">
+                        <a:defRPr>
+                          <a:latin typeface="Roboto"/>
+                        </a:defRPr>
+                      </a:pPr>
                       <a:r>
                         <a:rPr sz="1050">
                           <a:solidFill>
                             <a:srgbClr val="25342A"/>
                           </a:solidFill>
+                          <a:latin typeface="Roboto"/>
                         </a:rPr>
                         <a:t>5</a:t>
                       </a:r>
@@ -5487,11 +5869,17 @@
                     <a:bodyPr/>
                     <a:lstStyle/>
                     <a:p>
+                      <a:pPr>
+                        <a:defRPr>
+                          <a:latin typeface="Roboto"/>
+                        </a:defRPr>
+                      </a:pPr>
                       <a:r>
                         <a:rPr sz="1050">
                           <a:solidFill>
                             <a:srgbClr val="25342A"/>
                           </a:solidFill>
+                          <a:latin typeface="Roboto"/>
                         </a:rPr>
                         <a:t>Youth outreach</a:t>
                       </a:r>
@@ -5508,12 +5896,17 @@
                     <a:bodyPr/>
                     <a:lstStyle/>
                     <a:p>
-                      <a:pPr algn="r"/>
+                      <a:pPr algn="r">
+                        <a:defRPr>
+                          <a:latin typeface="Roboto"/>
+                        </a:defRPr>
+                      </a:pPr>
                       <a:r>
                         <a:rPr sz="1050">
                           <a:solidFill>
                             <a:srgbClr val="25342A"/>
                           </a:solidFill>
+                          <a:latin typeface="Roboto"/>
                         </a:rPr>
                         <a:t>$309,558</a:t>
                       </a:r>
@@ -5530,12 +5923,17 @@
                     <a:bodyPr/>
                     <a:lstStyle/>
                     <a:p>
-                      <a:pPr algn="r"/>
+                      <a:pPr algn="r">
+                        <a:defRPr>
+                          <a:latin typeface="Roboto"/>
+                        </a:defRPr>
+                      </a:pPr>
                       <a:r>
                         <a:rPr sz="1050">
                           <a:solidFill>
                             <a:srgbClr val="25342A"/>
                           </a:solidFill>
+                          <a:latin typeface="Roboto"/>
                         </a:rPr>
                         <a:t>$320,000</a:t>
                       </a:r>
@@ -5552,12 +5950,17 @@
                     <a:bodyPr/>
                     <a:lstStyle/>
                     <a:p>
-                      <a:pPr algn="r"/>
+                      <a:pPr algn="r">
+                        <a:defRPr>
+                          <a:latin typeface="Roboto"/>
+                        </a:defRPr>
+                      </a:pPr>
                       <a:r>
                         <a:rPr sz="1050">
                           <a:solidFill>
                             <a:srgbClr val="25342A"/>
                           </a:solidFill>
+                          <a:latin typeface="Roboto"/>
                         </a:rPr>
                         <a:t>96.7%</a:t>
                       </a:r>
@@ -5574,12 +5977,17 @@
                     <a:bodyPr/>
                     <a:lstStyle/>
                     <a:p>
-                      <a:pPr algn="r"/>
+                      <a:pPr algn="r">
+                        <a:defRPr>
+                          <a:latin typeface="Roboto"/>
+                        </a:defRPr>
+                      </a:pPr>
                       <a:r>
                         <a:rPr sz="1050">
                           <a:solidFill>
                             <a:srgbClr val="25342A"/>
                           </a:solidFill>
+                          <a:latin typeface="Roboto"/>
                         </a:rPr>
                         <a:t>$170,442</a:t>
                       </a:r>
@@ -5596,12 +6004,17 @@
                     <a:bodyPr/>
                     <a:lstStyle/>
                     <a:p>
-                      <a:pPr algn="r"/>
+                      <a:pPr algn="r">
+                        <a:defRPr>
+                          <a:latin typeface="Roboto"/>
+                        </a:defRPr>
+                      </a:pPr>
                       <a:r>
                         <a:rPr sz="1050">
                           <a:solidFill>
                             <a:srgbClr val="25342A"/>
                           </a:solidFill>
+                          <a:latin typeface="Roboto"/>
                         </a:rPr>
                         <a:t>8</a:t>
                       </a:r>
@@ -5620,11 +6033,17 @@
                     <a:bodyPr/>
                     <a:lstStyle/>
                     <a:p>
+                      <a:pPr>
+                        <a:defRPr>
+                          <a:latin typeface="Roboto"/>
+                        </a:defRPr>
+                      </a:pPr>
                       <a:r>
                         <a:rPr sz="1050">
                           <a:solidFill>
                             <a:srgbClr val="25342A"/>
                           </a:solidFill>
+                          <a:latin typeface="Roboto"/>
                         </a:rPr>
                         <a:t>Community meals</a:t>
                       </a:r>
@@ -5641,12 +6060,17 @@
                     <a:bodyPr/>
                     <a:lstStyle/>
                     <a:p>
-                      <a:pPr algn="r"/>
+                      <a:pPr algn="r">
+                        <a:defRPr>
+                          <a:latin typeface="Roboto"/>
+                        </a:defRPr>
+                      </a:pPr>
                       <a:r>
                         <a:rPr sz="1050">
                           <a:solidFill>
                             <a:srgbClr val="25342A"/>
                           </a:solidFill>
+                          <a:latin typeface="Roboto"/>
                         </a:rPr>
                         <a:t>$12,615</a:t>
                       </a:r>
@@ -5663,12 +6087,17 @@
                     <a:bodyPr/>
                     <a:lstStyle/>
                     <a:p>
-                      <a:pPr algn="r"/>
+                      <a:pPr algn="r">
+                        <a:defRPr>
+                          <a:latin typeface="Roboto"/>
+                        </a:defRPr>
+                      </a:pPr>
                       <a:r>
                         <a:rPr sz="1050">
                           <a:solidFill>
                             <a:srgbClr val="25342A"/>
                           </a:solidFill>
+                          <a:latin typeface="Roboto"/>
                         </a:rPr>
                         <a:t>$16,000</a:t>
                       </a:r>
@@ -5685,12 +6114,17 @@
                     <a:bodyPr/>
                     <a:lstStyle/>
                     <a:p>
-                      <a:pPr algn="r"/>
+                      <a:pPr algn="r">
+                        <a:defRPr>
+                          <a:latin typeface="Roboto"/>
+                        </a:defRPr>
+                      </a:pPr>
                       <a:r>
                         <a:rPr sz="1050">
                           <a:solidFill>
                             <a:srgbClr val="25342A"/>
                           </a:solidFill>
+                          <a:latin typeface="Roboto"/>
                         </a:rPr>
                         <a:t>78.8%</a:t>
                       </a:r>
@@ -5707,12 +6141,17 @@
                     <a:bodyPr/>
                     <a:lstStyle/>
                     <a:p>
-                      <a:pPr algn="r"/>
+                      <a:pPr algn="r">
+                        <a:defRPr>
+                          <a:latin typeface="Roboto"/>
+                        </a:defRPr>
+                      </a:pPr>
                       <a:r>
                         <a:rPr sz="1050">
                           <a:solidFill>
                             <a:srgbClr val="25342A"/>
                           </a:solidFill>
+                          <a:latin typeface="Roboto"/>
                         </a:rPr>
                         <a:t>$35,385</a:t>
                       </a:r>
@@ -5729,12 +6168,17 @@
                     <a:bodyPr/>
                     <a:lstStyle/>
                     <a:p>
-                      <a:pPr algn="r"/>
+                      <a:pPr algn="r">
+                        <a:defRPr>
+                          <a:latin typeface="Roboto"/>
+                        </a:defRPr>
+                      </a:pPr>
                       <a:r>
                         <a:rPr sz="1050">
                           <a:solidFill>
                             <a:srgbClr val="25342A"/>
                           </a:solidFill>
+                          <a:latin typeface="Roboto"/>
                         </a:rPr>
                         <a:t>8</a:t>
                       </a:r>
@@ -5773,12 +6217,17 @@
           </a:bodyPr>
           <a:lstStyle/>
           <a:p>
+            <a:pPr>
+              <a:defRPr>
+                <a:latin typeface="Roboto"/>
+              </a:defRPr>
+            </a:pPr>
             <a:r>
               <a:rPr sz="900" b="0">
                 <a:solidFill>
                   <a:srgbClr val="5F6F63"/>
                 </a:solidFill>
-                <a:latin typeface="Arial"/>
+                <a:latin typeface="Roboto"/>
               </a:rPr>
               <a:t>board.pptx</a:t>
             </a:r>
@@ -5807,13 +6256,17 @@
           </a:bodyPr>
           <a:lstStyle/>
           <a:p>
-            <a:pPr algn="ctr"/>
+            <a:pPr algn="ctr">
+              <a:defRPr>
+                <a:latin typeface="Roboto"/>
+              </a:defRPr>
+            </a:pPr>
             <a:r>
               <a:rPr sz="900" b="0">
                 <a:solidFill>
                   <a:srgbClr val="5F6F63"/>
                 </a:solidFill>
-                <a:latin typeface="Arial"/>
+                <a:latin typeface="Roboto"/>
               </a:rPr>
               <a:t>Data retrieved 2pm, Tue 6 Oct 2026 · Sample data</a:t>
             </a:r>
@@ -5842,13 +6295,17 @@
           </a:bodyPr>
           <a:lstStyle/>
           <a:p>
-            <a:pPr algn="r"/>
+            <a:pPr algn="r">
+              <a:defRPr>
+                <a:latin typeface="Roboto"/>
+              </a:defRPr>
+            </a:pPr>
             <a:r>
               <a:rPr sz="900" b="0">
                 <a:solidFill>
                   <a:srgbClr val="5F6F63"/>
                 </a:solidFill>
-                <a:latin typeface="Arial"/>
+                <a:latin typeface="Roboto"/>
               </a:rPr>
               <a:t>Slide 4 of 5</a:t>
             </a:r>
@@ -5912,7 +6369,11 @@
           <a:bodyPr rtlCol="0" anchor="ctr"/>
           <a:lstStyle/>
           <a:p>
-            <a:pPr algn="ctr"/>
+            <a:pPr algn="ctr">
+              <a:defRPr>
+                <a:latin typeface="Roboto"/>
+              </a:defRPr>
+            </a:pPr>
           </a:p>
         </p:txBody>
       </p:sp>
@@ -5938,12 +6399,17 @@
           </a:bodyPr>
           <a:lstStyle/>
           <a:p>
+            <a:pPr>
+              <a:defRPr>
+                <a:latin typeface="Roboto"/>
+              </a:defRPr>
+            </a:pPr>
             <a:r>
               <a:rPr sz="1000" b="0">
                 <a:solidFill>
                   <a:srgbClr val="5F6F63"/>
                 </a:solidFill>
-                <a:latin typeface="Arial"/>
+                <a:latin typeface="Roboto"/>
               </a:rPr>
               <a:t>Sample Community Services Ltd · What does the board need to see?</a:t>
             </a:r>
@@ -5972,12 +6438,17 @@
           </a:bodyPr>
           <a:lstStyle/>
           <a:p>
+            <a:pPr>
+              <a:defRPr>
+                <a:latin typeface="Roboto"/>
+              </a:defRPr>
+            </a:pPr>
             <a:r>
               <a:rPr sz="2400" b="1">
                 <a:solidFill>
                   <a:srgbClr val="25342A"/>
                 </a:solidFill>
-                <a:latin typeface="Arial"/>
+                <a:latin typeface="Roboto"/>
               </a:rPr>
               <a:t>Decisions to make</a:t>
             </a:r>
@@ -6025,7 +6496,11 @@
           <a:bodyPr rtlCol="0" anchor="ctr"/>
           <a:lstStyle/>
           <a:p>
-            <a:pPr algn="ctr"/>
+            <a:pPr algn="ctr">
+              <a:defRPr>
+                <a:latin typeface="Roboto"/>
+              </a:defRPr>
+            </a:pPr>
           </a:p>
         </p:txBody>
       </p:sp>
@@ -6051,12 +6526,17 @@
           </a:bodyPr>
           <a:lstStyle/>
           <a:p>
+            <a:pPr>
+              <a:defRPr>
+                <a:latin typeface="Roboto"/>
+              </a:defRPr>
+            </a:pPr>
             <a:r>
               <a:rPr sz="1100" b="1">
                 <a:solidFill>
                   <a:srgbClr val="5F6F63"/>
                 </a:solidFill>
-                <a:latin typeface="Arial"/>
+                <a:latin typeface="Roboto"/>
               </a:rPr>
               <a:t>DECISIONS TO MAKE</a:t>
             </a:r>
@@ -6085,34 +6565,49 @@
           </a:bodyPr>
           <a:lstStyle/>
           <a:p>
+            <a:pPr>
+              <a:defRPr>
+                <a:latin typeface="Roboto"/>
+              </a:defRPr>
+            </a:pPr>
             <a:r>
               <a:rPr sz="1600" b="0">
                 <a:solidFill>
                   <a:srgbClr val="25342A"/>
                 </a:solidFill>
-                <a:latin typeface="Arial"/>
+                <a:latin typeface="Roboto"/>
               </a:rPr>
               <a:t>• Housing support: lift spending to $48,921 a month, or ask State Housing Program about carrying the balance over.</a:t>
             </a:r>
           </a:p>
           <a:p>
+            <a:pPr>
+              <a:defRPr>
+                <a:latin typeface="Roboto"/>
+              </a:defRPr>
+            </a:pPr>
             <a:r>
               <a:rPr sz="1600" b="0">
                 <a:solidFill>
                   <a:srgbClr val="25342A"/>
                 </a:solidFill>
-                <a:latin typeface="Arial"/>
+                <a:latin typeface="Roboto"/>
               </a:rPr>
               <a:t>• Reserves: how much of each month's surplus goes to reserves, and by when the target is reached.</a:t>
             </a:r>
           </a:p>
           <a:p>
+            <a:pPr>
+              <a:defRPr>
+                <a:latin typeface="Roboto"/>
+              </a:defRPr>
+            </a:pPr>
             <a:r>
               <a:rPr sz="1600" b="0">
                 <a:solidFill>
                   <a:srgbClr val="25342A"/>
                 </a:solidFill>
-                <a:latin typeface="Arial"/>
+                <a:latin typeface="Roboto"/>
               </a:rPr>
               <a:t>• Fundraising: where the next spare hours go, given what each source costs to raise.</a:t>
             </a:r>
@@ -6141,12 +6636,17 @@
           </a:bodyPr>
           <a:lstStyle/>
           <a:p>
+            <a:pPr>
+              <a:defRPr>
+                <a:latin typeface="Roboto"/>
+              </a:defRPr>
+            </a:pPr>
             <a:r>
               <a:rPr sz="900" b="0">
                 <a:solidFill>
                   <a:srgbClr val="5F6F63"/>
                 </a:solidFill>
-                <a:latin typeface="Arial"/>
+                <a:latin typeface="Roboto"/>
               </a:rPr>
               <a:t>board.pptx</a:t>
             </a:r>
@@ -6175,13 +6675,17 @@
           </a:bodyPr>
           <a:lstStyle/>
           <a:p>
-            <a:pPr algn="ctr"/>
+            <a:pPr algn="ctr">
+              <a:defRPr>
+                <a:latin typeface="Roboto"/>
+              </a:defRPr>
+            </a:pPr>
             <a:r>
               <a:rPr sz="900" b="0">
                 <a:solidFill>
                   <a:srgbClr val="5F6F63"/>
                 </a:solidFill>
-                <a:latin typeface="Arial"/>
+                <a:latin typeface="Roboto"/>
               </a:rPr>
               <a:t>Data retrieved 2pm, Tue 6 Oct 2026 · Sample data</a:t>
             </a:r>
@@ -6210,13 +6714,17 @@
           </a:bodyPr>
           <a:lstStyle/>
           <a:p>
-            <a:pPr algn="r"/>
+            <a:pPr algn="r">
+              <a:defRPr>
+                <a:latin typeface="Roboto"/>
+              </a:defRPr>
+            </a:pPr>
             <a:r>
               <a:rPr sz="900" b="0">
                 <a:solidFill>
                   <a:srgbClr val="5F6F63"/>
                 </a:solidFill>
-                <a:latin typeface="Arial"/>
+                <a:latin typeface="Roboto"/>
               </a:rPr>
               <a:t>Slide 5 of 5</a:t>
             </a:r>

--- a/media/exports/reports/2026-10/board.pptx
+++ b/media/exports/reports/2026-10/board.pptx
@@ -4736,7 +4736,7 @@
                 </a:solidFill>
                 <a:latin typeface="Roboto"/>
               </a:rPr>
-              <a:t>• 4 grant(s) end within 6 months with $203,366 still to spend. Housing support: $97,842 left in 2 months ($48,921 a month needed, against $4,458 spent in October so far).</a:t>
+              <a:t>• 4 grants end within 6 months with $203,366 still to spend. Housing support: $97,842 left in 2 months ($48,921 a month needed, against $4,458 spent in October so far).</a:t>
             </a:r>
           </a:p>
           <a:p>

--- a/media/exports/reports/2026-10/board.pptx
+++ b/media/exports/reports/2026-10/board.pptx
@@ -6,10 +6,7 @@
   </p:sldMasterIdLst>
   <p:sldIdLst>
     <p:sldId id="256" r:id="rId7"/>
-    <p:sldId id="257" r:id="rId8"/>
-    <p:sldId id="258" r:id="rId9"/>
-    <p:sldId id="259" r:id="rId10"/>
-    <p:sldId id="260" r:id="rId11"/>
+    <p:sldId id="257" r:id="rId9"/>
   </p:sldIdLst>
   <p:sldSz cx="12191695" cy="6858000" type="screen4x3"/>
   <p:notesSz cx="6858000" cy="9144000"/>
@@ -109,6 +106,496 @@
     </a:lvl9pPr>
   </p:defaultTextStyle>
 </p:presentation>
+</file>
+
+<file path=ppt/notesMasters/notesMaster1.xml><?xml version="1.0" encoding="utf-8"?>
+<p:notesMaster xmlns:a="http://schemas.openxmlformats.org/drawingml/2006/main" xmlns:p="http://schemas.openxmlformats.org/presentationml/2006/main" xmlns:r="http://schemas.openxmlformats.org/officeDocument/2006/relationships">
+  <p:cSld>
+    <p:bg>
+      <p:bgRef idx="1001">
+        <a:schemeClr val="bg1"/>
+      </p:bgRef>
+    </p:bg>
+    <p:spTree>
+      <p:nvGrpSpPr>
+        <p:cNvPr id="1" name=""/>
+        <p:cNvGrpSpPr/>
+        <p:nvPr/>
+      </p:nvGrpSpPr>
+      <p:grpSpPr>
+        <a:xfrm>
+          <a:off x="0" y="0"/>
+          <a:ext cx="0" cy="0"/>
+          <a:chOff x="0" y="0"/>
+          <a:chExt cx="0" cy="0"/>
+        </a:xfrm>
+      </p:grpSpPr>
+      <p:sp>
+        <p:nvSpPr>
+          <p:cNvPr id="2" name="Header Placeholder 1"/>
+          <p:cNvSpPr>
+            <a:spLocks noGrp="1"/>
+          </p:cNvSpPr>
+          <p:nvPr>
+            <p:ph type="hdr" sz="quarter"/>
+          </p:nvPr>
+        </p:nvSpPr>
+        <p:spPr>
+          <a:xfrm>
+            <a:off x="0" y="0"/>
+            <a:ext cx="2971800" cy="457200"/>
+          </a:xfrm>
+          <a:prstGeom prst="rect">
+            <a:avLst/>
+          </a:prstGeom>
+        </p:spPr>
+        <p:txBody>
+          <a:bodyPr vert="horz" lIns="91440" tIns="45720" rIns="91440" bIns="45720" rtlCol="0"/>
+          <a:lstStyle>
+            <a:lvl1pPr algn="l">
+              <a:defRPr sz="1200"/>
+            </a:lvl1pPr>
+          </a:lstStyle>
+          <a:p>
+            <a:endParaRPr lang="en-US"/>
+          </a:p>
+        </p:txBody>
+      </p:sp>
+      <p:sp>
+        <p:nvSpPr>
+          <p:cNvPr id="3" name="Date Placeholder 2"/>
+          <p:cNvSpPr>
+            <a:spLocks noGrp="1"/>
+          </p:cNvSpPr>
+          <p:nvPr>
+            <p:ph type="dt" idx="1"/>
+          </p:nvPr>
+        </p:nvSpPr>
+        <p:spPr>
+          <a:xfrm>
+            <a:off x="3884613" y="0"/>
+            <a:ext cx="2971800" cy="457200"/>
+          </a:xfrm>
+          <a:prstGeom prst="rect">
+            <a:avLst/>
+          </a:prstGeom>
+        </p:spPr>
+        <p:txBody>
+          <a:bodyPr vert="horz" lIns="91440" tIns="45720" rIns="91440" bIns="45720" rtlCol="0"/>
+          <a:lstStyle>
+            <a:lvl1pPr algn="r">
+              <a:defRPr sz="1200"/>
+            </a:lvl1pPr>
+          </a:lstStyle>
+          <a:p>
+            <a:fld id="{0F89C1C7-3DCD-1040-A9CF-14679D8B5DDD}" type="datetimeFigureOut">
+              <a:rPr lang="en-US" smtClean="0"/>
+              <a:t>10/17/16</a:t>
+            </a:fld>
+            <a:endParaRPr lang="en-US"/>
+          </a:p>
+        </p:txBody>
+      </p:sp>
+      <p:sp>
+        <p:nvSpPr>
+          <p:cNvPr id="4" name="Slide Image Placeholder 3"/>
+          <p:cNvSpPr>
+            <a:spLocks noGrp="1" noRot="1" noChangeAspect="1"/>
+          </p:cNvSpPr>
+          <p:nvPr>
+            <p:ph type="sldImg" idx="2"/>
+          </p:nvPr>
+        </p:nvSpPr>
+        <p:spPr>
+          <a:xfrm>
+            <a:off x="1143000" y="685800"/>
+            <a:ext cx="4572000" cy="3429000"/>
+          </a:xfrm>
+          <a:prstGeom prst="rect">
+            <a:avLst/>
+          </a:prstGeom>
+          <a:noFill/>
+          <a:ln w="12700">
+            <a:solidFill>
+              <a:prstClr val="black"/>
+            </a:solidFill>
+          </a:ln>
+        </p:spPr>
+        <p:txBody>
+          <a:bodyPr vert="horz" lIns="91440" tIns="45720" rIns="91440" bIns="45720" rtlCol="0" anchor="ctr"/>
+          <a:lstStyle/>
+          <a:p>
+            <a:endParaRPr lang="en-US"/>
+          </a:p>
+        </p:txBody>
+      </p:sp>
+      <p:sp>
+        <p:nvSpPr>
+          <p:cNvPr id="5" name="Notes Placeholder 4"/>
+          <p:cNvSpPr>
+            <a:spLocks noGrp="1"/>
+          </p:cNvSpPr>
+          <p:nvPr>
+            <p:ph type="body" sz="quarter" idx="3"/>
+          </p:nvPr>
+        </p:nvSpPr>
+        <p:spPr>
+          <a:xfrm>
+            <a:off x="685800" y="4343400"/>
+            <a:ext cx="5486400" cy="4114800"/>
+          </a:xfrm>
+          <a:prstGeom prst="rect">
+            <a:avLst/>
+          </a:prstGeom>
+        </p:spPr>
+        <p:txBody>
+          <a:bodyPr vert="horz" lIns="91440" tIns="45720" rIns="91440" bIns="45720" rtlCol="0"/>
+          <a:lstStyle/>
+          <a:p>
+            <a:pPr lvl="0"/>
+            <a:r>
+              <a:rPr lang="en-US" smtClean="0"/>
+              <a:t>Click to edit Master text styles</a:t>
+            </a:r>
+          </a:p>
+          <a:p>
+            <a:pPr lvl="1"/>
+            <a:r>
+              <a:rPr lang="en-US" smtClean="0"/>
+              <a:t>Second level</a:t>
+            </a:r>
+          </a:p>
+          <a:p>
+            <a:pPr lvl="2"/>
+            <a:r>
+              <a:rPr lang="en-US" smtClean="0"/>
+              <a:t>Third level</a:t>
+            </a:r>
+          </a:p>
+          <a:p>
+            <a:pPr lvl="3"/>
+            <a:r>
+              <a:rPr lang="en-US" smtClean="0"/>
+              <a:t>Fourth level</a:t>
+            </a:r>
+          </a:p>
+          <a:p>
+            <a:pPr lvl="4"/>
+            <a:r>
+              <a:rPr lang="en-US" smtClean="0"/>
+              <a:t>Fifth level</a:t>
+            </a:r>
+            <a:endParaRPr lang="en-US"/>
+          </a:p>
+        </p:txBody>
+      </p:sp>
+      <p:sp>
+        <p:nvSpPr>
+          <p:cNvPr id="6" name="Footer Placeholder 5"/>
+          <p:cNvSpPr>
+            <a:spLocks noGrp="1"/>
+          </p:cNvSpPr>
+          <p:nvPr>
+            <p:ph type="ftr" sz="quarter" idx="4"/>
+          </p:nvPr>
+        </p:nvSpPr>
+        <p:spPr>
+          <a:xfrm>
+            <a:off x="0" y="8685213"/>
+            <a:ext cx="2971800" cy="457200"/>
+          </a:xfrm>
+          <a:prstGeom prst="rect">
+            <a:avLst/>
+          </a:prstGeom>
+        </p:spPr>
+        <p:txBody>
+          <a:bodyPr vert="horz" lIns="91440" tIns="45720" rIns="91440" bIns="45720" rtlCol="0" anchor="b"/>
+          <a:lstStyle>
+            <a:lvl1pPr algn="l">
+              <a:defRPr sz="1200"/>
+            </a:lvl1pPr>
+          </a:lstStyle>
+          <a:p>
+            <a:endParaRPr lang="en-US"/>
+          </a:p>
+        </p:txBody>
+      </p:sp>
+      <p:sp>
+        <p:nvSpPr>
+          <p:cNvPr id="7" name="Slide Number Placeholder 6"/>
+          <p:cNvSpPr>
+            <a:spLocks noGrp="1"/>
+          </p:cNvSpPr>
+          <p:nvPr>
+            <p:ph type="sldNum" sz="quarter" idx="5"/>
+          </p:nvPr>
+        </p:nvSpPr>
+        <p:spPr>
+          <a:xfrm>
+            <a:off x="3884613" y="8685213"/>
+            <a:ext cx="2971800" cy="457200"/>
+          </a:xfrm>
+          <a:prstGeom prst="rect">
+            <a:avLst/>
+          </a:prstGeom>
+        </p:spPr>
+        <p:txBody>
+          <a:bodyPr vert="horz" lIns="91440" tIns="45720" rIns="91440" bIns="45720" rtlCol="0" anchor="b"/>
+          <a:lstStyle>
+            <a:lvl1pPr algn="r">
+              <a:defRPr sz="1200"/>
+            </a:lvl1pPr>
+          </a:lstStyle>
+          <a:p>
+            <a:fld id="{BB5E49A5-4136-284D-997B-48E1D791AD67}" type="slidenum">
+              <a:rPr lang="en-US" smtClean="0"/>
+              <a:t>‹#›</a:t>
+            </a:fld>
+            <a:endParaRPr lang="en-US"/>
+          </a:p>
+        </p:txBody>
+      </p:sp>
+    </p:spTree>
+    <p:extLst>
+      <p:ext uri="{BB962C8B-B14F-4D97-AF65-F5344CB8AC3E}">
+        <p14:creationId xmlns:p14="http://schemas.microsoft.com/office/powerpoint/2010/main" val="2623252185"/>
+      </p:ext>
+    </p:extLst>
+  </p:cSld>
+  <p:clrMap bg1="lt1" tx1="dk1" bg2="lt2" tx2="dk2" accent1="accent1" accent2="accent2" accent3="accent3" accent4="accent4" accent5="accent5" accent6="accent6" hlink="hlink" folHlink="folHlink"/>
+  <p:notesStyle>
+    <a:lvl1pPr marL="0" algn="l" defTabSz="457200" rtl="0" eaLnBrk="1" latinLnBrk="0" hangingPunct="1">
+      <a:defRPr sz="1200" kern="1200">
+        <a:solidFill>
+          <a:schemeClr val="tx1"/>
+        </a:solidFill>
+        <a:latin typeface="+mn-lt"/>
+        <a:ea typeface="+mn-ea"/>
+        <a:cs typeface="+mn-cs"/>
+      </a:defRPr>
+    </a:lvl1pPr>
+    <a:lvl2pPr marL="457200" algn="l" defTabSz="457200" rtl="0" eaLnBrk="1" latinLnBrk="0" hangingPunct="1">
+      <a:defRPr sz="1200" kern="1200">
+        <a:solidFill>
+          <a:schemeClr val="tx1"/>
+        </a:solidFill>
+        <a:latin typeface="+mn-lt"/>
+        <a:ea typeface="+mn-ea"/>
+        <a:cs typeface="+mn-cs"/>
+      </a:defRPr>
+    </a:lvl2pPr>
+    <a:lvl3pPr marL="914400" algn="l" defTabSz="457200" rtl="0" eaLnBrk="1" latinLnBrk="0" hangingPunct="1">
+      <a:defRPr sz="1200" kern="1200">
+        <a:solidFill>
+          <a:schemeClr val="tx1"/>
+        </a:solidFill>
+        <a:latin typeface="+mn-lt"/>
+        <a:ea typeface="+mn-ea"/>
+        <a:cs typeface="+mn-cs"/>
+      </a:defRPr>
+    </a:lvl3pPr>
+    <a:lvl4pPr marL="1371600" algn="l" defTabSz="457200" rtl="0" eaLnBrk="1" latinLnBrk="0" hangingPunct="1">
+      <a:defRPr sz="1200" kern="1200">
+        <a:solidFill>
+          <a:schemeClr val="tx1"/>
+        </a:solidFill>
+        <a:latin typeface="+mn-lt"/>
+        <a:ea typeface="+mn-ea"/>
+        <a:cs typeface="+mn-cs"/>
+      </a:defRPr>
+    </a:lvl4pPr>
+    <a:lvl5pPr marL="1828800" algn="l" defTabSz="457200" rtl="0" eaLnBrk="1" latinLnBrk="0" hangingPunct="1">
+      <a:defRPr sz="1200" kern="1200">
+        <a:solidFill>
+          <a:schemeClr val="tx1"/>
+        </a:solidFill>
+        <a:latin typeface="+mn-lt"/>
+        <a:ea typeface="+mn-ea"/>
+        <a:cs typeface="+mn-cs"/>
+      </a:defRPr>
+    </a:lvl5pPr>
+    <a:lvl6pPr marL="2286000" algn="l" defTabSz="457200" rtl="0" eaLnBrk="1" latinLnBrk="0" hangingPunct="1">
+      <a:defRPr sz="1200" kern="1200">
+        <a:solidFill>
+          <a:schemeClr val="tx1"/>
+        </a:solidFill>
+        <a:latin typeface="+mn-lt"/>
+        <a:ea typeface="+mn-ea"/>
+        <a:cs typeface="+mn-cs"/>
+      </a:defRPr>
+    </a:lvl6pPr>
+    <a:lvl7pPr marL="2743200" algn="l" defTabSz="457200" rtl="0" eaLnBrk="1" latinLnBrk="0" hangingPunct="1">
+      <a:defRPr sz="1200" kern="1200">
+        <a:solidFill>
+          <a:schemeClr val="tx1"/>
+        </a:solidFill>
+        <a:latin typeface="+mn-lt"/>
+        <a:ea typeface="+mn-ea"/>
+        <a:cs typeface="+mn-cs"/>
+      </a:defRPr>
+    </a:lvl7pPr>
+    <a:lvl8pPr marL="3200400" algn="l" defTabSz="457200" rtl="0" eaLnBrk="1" latinLnBrk="0" hangingPunct="1">
+      <a:defRPr sz="1200" kern="1200">
+        <a:solidFill>
+          <a:schemeClr val="tx1"/>
+        </a:solidFill>
+        <a:latin typeface="+mn-lt"/>
+        <a:ea typeface="+mn-ea"/>
+        <a:cs typeface="+mn-cs"/>
+      </a:defRPr>
+    </a:lvl8pPr>
+    <a:lvl9pPr marL="3657600" algn="l" defTabSz="457200" rtl="0" eaLnBrk="1" latinLnBrk="0" hangingPunct="1">
+      <a:defRPr sz="1200" kern="1200">
+        <a:solidFill>
+          <a:schemeClr val="tx1"/>
+        </a:solidFill>
+        <a:latin typeface="+mn-lt"/>
+        <a:ea typeface="+mn-ea"/>
+        <a:cs typeface="+mn-cs"/>
+      </a:defRPr>
+    </a:lvl9pPr>
+  </p:notesStyle>
+</p:notesMaster>
+</file>
+
+<file path=ppt/notesSlides/notesSlide1.xml><?xml version="1.0" encoding="utf-8"?>
+<p:notes xmlns:a="http://schemas.openxmlformats.org/drawingml/2006/main" xmlns:p="http://schemas.openxmlformats.org/presentationml/2006/main" xmlns:r="http://schemas.openxmlformats.org/officeDocument/2006/relationships">
+  <p:cSld>
+    <p:spTree>
+      <p:nvGrpSpPr>
+        <p:cNvPr id="1" name=""/>
+        <p:cNvGrpSpPr/>
+        <p:nvPr/>
+      </p:nvGrpSpPr>
+      <p:grpSpPr>
+        <a:xfrm>
+          <a:off x="0" y="0"/>
+          <a:ext cx="0" cy="0"/>
+          <a:chOff x="0" y="0"/>
+          <a:chExt cx="0" cy="0"/>
+        </a:xfrm>
+      </p:grpSpPr>
+      <p:sp>
+        <p:nvSpPr>
+          <p:cNvPr id="2" name="Slide Image Placeholder 1"/>
+          <p:cNvSpPr>
+            <a:spLocks noGrp="1"/>
+          </p:cNvSpPr>
+          <p:nvPr>
+            <p:ph type="sldImg" idx="2"/>
+          </p:nvPr>
+        </p:nvSpPr>
+        <p:spPr/>
+      </p:sp>
+      <p:sp>
+        <p:nvSpPr>
+          <p:cNvPr id="3" name="Notes Placeholder 2"/>
+          <p:cNvSpPr>
+            <a:spLocks noGrp="1"/>
+          </p:cNvSpPr>
+          <p:nvPr>
+            <p:ph type="body" idx="3" sz="quarter"/>
+          </p:nvPr>
+        </p:nvSpPr>
+        <p:spPr/>
+        <p:txBody>
+          <a:bodyPr/>
+          <a:lstStyle/>
+          <a:p>
+            <a:r>
+              <a:t>What does the board need to see?. Sample Community Services Ltd. Period: October 2026 to date. A one-page board summary for October 2026 to date: the result, the money, the risks, and the decisions to make. The full statements are in the downloads.</a:t>
+            </a:r>
+          </a:p>
+        </p:txBody>
+      </p:sp>
+      <p:sp>
+        <p:nvSpPr>
+          <p:cNvPr id="4" name="Slide Number Placeholder 3"/>
+          <p:cNvSpPr>
+            <a:spLocks noGrp="1"/>
+          </p:cNvSpPr>
+          <p:nvPr>
+            <p:ph type="sldNum" idx="5" sz="quarter"/>
+          </p:nvPr>
+        </p:nvSpPr>
+        <p:spPr/>
+      </p:sp>
+    </p:spTree>
+  </p:cSld>
+  <p:clrMapOvr>
+    <a:masterClrMapping/>
+  </p:clrMapOvr>
+</p:notes>
+</file>
+
+<file path=ppt/notesSlides/notesSlide2.xml><?xml version="1.0" encoding="utf-8"?>
+<p:notes xmlns:a="http://schemas.openxmlformats.org/drawingml/2006/main" xmlns:p="http://schemas.openxmlformats.org/presentationml/2006/main" xmlns:r="http://schemas.openxmlformats.org/officeDocument/2006/relationships">
+  <p:cSld>
+    <p:spTree>
+      <p:nvGrpSpPr>
+        <p:cNvPr id="1" name=""/>
+        <p:cNvGrpSpPr/>
+        <p:nvPr/>
+      </p:nvGrpSpPr>
+      <p:grpSpPr>
+        <a:xfrm>
+          <a:off x="0" y="0"/>
+          <a:ext cx="0" cy="0"/>
+          <a:chOff x="0" y="0"/>
+          <a:chExt cx="0" cy="0"/>
+        </a:xfrm>
+      </p:grpSpPr>
+      <p:sp>
+        <p:nvSpPr>
+          <p:cNvPr id="2" name="Slide Image Placeholder 1"/>
+          <p:cNvSpPr>
+            <a:spLocks noGrp="1"/>
+          </p:cNvSpPr>
+          <p:nvPr>
+            <p:ph type="sldImg" idx="2"/>
+          </p:nvPr>
+        </p:nvSpPr>
+        <p:spPr/>
+      </p:sp>
+      <p:sp>
+        <p:nvSpPr>
+          <p:cNvPr id="3" name="Notes Placeholder 2"/>
+          <p:cNvSpPr>
+            <a:spLocks noGrp="1"/>
+          </p:cNvSpPr>
+          <p:nvPr>
+            <p:ph type="body" idx="3" sz="quarter"/>
+          </p:nvPr>
+        </p:nvSpPr>
+        <p:spPr/>
+        <p:txBody>
+          <a:bodyPr/>
+          <a:lstStyle/>
+          <a:p>
+            <a:r>
+              <a:t>What does the board need to see?. Surplus, October so far: ($10,737); Surplus (deficit), year to date: ($49,527); Unrestricted cash runway: 1.8 months; Cost to raise a dollar, October so far: 9¢.</a:t>
+            </a:r>
+          </a:p>
+        </p:txBody>
+      </p:sp>
+      <p:sp>
+        <p:nvSpPr>
+          <p:cNvPr id="4" name="Slide Number Placeholder 3"/>
+          <p:cNvSpPr>
+            <a:spLocks noGrp="1"/>
+          </p:cNvSpPr>
+          <p:nvPr>
+            <p:ph type="sldNum" idx="5" sz="quarter"/>
+          </p:nvPr>
+        </p:nvSpPr>
+        <p:spPr/>
+      </p:sp>
+    </p:spTree>
+  </p:cSld>
+  <p:clrMapOvr>
+    <a:masterClrMapping/>
+  </p:clrMapOvr>
+</p:notes>
 </file>
 
 <file path=ppt/slideLayouts/slideLayout1.xml><?xml version="1.0" encoding="utf-8"?>
@@ -3094,7 +3581,44 @@
       <p:grpSpPr/>
       <p:sp>
         <p:nvSpPr>
-          <p:cNvPr id="2" name="Rectangle 1"/>
+          <p:cNvPr id="2" name="Title 1"/>
+          <p:cNvSpPr>
+            <a:spLocks noGrp="1"/>
+          </p:cNvSpPr>
+          <p:nvPr>
+            <p:ph type="ctrTitle"/>
+          </p:nvPr>
+        </p:nvSpPr>
+        <p:spPr>
+          <a:xfrm>
+            <a:off x="457200" y="1965960"/>
+            <a:ext cx="11277295" cy="1097280"/>
+          </a:xfrm>
+        </p:spPr>
+        <p:txBody>
+          <a:bodyPr wrap="square"/>
+          <a:lstStyle/>
+          <a:p>
+            <a:pPr algn="l">
+              <a:defRPr>
+                <a:latin typeface="Roboto"/>
+              </a:defRPr>
+            </a:pPr>
+            <a:r>
+              <a:rPr sz="3400" b="1">
+                <a:solidFill>
+                  <a:srgbClr val="25342A"/>
+                </a:solidFill>
+                <a:latin typeface="Roboto"/>
+              </a:rPr>
+              <a:t>What does the board need to see?</a:t>
+            </a:r>
+          </a:p>
+        </p:txBody>
+      </p:sp>
+      <p:sp>
+        <p:nvSpPr>
+          <p:cNvPr id="3" name="Rectangle 2"/>
           <p:cNvSpPr/>
           <p:nvPr/>
         </p:nvSpPr>
@@ -3150,7 +3674,7 @@
       </p:sp>
       <p:sp>
         <p:nvSpPr>
-          <p:cNvPr id="3" name="TextBox 2"/>
+          <p:cNvPr id="4" name="TextBox 3"/>
           <p:cNvSpPr txBox="1"/>
           <p:nvPr/>
         </p:nvSpPr>
@@ -3165,7 +3689,7 @@
           <a:noFill/>
         </p:spPr>
         <p:txBody>
-          <a:bodyPr wrap="square">
+          <a:bodyPr wrap="square" lIns="45720" rIns="45720">
             <a:spAutoFit/>
           </a:bodyPr>
           <a:lstStyle/>
@@ -3189,7 +3713,7 @@
       </p:sp>
       <p:sp>
         <p:nvSpPr>
-          <p:cNvPr id="4" name="TextBox 3"/>
+          <p:cNvPr id="5" name="TextBox 4"/>
           <p:cNvSpPr txBox="1"/>
           <p:nvPr/>
         </p:nvSpPr>
@@ -3204,7 +3728,7 @@
           <a:noFill/>
         </p:spPr>
         <p:txBody>
-          <a:bodyPr wrap="square">
+          <a:bodyPr wrap="square" lIns="45720" rIns="45720">
             <a:spAutoFit/>
           </a:bodyPr>
           <a:lstStyle/>
@@ -3228,14 +3752,14 @@
       </p:sp>
       <p:sp>
         <p:nvSpPr>
-          <p:cNvPr id="5" name="TextBox 4"/>
+          <p:cNvPr id="6" name="TextBox 5"/>
           <p:cNvSpPr txBox="1"/>
           <p:nvPr/>
         </p:nvSpPr>
         <p:spPr>
           <a:xfrm>
-            <a:off x="457200" y="2011680"/>
-            <a:ext cx="11247120" cy="1097280"/>
+            <a:off x="457200" y="3154680"/>
+            <a:ext cx="11277295" cy="457200"/>
           </a:xfrm>
           <a:prstGeom prst="rect">
             <a:avLst/>
@@ -3243,7 +3767,7 @@
           <a:noFill/>
         </p:spPr>
         <p:txBody>
-          <a:bodyPr wrap="square">
+          <a:bodyPr wrap="square" lIns="45720" rIns="45720">
             <a:spAutoFit/>
           </a:bodyPr>
           <a:lstStyle/>
@@ -3254,27 +3778,27 @@
               </a:defRPr>
             </a:pPr>
             <a:r>
-              <a:rPr sz="3400" b="1">
+              <a:rPr sz="1600" b="0">
                 <a:solidFill>
-                  <a:srgbClr val="25342A"/>
+                  <a:srgbClr val="5F6F63"/>
                 </a:solidFill>
                 <a:latin typeface="Roboto"/>
               </a:rPr>
-              <a:t>What does the board need to see?</a:t>
-            </a:r>
-          </a:p>
-        </p:txBody>
-      </p:sp>
-      <p:sp>
-        <p:nvSpPr>
-          <p:cNvPr id="6" name="TextBox 5"/>
+              <a:t>Sample Community Services Ltd</a:t>
+            </a:r>
+          </a:p>
+        </p:txBody>
+      </p:sp>
+      <p:sp>
+        <p:nvSpPr>
+          <p:cNvPr id="7" name="TextBox 6"/>
           <p:cNvSpPr txBox="1"/>
           <p:nvPr/>
         </p:nvSpPr>
         <p:spPr>
           <a:xfrm>
-            <a:off x="457200" y="3154680"/>
-            <a:ext cx="11247120" cy="457200"/>
+            <a:off x="457200" y="3703320"/>
+            <a:ext cx="11277295" cy="535940"/>
           </a:xfrm>
           <a:prstGeom prst="rect">
             <a:avLst/>
@@ -3282,7 +3806,7 @@
           <a:noFill/>
         </p:spPr>
         <p:txBody>
-          <a:bodyPr wrap="square">
+          <a:bodyPr wrap="square" lIns="45720" rIns="45720">
             <a:spAutoFit/>
           </a:bodyPr>
           <a:lstStyle/>
@@ -3293,27 +3817,27 @@
               </a:defRPr>
             </a:pPr>
             <a:r>
-              <a:rPr sz="1600" b="0">
+              <a:rPr sz="1400" b="0">
                 <a:solidFill>
-                  <a:srgbClr val="5F6F63"/>
+                  <a:srgbClr val="25342A"/>
                 </a:solidFill>
                 <a:latin typeface="Roboto"/>
               </a:rPr>
-              <a:t>Sample Community Services Ltd</a:t>
-            </a:r>
-          </a:p>
-        </p:txBody>
-      </p:sp>
-      <p:sp>
-        <p:nvSpPr>
-          <p:cNvPr id="7" name="TextBox 6"/>
+              <a:t>Period: October 2026 to date. A one-page board summary for October 2026 to date: the result, the money, the risks, and the decisions to make. The full statements are in the downloads.</a:t>
+            </a:r>
+          </a:p>
+        </p:txBody>
+      </p:sp>
+      <p:sp>
+        <p:nvSpPr>
+          <p:cNvPr id="8" name="TextBox 7"/>
           <p:cNvSpPr txBox="1"/>
           <p:nvPr/>
         </p:nvSpPr>
         <p:spPr>
           <a:xfrm>
-            <a:off x="457200" y="3703320"/>
-            <a:ext cx="11247120" cy="1097280"/>
+            <a:off x="457200" y="4330700"/>
+            <a:ext cx="11277295" cy="1097280"/>
           </a:xfrm>
           <a:prstGeom prst="rect">
             <a:avLst/>
@@ -3321,7 +3845,7 @@
           <a:noFill/>
         </p:spPr>
         <p:txBody>
-          <a:bodyPr wrap="square">
+          <a:bodyPr wrap="square" lIns="45720" rIns="45720">
             <a:spAutoFit/>
           </a:bodyPr>
           <a:lstStyle/>
@@ -3332,27 +3856,59 @@
               </a:defRPr>
             </a:pPr>
             <a:r>
-              <a:rPr sz="1400" b="0">
+              <a:rPr sz="1100" b="0">
                 <a:solidFill>
-                  <a:srgbClr val="25342A"/>
+                  <a:srgbClr val="5F6F63"/>
                 </a:solidFill>
                 <a:latin typeface="Roboto"/>
               </a:rPr>
-              <a:t>Period: October 2026 to date. A one-page board summary for October 2026 to date: the result, the money, the risks, and the decisions to make. The full statements are in the downloads.</a:t>
-            </a:r>
-          </a:p>
-        </p:txBody>
-      </p:sp>
-      <p:sp>
-        <p:nvSpPr>
-          <p:cNvPr id="8" name="TextBox 7"/>
+              <a:t>How final is this data?</a:t>
+            </a:r>
+          </a:p>
+          <a:p>
+            <a:pPr>
+              <a:defRPr>
+                <a:latin typeface="Roboto"/>
+              </a:defRPr>
+            </a:pPr>
+            <a:r>
+              <a:rPr sz="1100" b="0">
+                <a:solidFill>
+                  <a:srgbClr val="5F6F63"/>
+                </a:solidFill>
+                <a:latin typeface="Roboto"/>
+              </a:rPr>
+              <a:t>September 2026: Locked. September 2026 is locked (closed 2 Oct 2026). These numbers won't change.</a:t>
+            </a:r>
+          </a:p>
+          <a:p>
+            <a:pPr>
+              <a:defRPr>
+                <a:latin typeface="Roboto"/>
+              </a:defRPr>
+            </a:pPr>
+            <a:r>
+              <a:rPr sz="1100" b="0">
+                <a:solidFill>
+                  <a:srgbClr val="5F6F63"/>
+                </a:solidFill>
+                <a:latin typeface="Roboto"/>
+              </a:rPr>
+              <a:t>October 2026: Incomplete. October 2026 is still in progress: figures to 6 Oct only.</a:t>
+            </a:r>
+          </a:p>
+        </p:txBody>
+      </p:sp>
+      <p:sp>
+        <p:nvSpPr>
+          <p:cNvPr id="9" name="TextBox 8"/>
           <p:cNvSpPr txBox="1"/>
           <p:nvPr/>
         </p:nvSpPr>
         <p:spPr>
           <a:xfrm>
-            <a:off x="457200" y="4937760"/>
-            <a:ext cx="11247120" cy="1097280"/>
+            <a:off x="457200" y="6492240"/>
+            <a:ext cx="2926080" cy="274320"/>
           </a:xfrm>
           <a:prstGeom prst="rect">
             <a:avLst/>
@@ -3360,7 +3916,7 @@
           <a:noFill/>
         </p:spPr>
         <p:txBody>
-          <a:bodyPr wrap="square">
+          <a:bodyPr wrap="square" lIns="45720" rIns="45720">
             <a:spAutoFit/>
           </a:bodyPr>
           <a:lstStyle/>
@@ -3371,59 +3927,27 @@
               </a:defRPr>
             </a:pPr>
             <a:r>
-              <a:rPr sz="1100" b="0">
+              <a:rPr sz="900" b="0">
                 <a:solidFill>
                   <a:srgbClr val="5F6F63"/>
                 </a:solidFill>
                 <a:latin typeface="Roboto"/>
               </a:rPr>
-              <a:t>How final is this data?</a:t>
-            </a:r>
-          </a:p>
-          <a:p>
-            <a:pPr>
-              <a:defRPr>
-                <a:latin typeface="Roboto"/>
-              </a:defRPr>
-            </a:pPr>
-            <a:r>
-              <a:rPr sz="1100" b="0">
-                <a:solidFill>
-                  <a:srgbClr val="5F6F63"/>
-                </a:solidFill>
-                <a:latin typeface="Roboto"/>
-              </a:rPr>
-              <a:t>September 2026: Locked. September 2026 is locked (closed 2 Oct 2026). These numbers won't change.</a:t>
-            </a:r>
-          </a:p>
-          <a:p>
-            <a:pPr>
-              <a:defRPr>
-                <a:latin typeface="Roboto"/>
-              </a:defRPr>
-            </a:pPr>
-            <a:r>
-              <a:rPr sz="1100" b="0">
-                <a:solidFill>
-                  <a:srgbClr val="5F6F63"/>
-                </a:solidFill>
-                <a:latin typeface="Roboto"/>
-              </a:rPr>
-              <a:t>October 2026: Incomplete. October 2026 is still in progress: figures to 6 Oct only.</a:t>
-            </a:r>
-          </a:p>
-        </p:txBody>
-      </p:sp>
-      <p:sp>
-        <p:nvSpPr>
-          <p:cNvPr id="9" name="TextBox 8"/>
+              <a:t>board.pptx</a:t>
+            </a:r>
+          </a:p>
+        </p:txBody>
+      </p:sp>
+      <p:sp>
+        <p:nvSpPr>
+          <p:cNvPr id="10" name="TextBox 9"/>
           <p:cNvSpPr txBox="1"/>
           <p:nvPr/>
         </p:nvSpPr>
         <p:spPr>
           <a:xfrm>
-            <a:off x="457200" y="6492240"/>
-            <a:ext cx="3657600" cy="274320"/>
+            <a:off x="3108960" y="6492240"/>
+            <a:ext cx="5943600" cy="274320"/>
           </a:xfrm>
           <a:prstGeom prst="rect">
             <a:avLst/>
@@ -3431,12 +3955,12 @@
           <a:noFill/>
         </p:spPr>
         <p:txBody>
-          <a:bodyPr wrap="square">
+          <a:bodyPr wrap="square" lIns="45720" rIns="45720">
             <a:spAutoFit/>
           </a:bodyPr>
           <a:lstStyle/>
           <a:p>
-            <a:pPr>
+            <a:pPr algn="ctr">
               <a:defRPr>
                 <a:latin typeface="Roboto"/>
               </a:defRPr>
@@ -3448,46 +3972,7 @@
                 </a:solidFill>
                 <a:latin typeface="Roboto"/>
               </a:rPr>
-              <a:t>board.pptx</a:t>
-            </a:r>
-          </a:p>
-        </p:txBody>
-      </p:sp>
-      <p:sp>
-        <p:nvSpPr>
-          <p:cNvPr id="10" name="TextBox 9"/>
-          <p:cNvSpPr txBox="1"/>
-          <p:nvPr/>
-        </p:nvSpPr>
-        <p:spPr>
-          <a:xfrm>
-            <a:off x="4297680" y="6492240"/>
-            <a:ext cx="3657600" cy="274320"/>
-          </a:xfrm>
-          <a:prstGeom prst="rect">
-            <a:avLst/>
-          </a:prstGeom>
-          <a:noFill/>
-        </p:spPr>
-        <p:txBody>
-          <a:bodyPr wrap="square">
-            <a:spAutoFit/>
-          </a:bodyPr>
-          <a:lstStyle/>
-          <a:p>
-            <a:pPr algn="ctr">
-              <a:defRPr>
-                <a:latin typeface="Roboto"/>
-              </a:defRPr>
-            </a:pPr>
-            <a:r>
-              <a:rPr sz="900" b="0">
-                <a:solidFill>
-                  <a:srgbClr val="5F6F63"/>
-                </a:solidFill>
-                <a:latin typeface="Roboto"/>
-              </a:rPr>
-              <a:t>Data retrieved 2pm, Tue 6 Oct 2026 · Sample data</a:t>
+              <a:t>Data retrieved 2pm, Tue 6 Oct 2026 · Generated 8 Oct 2026, 9:35am · Sample data · Made with Python (python-pptx)</a:t>
             </a:r>
           </a:p>
         </p:txBody>
@@ -3509,7 +3994,7 @@
           <a:noFill/>
         </p:spPr>
         <p:txBody>
-          <a:bodyPr wrap="square">
+          <a:bodyPr wrap="square" lIns="45720" rIns="45720">
             <a:spAutoFit/>
           </a:bodyPr>
           <a:lstStyle/>
@@ -3526,7 +4011,7 @@
                 </a:solidFill>
                 <a:latin typeface="Roboto"/>
               </a:rPr>
-              <a:t>Slide 1 of 5</a:t>
+              <a:t>Slide 1 of 2</a:t>
             </a:r>
           </a:p>
         </p:txBody>
@@ -3551,7 +4036,44 @@
       <p:grpSpPr/>
       <p:sp>
         <p:nvSpPr>
-          <p:cNvPr id="2" name="Rectangle 1"/>
+          <p:cNvPr id="2" name="Title 1"/>
+          <p:cNvSpPr>
+            <a:spLocks noGrp="1"/>
+          </p:cNvSpPr>
+          <p:nvPr>
+            <p:ph type="title"/>
+          </p:nvPr>
+        </p:nvSpPr>
+        <p:spPr>
+          <a:xfrm>
+            <a:off x="457200" y="384048"/>
+            <a:ext cx="11277295" cy="475488"/>
+          </a:xfrm>
+        </p:spPr>
+        <p:txBody>
+          <a:bodyPr wrap="square" lIns="45720" rIns="45720" tIns="0" bIns="0" anchor="t"/>
+          <a:lstStyle/>
+          <a:p>
+            <a:pPr algn="l">
+              <a:defRPr>
+                <a:latin typeface="Roboto"/>
+              </a:defRPr>
+            </a:pPr>
+            <a:r>
+              <a:rPr sz="2400" b="1">
+                <a:solidFill>
+                  <a:srgbClr val="25342A"/>
+                </a:solidFill>
+                <a:latin typeface="Roboto"/>
+              </a:rPr>
+              <a:t>What does the board need to see?</a:t>
+            </a:r>
+          </a:p>
+        </p:txBody>
+      </p:sp>
+      <p:sp>
+        <p:nvSpPr>
+          <p:cNvPr id="3" name="Rectangle 2"/>
           <p:cNvSpPr/>
           <p:nvPr/>
         </p:nvSpPr>
@@ -3598,14 +4120,14 @@
       </p:sp>
       <p:sp>
         <p:nvSpPr>
-          <p:cNvPr id="3" name="TextBox 2"/>
+          <p:cNvPr id="4" name="TextBox 3"/>
           <p:cNvSpPr txBox="1"/>
           <p:nvPr/>
         </p:nvSpPr>
         <p:spPr>
           <a:xfrm>
-            <a:off x="457200" y="164592"/>
-            <a:ext cx="7315200" cy="274320"/>
+            <a:off x="457200" y="146304"/>
+            <a:ext cx="8229600" cy="256032"/>
           </a:xfrm>
           <a:prstGeom prst="rect">
             <a:avLst/>
@@ -3613,7 +4135,7 @@
           <a:noFill/>
         </p:spPr>
         <p:txBody>
-          <a:bodyPr wrap="square">
+          <a:bodyPr wrap="square" lIns="45720" rIns="45720">
             <a:spAutoFit/>
           </a:bodyPr>
           <a:lstStyle/>
@@ -3637,53 +4159,14 @@
       </p:sp>
       <p:sp>
         <p:nvSpPr>
-          <p:cNvPr id="4" name="TextBox 3"/>
-          <p:cNvSpPr txBox="1"/>
-          <p:nvPr/>
-        </p:nvSpPr>
-        <p:spPr>
-          <a:xfrm>
-            <a:off x="457200" y="411480"/>
-            <a:ext cx="11247120" cy="548640"/>
-          </a:xfrm>
-          <a:prstGeom prst="rect">
-            <a:avLst/>
-          </a:prstGeom>
-          <a:noFill/>
-        </p:spPr>
-        <p:txBody>
-          <a:bodyPr wrap="square">
-            <a:spAutoFit/>
-          </a:bodyPr>
-          <a:lstStyle/>
-          <a:p>
-            <a:pPr>
-              <a:defRPr>
-                <a:latin typeface="Roboto"/>
-              </a:defRPr>
-            </a:pPr>
-            <a:r>
-              <a:rPr sz="2400" b="1">
-                <a:solidFill>
-                  <a:srgbClr val="25342A"/>
-                </a:solidFill>
-                <a:latin typeface="Roboto"/>
-              </a:rPr>
-              <a:t>Headline numbers</a:t>
-            </a:r>
-          </a:p>
-        </p:txBody>
-      </p:sp>
-      <p:sp>
-        <p:nvSpPr>
           <p:cNvPr id="5" name="Rectangle 4"/>
           <p:cNvSpPr/>
           <p:nvPr/>
         </p:nvSpPr>
         <p:spPr>
           <a:xfrm>
-            <a:off x="457200" y="1645920"/>
-            <a:ext cx="2613583" cy="2011680"/>
+            <a:off x="457200" y="960120"/>
+            <a:ext cx="2647873" cy="1188720"/>
           </a:xfrm>
           <a:prstGeom prst="rect">
             <a:avLst/>
@@ -3731,8 +4214,8 @@
         </p:nvSpPr>
         <p:spPr>
           <a:xfrm>
-            <a:off x="640080" y="1783080"/>
-            <a:ext cx="2247823" cy="457200"/>
+            <a:off x="594360" y="1033272"/>
+            <a:ext cx="2373553" cy="384048"/>
           </a:xfrm>
           <a:prstGeom prst="rect">
             <a:avLst/>
@@ -3740,7 +4223,7 @@
           <a:noFill/>
         </p:spPr>
         <p:txBody>
-          <a:bodyPr wrap="square">
+          <a:bodyPr wrap="square" lIns="45720" rIns="45720">
             <a:spAutoFit/>
           </a:bodyPr>
           <a:lstStyle/>
@@ -3751,7 +4234,7 @@
               </a:defRPr>
             </a:pPr>
             <a:r>
-              <a:rPr sz="1200" b="0">
+              <a:rPr sz="1100" b="0">
                 <a:solidFill>
                   <a:srgbClr val="5F6F63"/>
                 </a:solidFill>
@@ -3770,8 +4253,8 @@
         </p:nvSpPr>
         <p:spPr>
           <a:xfrm>
-            <a:off x="640080" y="2240280"/>
-            <a:ext cx="2247823" cy="731520"/>
+            <a:off x="594360" y="1399032"/>
+            <a:ext cx="2373553" cy="502920"/>
           </a:xfrm>
           <a:prstGeom prst="rect">
             <a:avLst/>
@@ -3779,7 +4262,7 @@
           <a:noFill/>
         </p:spPr>
         <p:txBody>
-          <a:bodyPr wrap="square">
+          <a:bodyPr wrap="square" lIns="45720" rIns="45720">
             <a:spAutoFit/>
           </a:bodyPr>
           <a:lstStyle/>
@@ -3790,7 +4273,7 @@
               </a:defRPr>
             </a:pPr>
             <a:r>
-              <a:rPr sz="3000" b="1">
+              <a:rPr sz="2200" b="1">
                 <a:solidFill>
                   <a:srgbClr val="B42318"/>
                 </a:solidFill>
@@ -3809,8 +4292,8 @@
         </p:nvSpPr>
         <p:spPr>
           <a:xfrm>
-            <a:off x="640080" y="3017520"/>
-            <a:ext cx="2247823" cy="548640"/>
+            <a:off x="594360" y="1764792"/>
+            <a:ext cx="2373553" cy="329184"/>
           </a:xfrm>
           <a:prstGeom prst="rect">
             <a:avLst/>
@@ -3818,7 +4301,7 @@
           <a:noFill/>
         </p:spPr>
         <p:txBody>
-          <a:bodyPr wrap="square">
+          <a:bodyPr wrap="square" lIns="45720" rIns="45720">
             <a:spAutoFit/>
           </a:bodyPr>
           <a:lstStyle/>
@@ -3829,7 +4312,7 @@
               </a:defRPr>
             </a:pPr>
             <a:r>
-              <a:rPr sz="1100" b="0">
+              <a:rPr sz="1000" b="0">
                 <a:solidFill>
                   <a:srgbClr val="5F6F63"/>
                 </a:solidFill>
@@ -3848,8 +4331,8 @@
         </p:nvSpPr>
         <p:spPr>
           <a:xfrm>
-            <a:off x="3345103" y="1645920"/>
-            <a:ext cx="2613583" cy="2011680"/>
+            <a:off x="3333673" y="960120"/>
+            <a:ext cx="2647873" cy="1188720"/>
           </a:xfrm>
           <a:prstGeom prst="rect">
             <a:avLst/>
@@ -3897,8 +4380,8 @@
         </p:nvSpPr>
         <p:spPr>
           <a:xfrm>
-            <a:off x="3527983" y="1783080"/>
-            <a:ext cx="2247823" cy="457200"/>
+            <a:off x="3470833" y="1033272"/>
+            <a:ext cx="2373553" cy="384048"/>
           </a:xfrm>
           <a:prstGeom prst="rect">
             <a:avLst/>
@@ -3906,7 +4389,7 @@
           <a:noFill/>
         </p:spPr>
         <p:txBody>
-          <a:bodyPr wrap="square">
+          <a:bodyPr wrap="square" lIns="45720" rIns="45720">
             <a:spAutoFit/>
           </a:bodyPr>
           <a:lstStyle/>
@@ -3917,7 +4400,7 @@
               </a:defRPr>
             </a:pPr>
             <a:r>
-              <a:rPr sz="1200" b="0">
+              <a:rPr sz="1100" b="0">
                 <a:solidFill>
                   <a:srgbClr val="5F6F63"/>
                 </a:solidFill>
@@ -3936,8 +4419,8 @@
         </p:nvSpPr>
         <p:spPr>
           <a:xfrm>
-            <a:off x="3527983" y="2240280"/>
-            <a:ext cx="2247823" cy="731520"/>
+            <a:off x="3470833" y="1399032"/>
+            <a:ext cx="2373553" cy="502920"/>
           </a:xfrm>
           <a:prstGeom prst="rect">
             <a:avLst/>
@@ -3945,7 +4428,7 @@
           <a:noFill/>
         </p:spPr>
         <p:txBody>
-          <a:bodyPr wrap="square">
+          <a:bodyPr wrap="square" lIns="45720" rIns="45720">
             <a:spAutoFit/>
           </a:bodyPr>
           <a:lstStyle/>
@@ -3956,7 +4439,7 @@
               </a:defRPr>
             </a:pPr>
             <a:r>
-              <a:rPr sz="3000" b="1">
+              <a:rPr sz="2200" b="1">
                 <a:solidFill>
                   <a:srgbClr val="B42318"/>
                 </a:solidFill>
@@ -3975,8 +4458,8 @@
         </p:nvSpPr>
         <p:spPr>
           <a:xfrm>
-            <a:off x="3527983" y="3017520"/>
-            <a:ext cx="2247823" cy="548640"/>
+            <a:off x="3470833" y="1764792"/>
+            <a:ext cx="2373553" cy="329184"/>
           </a:xfrm>
           <a:prstGeom prst="rect">
             <a:avLst/>
@@ -3984,7 +4467,7 @@
           <a:noFill/>
         </p:spPr>
         <p:txBody>
-          <a:bodyPr wrap="square">
+          <a:bodyPr wrap="square" lIns="45720" rIns="45720">
             <a:spAutoFit/>
           </a:bodyPr>
           <a:lstStyle/>
@@ -3995,7 +4478,7 @@
               </a:defRPr>
             </a:pPr>
             <a:r>
-              <a:rPr sz="1100" b="0">
+              <a:rPr sz="1000" b="0">
                 <a:solidFill>
                   <a:srgbClr val="5F6F63"/>
                 </a:solidFill>
@@ -4014,8 +4497,8 @@
         </p:nvSpPr>
         <p:spPr>
           <a:xfrm>
-            <a:off x="6233007" y="1645920"/>
-            <a:ext cx="2613583" cy="2011680"/>
+            <a:off x="6210147" y="960120"/>
+            <a:ext cx="2647873" cy="1188720"/>
           </a:xfrm>
           <a:prstGeom prst="rect">
             <a:avLst/>
@@ -4063,8 +4546,8 @@
         </p:nvSpPr>
         <p:spPr>
           <a:xfrm>
-            <a:off x="6415887" y="1783080"/>
-            <a:ext cx="2247823" cy="457200"/>
+            <a:off x="6347307" y="1033272"/>
+            <a:ext cx="2373553" cy="384048"/>
           </a:xfrm>
           <a:prstGeom prst="rect">
             <a:avLst/>
@@ -4072,7 +4555,7 @@
           <a:noFill/>
         </p:spPr>
         <p:txBody>
-          <a:bodyPr wrap="square">
+          <a:bodyPr wrap="square" lIns="45720" rIns="45720">
             <a:spAutoFit/>
           </a:bodyPr>
           <a:lstStyle/>
@@ -4083,7 +4566,7 @@
               </a:defRPr>
             </a:pPr>
             <a:r>
-              <a:rPr sz="1200" b="0">
+              <a:rPr sz="1100" b="0">
                 <a:solidFill>
                   <a:srgbClr val="5F6F63"/>
                 </a:solidFill>
@@ -4102,8 +4585,8 @@
         </p:nvSpPr>
         <p:spPr>
           <a:xfrm>
-            <a:off x="6415887" y="2240280"/>
-            <a:ext cx="2247823" cy="731520"/>
+            <a:off x="6347307" y="1399032"/>
+            <a:ext cx="2373553" cy="502920"/>
           </a:xfrm>
           <a:prstGeom prst="rect">
             <a:avLst/>
@@ -4111,7 +4594,7 @@
           <a:noFill/>
         </p:spPr>
         <p:txBody>
-          <a:bodyPr wrap="square">
+          <a:bodyPr wrap="square" lIns="45720" rIns="45720">
             <a:spAutoFit/>
           </a:bodyPr>
           <a:lstStyle/>
@@ -4122,7 +4605,7 @@
               </a:defRPr>
             </a:pPr>
             <a:r>
-              <a:rPr sz="3000" b="1">
+              <a:rPr sz="2200" b="1">
                 <a:solidFill>
                   <a:srgbClr val="2F7A5D"/>
                 </a:solidFill>
@@ -4141,8 +4624,8 @@
         </p:nvSpPr>
         <p:spPr>
           <a:xfrm>
-            <a:off x="6415887" y="3017520"/>
-            <a:ext cx="2247823" cy="548640"/>
+            <a:off x="6347307" y="1764792"/>
+            <a:ext cx="2373553" cy="329184"/>
           </a:xfrm>
           <a:prstGeom prst="rect">
             <a:avLst/>
@@ -4150,7 +4633,7 @@
           <a:noFill/>
         </p:spPr>
         <p:txBody>
-          <a:bodyPr wrap="square">
+          <a:bodyPr wrap="square" lIns="45720" rIns="45720">
             <a:spAutoFit/>
           </a:bodyPr>
           <a:lstStyle/>
@@ -4161,7 +4644,7 @@
               </a:defRPr>
             </a:pPr>
             <a:r>
-              <a:rPr sz="1100" b="0">
+              <a:rPr sz="1000" b="0">
                 <a:solidFill>
                   <a:srgbClr val="5F6F63"/>
                 </a:solidFill>
@@ -4180,8 +4663,8 @@
         </p:nvSpPr>
         <p:spPr>
           <a:xfrm>
-            <a:off x="9120911" y="1645920"/>
-            <a:ext cx="2613583" cy="2011680"/>
+            <a:off x="9086621" y="960120"/>
+            <a:ext cx="2647873" cy="1188720"/>
           </a:xfrm>
           <a:prstGeom prst="rect">
             <a:avLst/>
@@ -4229,8 +4712,8 @@
         </p:nvSpPr>
         <p:spPr>
           <a:xfrm>
-            <a:off x="9303791" y="1783080"/>
-            <a:ext cx="2247823" cy="457200"/>
+            <a:off x="9223781" y="1033272"/>
+            <a:ext cx="2373553" cy="384048"/>
           </a:xfrm>
           <a:prstGeom prst="rect">
             <a:avLst/>
@@ -4238,7 +4721,7 @@
           <a:noFill/>
         </p:spPr>
         <p:txBody>
-          <a:bodyPr wrap="square">
+          <a:bodyPr wrap="square" lIns="45720" rIns="45720">
             <a:spAutoFit/>
           </a:bodyPr>
           <a:lstStyle/>
@@ -4249,7 +4732,7 @@
               </a:defRPr>
             </a:pPr>
             <a:r>
-              <a:rPr sz="1200" b="0">
+              <a:rPr sz="1100" b="0">
                 <a:solidFill>
                   <a:srgbClr val="5F6F63"/>
                 </a:solidFill>
@@ -4268,8 +4751,8 @@
         </p:nvSpPr>
         <p:spPr>
           <a:xfrm>
-            <a:off x="9303791" y="2240280"/>
-            <a:ext cx="2247823" cy="731520"/>
+            <a:off x="9223781" y="1399032"/>
+            <a:ext cx="2373553" cy="502920"/>
           </a:xfrm>
           <a:prstGeom prst="rect">
             <a:avLst/>
@@ -4277,7 +4760,7 @@
           <a:noFill/>
         </p:spPr>
         <p:txBody>
-          <a:bodyPr wrap="square">
+          <a:bodyPr wrap="square" lIns="45720" rIns="45720">
             <a:spAutoFit/>
           </a:bodyPr>
           <a:lstStyle/>
@@ -4288,7 +4771,7 @@
               </a:defRPr>
             </a:pPr>
             <a:r>
-              <a:rPr sz="3000" b="1">
+              <a:rPr sz="2200" b="1">
                 <a:solidFill>
                   <a:srgbClr val="2F7A5D"/>
                 </a:solidFill>
@@ -4307,8 +4790,8 @@
         </p:nvSpPr>
         <p:spPr>
           <a:xfrm>
-            <a:off x="9303791" y="3017520"/>
-            <a:ext cx="2247823" cy="548640"/>
+            <a:off x="9223781" y="1764792"/>
+            <a:ext cx="2373553" cy="329184"/>
           </a:xfrm>
           <a:prstGeom prst="rect">
             <a:avLst/>
@@ -4316,228 +4799,7 @@
           <a:noFill/>
         </p:spPr>
         <p:txBody>
-          <a:bodyPr wrap="square">
-            <a:spAutoFit/>
-          </a:bodyPr>
-          <a:lstStyle/>
-          <a:p>
-            <a:pPr>
-              <a:defRPr>
-                <a:latin typeface="Roboto"/>
-              </a:defRPr>
-            </a:pPr>
-            <a:r>
-              <a:rPr sz="1100" b="0">
-                <a:solidFill>
-                  <a:srgbClr val="5F6F63"/>
-                </a:solidFill>
-                <a:latin typeface="Roboto"/>
-              </a:rPr>
-              <a:t>September 20¢</a:t>
-            </a:r>
-          </a:p>
-        </p:txBody>
-      </p:sp>
-      <p:sp>
-        <p:nvSpPr>
-          <p:cNvPr id="21" name="TextBox 20"/>
-          <p:cNvSpPr txBox="1"/>
-          <p:nvPr/>
-        </p:nvSpPr>
-        <p:spPr>
-          <a:xfrm>
-            <a:off x="457200" y="6492240"/>
-            <a:ext cx="3657600" cy="274320"/>
-          </a:xfrm>
-          <a:prstGeom prst="rect">
-            <a:avLst/>
-          </a:prstGeom>
-          <a:noFill/>
-        </p:spPr>
-        <p:txBody>
-          <a:bodyPr wrap="square">
-            <a:spAutoFit/>
-          </a:bodyPr>
-          <a:lstStyle/>
-          <a:p>
-            <a:pPr>
-              <a:defRPr>
-                <a:latin typeface="Roboto"/>
-              </a:defRPr>
-            </a:pPr>
-            <a:r>
-              <a:rPr sz="900" b="0">
-                <a:solidFill>
-                  <a:srgbClr val="5F6F63"/>
-                </a:solidFill>
-                <a:latin typeface="Roboto"/>
-              </a:rPr>
-              <a:t>board.pptx</a:t>
-            </a:r>
-          </a:p>
-        </p:txBody>
-      </p:sp>
-      <p:sp>
-        <p:nvSpPr>
-          <p:cNvPr id="22" name="TextBox 21"/>
-          <p:cNvSpPr txBox="1"/>
-          <p:nvPr/>
-        </p:nvSpPr>
-        <p:spPr>
-          <a:xfrm>
-            <a:off x="4297680" y="6492240"/>
-            <a:ext cx="3657600" cy="274320"/>
-          </a:xfrm>
-          <a:prstGeom prst="rect">
-            <a:avLst/>
-          </a:prstGeom>
-          <a:noFill/>
-        </p:spPr>
-        <p:txBody>
-          <a:bodyPr wrap="square">
-            <a:spAutoFit/>
-          </a:bodyPr>
-          <a:lstStyle/>
-          <a:p>
-            <a:pPr algn="ctr">
-              <a:defRPr>
-                <a:latin typeface="Roboto"/>
-              </a:defRPr>
-            </a:pPr>
-            <a:r>
-              <a:rPr sz="900" b="0">
-                <a:solidFill>
-                  <a:srgbClr val="5F6F63"/>
-                </a:solidFill>
-                <a:latin typeface="Roboto"/>
-              </a:rPr>
-              <a:t>Data retrieved 2pm, Tue 6 Oct 2026 · Sample data</a:t>
-            </a:r>
-          </a:p>
-        </p:txBody>
-      </p:sp>
-      <p:sp>
-        <p:nvSpPr>
-          <p:cNvPr id="23" name="TextBox 22"/>
-          <p:cNvSpPr txBox="1"/>
-          <p:nvPr/>
-        </p:nvSpPr>
-        <p:spPr>
-          <a:xfrm>
-            <a:off x="8503920" y="6492240"/>
-            <a:ext cx="3200400" cy="274320"/>
-          </a:xfrm>
-          <a:prstGeom prst="rect">
-            <a:avLst/>
-          </a:prstGeom>
-          <a:noFill/>
-        </p:spPr>
-        <p:txBody>
-          <a:bodyPr wrap="square">
-            <a:spAutoFit/>
-          </a:bodyPr>
-          <a:lstStyle/>
-          <a:p>
-            <a:pPr algn="r">
-              <a:defRPr>
-                <a:latin typeface="Roboto"/>
-              </a:defRPr>
-            </a:pPr>
-            <a:r>
-              <a:rPr sz="900" b="0">
-                <a:solidFill>
-                  <a:srgbClr val="5F6F63"/>
-                </a:solidFill>
-                <a:latin typeface="Roboto"/>
-              </a:rPr>
-              <a:t>Slide 2 of 5</a:t>
-            </a:r>
-          </a:p>
-        </p:txBody>
-      </p:sp>
-    </p:spTree>
-  </p:cSld>
-  <p:clrMapOvr>
-    <a:masterClrMapping/>
-  </p:clrMapOvr>
-</p:sld>
-</file>
-
-<file path=ppt/slides/slide3.xml><?xml version="1.0" encoding="utf-8"?>
-<p:sld xmlns:a="http://schemas.openxmlformats.org/drawingml/2006/main" xmlns:p="http://schemas.openxmlformats.org/presentationml/2006/main" xmlns:r="http://schemas.openxmlformats.org/officeDocument/2006/relationships">
-  <p:cSld>
-    <p:spTree>
-      <p:nvGrpSpPr>
-        <p:cNvPr id="1" name=""/>
-        <p:cNvGrpSpPr/>
-        <p:nvPr/>
-      </p:nvGrpSpPr>
-      <p:grpSpPr/>
-      <p:sp>
-        <p:nvSpPr>
-          <p:cNvPr id="2" name="Rectangle 1"/>
-          <p:cNvSpPr/>
-          <p:nvPr/>
-        </p:nvSpPr>
-        <p:spPr>
-          <a:xfrm>
-            <a:off x="0" y="0"/>
-            <a:ext cx="12191695" cy="73152"/>
-          </a:xfrm>
-          <a:prstGeom prst="rect">
-            <a:avLst/>
-          </a:prstGeom>
-          <a:solidFill>
-            <a:srgbClr val="2F7A5D"/>
-          </a:solidFill>
-          <a:ln>
-            <a:noFill/>
-          </a:ln>
-        </p:spPr>
-        <p:style>
-          <a:lnRef idx="1">
-            <a:schemeClr val="accent1"/>
-          </a:lnRef>
-          <a:fillRef idx="3">
-            <a:schemeClr val="accent1"/>
-          </a:fillRef>
-          <a:effectRef idx="2">
-            <a:schemeClr val="accent1"/>
-          </a:effectRef>
-          <a:fontRef idx="minor">
-            <a:schemeClr val="lt1"/>
-          </a:fontRef>
-        </p:style>
-        <p:txBody>
-          <a:bodyPr rtlCol="0" anchor="ctr"/>
-          <a:lstStyle/>
-          <a:p>
-            <a:pPr algn="ctr">
-              <a:defRPr>
-                <a:latin typeface="Roboto"/>
-              </a:defRPr>
-            </a:pPr>
-          </a:p>
-        </p:txBody>
-      </p:sp>
-      <p:sp>
-        <p:nvSpPr>
-          <p:cNvPr id="3" name="TextBox 2"/>
-          <p:cNvSpPr txBox="1"/>
-          <p:nvPr/>
-        </p:nvSpPr>
-        <p:spPr>
-          <a:xfrm>
-            <a:off x="457200" y="164592"/>
-            <a:ext cx="7315200" cy="274320"/>
-          </a:xfrm>
-          <a:prstGeom prst="rect">
-            <a:avLst/>
-          </a:prstGeom>
-          <a:noFill/>
-        </p:spPr>
-        <p:txBody>
-          <a:bodyPr wrap="square">
+          <a:bodyPr wrap="square" lIns="45720" rIns="45720">
             <a:spAutoFit/>
           </a:bodyPr>
           <a:lstStyle/>
@@ -4554,60 +4816,21 @@
                 </a:solidFill>
                 <a:latin typeface="Roboto"/>
               </a:rPr>
-              <a:t>Sample Community Services Ltd · What does the board need to see?</a:t>
-            </a:r>
-          </a:p>
-        </p:txBody>
-      </p:sp>
-      <p:sp>
-        <p:nvSpPr>
-          <p:cNvPr id="4" name="TextBox 3"/>
-          <p:cNvSpPr txBox="1"/>
+              <a:t>September 20¢</a:t>
+            </a:r>
+          </a:p>
+        </p:txBody>
+      </p:sp>
+      <p:sp>
+        <p:nvSpPr>
+          <p:cNvPr id="21" name="Rectangle 20"/>
+          <p:cNvSpPr/>
           <p:nvPr/>
         </p:nvSpPr>
         <p:spPr>
           <a:xfrm>
-            <a:off x="457200" y="411480"/>
-            <a:ext cx="11247120" cy="548640"/>
-          </a:xfrm>
-          <a:prstGeom prst="rect">
-            <a:avLst/>
-          </a:prstGeom>
-          <a:noFill/>
-        </p:spPr>
-        <p:txBody>
-          <a:bodyPr wrap="square">
-            <a:spAutoFit/>
-          </a:bodyPr>
-          <a:lstStyle/>
-          <a:p>
-            <a:pPr>
-              <a:defRPr>
-                <a:latin typeface="Roboto"/>
-              </a:defRPr>
-            </a:pPr>
-            <a:r>
-              <a:rPr sz="2400" b="1">
-                <a:solidFill>
-                  <a:srgbClr val="25342A"/>
-                </a:solidFill>
-                <a:latin typeface="Roboto"/>
-              </a:rPr>
-              <a:t>What the board should note</a:t>
-            </a:r>
-          </a:p>
-        </p:txBody>
-      </p:sp>
-      <p:sp>
-        <p:nvSpPr>
-          <p:cNvPr id="5" name="Rectangle 4"/>
-          <p:cNvSpPr/>
-          <p:nvPr/>
-        </p:nvSpPr>
-        <p:spPr>
-          <a:xfrm>
-            <a:off x="457200" y="1554480"/>
-            <a:ext cx="11277295" cy="4389120"/>
+            <a:off x="457200" y="2286000"/>
+            <a:ext cx="5501487" cy="1889760"/>
           </a:xfrm>
           <a:prstGeom prst="rect">
             <a:avLst/>
@@ -4649,14 +4872,14 @@
       </p:sp>
       <p:sp>
         <p:nvSpPr>
-          <p:cNvPr id="6" name="TextBox 5"/>
+          <p:cNvPr id="22" name="TextBox 21"/>
           <p:cNvSpPr txBox="1"/>
           <p:nvPr/>
         </p:nvSpPr>
         <p:spPr>
           <a:xfrm>
-            <a:off x="685800" y="1691640"/>
-            <a:ext cx="10820095" cy="365760"/>
+            <a:off x="594360" y="2340864"/>
+            <a:ext cx="5227167" cy="274320"/>
           </a:xfrm>
           <a:prstGeom prst="rect">
             <a:avLst/>
@@ -4664,7 +4887,7 @@
           <a:noFill/>
         </p:spPr>
         <p:txBody>
-          <a:bodyPr wrap="square">
+          <a:bodyPr wrap="square" lIns="45720" rIns="45720">
             <a:spAutoFit/>
           </a:bodyPr>
           <a:lstStyle/>
@@ -4675,7 +4898,7 @@
               </a:defRPr>
             </a:pPr>
             <a:r>
-              <a:rPr sz="1100" b="1">
+              <a:rPr sz="1000" b="1">
                 <a:solidFill>
                   <a:srgbClr val="5F6F63"/>
                 </a:solidFill>
@@ -4688,14 +4911,14 @@
       </p:sp>
       <p:sp>
         <p:nvSpPr>
-          <p:cNvPr id="7" name="TextBox 6"/>
+          <p:cNvPr id="23" name="TextBox 22"/>
           <p:cNvSpPr txBox="1"/>
           <p:nvPr/>
         </p:nvSpPr>
         <p:spPr>
           <a:xfrm>
-            <a:off x="685800" y="2103120"/>
-            <a:ext cx="10820095" cy="3749039"/>
+            <a:off x="594360" y="2615184"/>
+            <a:ext cx="5227167" cy="1524000"/>
           </a:xfrm>
           <a:prstGeom prst="rect">
             <a:avLst/>
@@ -4703,7 +4926,7 @@
           <a:noFill/>
         </p:spPr>
         <p:txBody>
-          <a:bodyPr wrap="square">
+          <a:bodyPr wrap="square" lIns="45720" rIns="45720">
             <a:spAutoFit/>
           </a:bodyPr>
           <a:lstStyle/>
@@ -4714,7 +4937,7 @@
               </a:defRPr>
             </a:pPr>
             <a:r>
-              <a:rPr sz="1600" b="0">
+              <a:rPr sz="1200" b="0">
                 <a:solidFill>
                   <a:srgbClr val="25342A"/>
                 </a:solidFill>
@@ -4730,7 +4953,7 @@
               </a:defRPr>
             </a:pPr>
             <a:r>
-              <a:rPr sz="1600" b="0">
+              <a:rPr sz="1200" b="0">
                 <a:solidFill>
                   <a:srgbClr val="25342A"/>
                 </a:solidFill>
@@ -4746,7 +4969,7 @@
               </a:defRPr>
             </a:pPr>
             <a:r>
-              <a:rPr sz="1600" b="0">
+              <a:rPr sz="1200" b="0">
                 <a:solidFill>
                   <a:srgbClr val="25342A"/>
                 </a:solidFill>
@@ -4759,1718 +4982,20 @@
       </p:sp>
       <p:sp>
         <p:nvSpPr>
-          <p:cNvPr id="8" name="TextBox 7"/>
-          <p:cNvSpPr txBox="1"/>
+          <p:cNvPr id="24" name="Rectangle 23"/>
+          <p:cNvSpPr/>
           <p:nvPr/>
         </p:nvSpPr>
         <p:spPr>
           <a:xfrm>
-            <a:off x="457200" y="6492240"/>
-            <a:ext cx="3657600" cy="274320"/>
-          </a:xfrm>
-          <a:prstGeom prst="rect">
-            <a:avLst/>
-          </a:prstGeom>
-          <a:noFill/>
-        </p:spPr>
-        <p:txBody>
-          <a:bodyPr wrap="square">
-            <a:spAutoFit/>
-          </a:bodyPr>
-          <a:lstStyle/>
-          <a:p>
-            <a:pPr>
-              <a:defRPr>
-                <a:latin typeface="Roboto"/>
-              </a:defRPr>
-            </a:pPr>
-            <a:r>
-              <a:rPr sz="900" b="0">
-                <a:solidFill>
-                  <a:srgbClr val="5F6F63"/>
-                </a:solidFill>
-                <a:latin typeface="Roboto"/>
-              </a:rPr>
-              <a:t>board.pptx</a:t>
-            </a:r>
-          </a:p>
-        </p:txBody>
-      </p:sp>
-      <p:sp>
-        <p:nvSpPr>
-          <p:cNvPr id="9" name="TextBox 8"/>
-          <p:cNvSpPr txBox="1"/>
-          <p:nvPr/>
-        </p:nvSpPr>
-        <p:spPr>
-          <a:xfrm>
-            <a:off x="4297680" y="6492240"/>
-            <a:ext cx="3657600" cy="274320"/>
-          </a:xfrm>
-          <a:prstGeom prst="rect">
-            <a:avLst/>
-          </a:prstGeom>
-          <a:noFill/>
-        </p:spPr>
-        <p:txBody>
-          <a:bodyPr wrap="square">
-            <a:spAutoFit/>
-          </a:bodyPr>
-          <a:lstStyle/>
-          <a:p>
-            <a:pPr algn="ctr">
-              <a:defRPr>
-                <a:latin typeface="Roboto"/>
-              </a:defRPr>
-            </a:pPr>
-            <a:r>
-              <a:rPr sz="900" b="0">
-                <a:solidFill>
-                  <a:srgbClr val="5F6F63"/>
-                </a:solidFill>
-                <a:latin typeface="Roboto"/>
-              </a:rPr>
-              <a:t>Data retrieved 2pm, Tue 6 Oct 2026 · Sample data</a:t>
-            </a:r>
-          </a:p>
-        </p:txBody>
-      </p:sp>
-      <p:sp>
-        <p:nvSpPr>
-          <p:cNvPr id="10" name="TextBox 9"/>
-          <p:cNvSpPr txBox="1"/>
-          <p:nvPr/>
-        </p:nvSpPr>
-        <p:spPr>
-          <a:xfrm>
-            <a:off x="8503920" y="6492240"/>
-            <a:ext cx="3200400" cy="274320"/>
-          </a:xfrm>
-          <a:prstGeom prst="rect">
-            <a:avLst/>
-          </a:prstGeom>
-          <a:noFill/>
-        </p:spPr>
-        <p:txBody>
-          <a:bodyPr wrap="square">
-            <a:spAutoFit/>
-          </a:bodyPr>
-          <a:lstStyle/>
-          <a:p>
-            <a:pPr algn="r">
-              <a:defRPr>
-                <a:latin typeface="Roboto"/>
-              </a:defRPr>
-            </a:pPr>
-            <a:r>
-              <a:rPr sz="900" b="0">
-                <a:solidFill>
-                  <a:srgbClr val="5F6F63"/>
-                </a:solidFill>
-                <a:latin typeface="Roboto"/>
-              </a:rPr>
-              <a:t>Slide 3 of 5</a:t>
-            </a:r>
-          </a:p>
-        </p:txBody>
-      </p:sp>
-    </p:spTree>
-  </p:cSld>
-  <p:clrMapOvr>
-    <a:masterClrMapping/>
-  </p:clrMapOvr>
-</p:sld>
-</file>
-
-<file path=ppt/slides/slide4.xml><?xml version="1.0" encoding="utf-8"?>
-<p:sld xmlns:a="http://schemas.openxmlformats.org/drawingml/2006/main" xmlns:p="http://schemas.openxmlformats.org/presentationml/2006/main" xmlns:r="http://schemas.openxmlformats.org/officeDocument/2006/relationships">
-  <p:cSld>
-    <p:spTree>
-      <p:nvGrpSpPr>
-        <p:cNvPr id="1" name=""/>
-        <p:cNvGrpSpPr/>
-        <p:nvPr/>
-      </p:nvGrpSpPr>
-      <p:grpSpPr/>
-      <p:sp>
-        <p:nvSpPr>
-          <p:cNvPr id="2" name="Rectangle 1"/>
-          <p:cNvSpPr/>
-          <p:nvPr/>
-        </p:nvSpPr>
-        <p:spPr>
-          <a:xfrm>
-            <a:off x="0" y="0"/>
-            <a:ext cx="12191695" cy="73152"/>
+            <a:off x="6233007" y="2286000"/>
+            <a:ext cx="5501487" cy="1889760"/>
           </a:xfrm>
           <a:prstGeom prst="rect">
             <a:avLst/>
           </a:prstGeom>
           <a:solidFill>
-            <a:srgbClr val="2F7A5D"/>
-          </a:solidFill>
-          <a:ln>
-            <a:noFill/>
-          </a:ln>
-        </p:spPr>
-        <p:style>
-          <a:lnRef idx="1">
-            <a:schemeClr val="accent1"/>
-          </a:lnRef>
-          <a:fillRef idx="3">
-            <a:schemeClr val="accent1"/>
-          </a:fillRef>
-          <a:effectRef idx="2">
-            <a:schemeClr val="accent1"/>
-          </a:effectRef>
-          <a:fontRef idx="minor">
-            <a:schemeClr val="lt1"/>
-          </a:fontRef>
-        </p:style>
-        <p:txBody>
-          <a:bodyPr rtlCol="0" anchor="ctr"/>
-          <a:lstStyle/>
-          <a:p>
-            <a:pPr algn="ctr">
-              <a:defRPr>
-                <a:latin typeface="Roboto"/>
-              </a:defRPr>
-            </a:pPr>
-          </a:p>
-        </p:txBody>
-      </p:sp>
-      <p:sp>
-        <p:nvSpPr>
-          <p:cNvPr id="3" name="TextBox 2"/>
-          <p:cNvSpPr txBox="1"/>
-          <p:nvPr/>
-        </p:nvSpPr>
-        <p:spPr>
-          <a:xfrm>
-            <a:off x="457200" y="164592"/>
-            <a:ext cx="7315200" cy="274320"/>
-          </a:xfrm>
-          <a:prstGeom prst="rect">
-            <a:avLst/>
-          </a:prstGeom>
-          <a:noFill/>
-        </p:spPr>
-        <p:txBody>
-          <a:bodyPr wrap="square">
-            <a:spAutoFit/>
-          </a:bodyPr>
-          <a:lstStyle/>
-          <a:p>
-            <a:pPr>
-              <a:defRPr>
-                <a:latin typeface="Roboto"/>
-              </a:defRPr>
-            </a:pPr>
-            <a:r>
-              <a:rPr sz="1000" b="0">
-                <a:solidFill>
-                  <a:srgbClr val="5F6F63"/>
-                </a:solidFill>
-                <a:latin typeface="Roboto"/>
-              </a:rPr>
-              <a:t>Sample Community Services Ltd · What does the board need to see?</a:t>
-            </a:r>
-          </a:p>
-        </p:txBody>
-      </p:sp>
-      <p:sp>
-        <p:nvSpPr>
-          <p:cNvPr id="4" name="TextBox 3"/>
-          <p:cNvSpPr txBox="1"/>
-          <p:nvPr/>
-        </p:nvSpPr>
-        <p:spPr>
-          <a:xfrm>
-            <a:off x="457200" y="411480"/>
-            <a:ext cx="11247120" cy="548640"/>
-          </a:xfrm>
-          <a:prstGeom prst="rect">
-            <a:avLst/>
-          </a:prstGeom>
-          <a:noFill/>
-        </p:spPr>
-        <p:txBody>
-          <a:bodyPr wrap="square">
-            <a:spAutoFit/>
-          </a:bodyPr>
-          <a:lstStyle/>
-          <a:p>
-            <a:pPr>
-              <a:defRPr>
-                <a:latin typeface="Roboto"/>
-              </a:defRPr>
-            </a:pPr>
-            <a:r>
-              <a:rPr sz="2400" b="1">
-                <a:solidFill>
-                  <a:srgbClr val="25342A"/>
-                </a:solidFill>
-                <a:latin typeface="Roboto"/>
-              </a:rPr>
-              <a:t>Grants</a:t>
-            </a:r>
-          </a:p>
-        </p:txBody>
-      </p:sp>
-      <p:graphicFrame>
-        <p:nvGraphicFramePr>
-          <p:cNvPr id="5" name="Table 4"/>
-          <p:cNvGraphicFramePr>
-            <a:graphicFrameLocks noGrp="1"/>
-          </p:cNvGraphicFramePr>
-          <p:nvPr/>
-        </p:nvGraphicFramePr>
-        <p:xfrm>
-          <a:off x="457200" y="1188720"/>
-          <a:ext cx="11247120" cy="2304288"/>
-        </p:xfrm>
-        <a:graphic>
-          <a:graphicData uri="http://schemas.openxmlformats.org/drawingml/2006/table">
-            <a:tbl>
-              <a:tblPr firstRow="1" bandRow="1">
-                <a:tableStyleId>{5C22544A-7EE6-4342-B048-85BDC9FD1C3A}</a:tableStyleId>
-              </a:tblPr>
-              <a:tblGrid>
-                <a:gridCol w="1874520"/>
-                <a:gridCol w="1874520"/>
-                <a:gridCol w="1874520"/>
-                <a:gridCol w="1874520"/>
-                <a:gridCol w="1874520"/>
-                <a:gridCol w="1874520"/>
-              </a:tblGrid>
-              <a:tr h="329184">
-                <a:tc>
-                  <a:txBody>
-                    <a:bodyPr/>
-                    <a:lstStyle/>
-                    <a:p>
-                      <a:pPr>
-                        <a:defRPr>
-                          <a:latin typeface="Roboto"/>
-                        </a:defRPr>
-                      </a:pPr>
-                      <a:r>
-                        <a:rPr sz="1100" b="1">
-                          <a:solidFill>
-                            <a:srgbClr val="FFFFFF"/>
-                          </a:solidFill>
-                          <a:latin typeface="Roboto"/>
-                        </a:rPr>
-                        <a:t>Program</a:t>
-                      </a:r>
-                    </a:p>
-                  </a:txBody>
-                  <a:tcPr>
-                    <a:solidFill>
-                      <a:srgbClr val="2F7A5D"/>
-                    </a:solidFill>
-                  </a:tcPr>
-                </a:tc>
-                <a:tc>
-                  <a:txBody>
-                    <a:bodyPr/>
-                    <a:lstStyle/>
-                    <a:p>
-                      <a:pPr algn="r">
-                        <a:defRPr>
-                          <a:latin typeface="Roboto"/>
-                        </a:defRPr>
-                      </a:pPr>
-                      <a:r>
-                        <a:rPr sz="1100" b="1">
-                          <a:solidFill>
-                            <a:srgbClr val="FFFFFF"/>
-                          </a:solidFill>
-                          <a:latin typeface="Roboto"/>
-                        </a:rPr>
-                        <a:t>Spent to date</a:t>
-                      </a:r>
-                    </a:p>
-                  </a:txBody>
-                  <a:tcPr>
-                    <a:solidFill>
-                      <a:srgbClr val="2F7A5D"/>
-                    </a:solidFill>
-                  </a:tcPr>
-                </a:tc>
-                <a:tc>
-                  <a:txBody>
-                    <a:bodyPr/>
-                    <a:lstStyle/>
-                    <a:p>
-                      <a:pPr algn="r">
-                        <a:defRPr>
-                          <a:latin typeface="Roboto"/>
-                        </a:defRPr>
-                      </a:pPr>
-                      <a:r>
-                        <a:rPr sz="1100" b="1">
-                          <a:solidFill>
-                            <a:srgbClr val="FFFFFF"/>
-                          </a:solidFill>
-                          <a:latin typeface="Roboto"/>
-                        </a:rPr>
-                        <a:t>Budget to date</a:t>
-                      </a:r>
-                    </a:p>
-                  </a:txBody>
-                  <a:tcPr>
-                    <a:solidFill>
-                      <a:srgbClr val="2F7A5D"/>
-                    </a:solidFill>
-                  </a:tcPr>
-                </a:tc>
-                <a:tc>
-                  <a:txBody>
-                    <a:bodyPr/>
-                    <a:lstStyle/>
-                    <a:p>
-                      <a:pPr algn="r">
-                        <a:defRPr>
-                          <a:latin typeface="Roboto"/>
-                        </a:defRPr>
-                      </a:pPr>
-                      <a:r>
-                        <a:rPr sz="1100" b="1">
-                          <a:solidFill>
-                            <a:srgbClr val="FFFFFF"/>
-                          </a:solidFill>
-                          <a:latin typeface="Roboto"/>
-                        </a:rPr>
-                        <a:t>Against budget</a:t>
-                      </a:r>
-                    </a:p>
-                  </a:txBody>
-                  <a:tcPr>
-                    <a:solidFill>
-                      <a:srgbClr val="2F7A5D"/>
-                    </a:solidFill>
-                  </a:tcPr>
-                </a:tc>
-                <a:tc>
-                  <a:txBody>
-                    <a:bodyPr/>
-                    <a:lstStyle/>
-                    <a:p>
-                      <a:pPr algn="r">
-                        <a:defRPr>
-                          <a:latin typeface="Roboto"/>
-                        </a:defRPr>
-                      </a:pPr>
-                      <a:r>
-                        <a:rPr sz="1100" b="1">
-                          <a:solidFill>
-                            <a:srgbClr val="FFFFFF"/>
-                          </a:solidFill>
-                          <a:latin typeface="Roboto"/>
-                        </a:rPr>
-                        <a:t>Still to spend</a:t>
-                      </a:r>
-                    </a:p>
-                  </a:txBody>
-                  <a:tcPr>
-                    <a:solidFill>
-                      <a:srgbClr val="2F7A5D"/>
-                    </a:solidFill>
-                  </a:tcPr>
-                </a:tc>
-                <a:tc>
-                  <a:txBody>
-                    <a:bodyPr/>
-                    <a:lstStyle/>
-                    <a:p>
-                      <a:pPr algn="r">
-                        <a:defRPr>
-                          <a:latin typeface="Roboto"/>
-                        </a:defRPr>
-                      </a:pPr>
-                      <a:r>
-                        <a:rPr sz="1100" b="1">
-                          <a:solidFill>
-                            <a:srgbClr val="FFFFFF"/>
-                          </a:solidFill>
-                          <a:latin typeface="Roboto"/>
-                        </a:rPr>
-                        <a:t>Months left</a:t>
-                      </a:r>
-                    </a:p>
-                  </a:txBody>
-                  <a:tcPr>
-                    <a:solidFill>
-                      <a:srgbClr val="2F7A5D"/>
-                    </a:solidFill>
-                  </a:tcPr>
-                </a:tc>
-              </a:tr>
-              <a:tr h="329184">
-                <a:tc>
-                  <a:txBody>
-                    <a:bodyPr/>
-                    <a:lstStyle/>
-                    <a:p>
-                      <a:pPr>
-                        <a:defRPr>
-                          <a:latin typeface="Roboto"/>
-                        </a:defRPr>
-                      </a:pPr>
-                      <a:r>
-                        <a:rPr sz="1050">
-                          <a:solidFill>
-                            <a:srgbClr val="25342A"/>
-                          </a:solidFill>
-                          <a:latin typeface="Roboto"/>
-                        </a:rPr>
-                        <a:t>Housing support</a:t>
-                      </a:r>
-                    </a:p>
-                  </a:txBody>
-                  <a:tcPr>
-                    <a:solidFill>
-                      <a:srgbClr val="FFFFFF"/>
-                    </a:solidFill>
-                  </a:tcPr>
-                </a:tc>
-                <a:tc>
-                  <a:txBody>
-                    <a:bodyPr/>
-                    <a:lstStyle/>
-                    <a:p>
-                      <a:pPr algn="r">
-                        <a:defRPr>
-                          <a:latin typeface="Roboto"/>
-                        </a:defRPr>
-                      </a:pPr>
-                      <a:r>
-                        <a:rPr sz="1050">
-                          <a:solidFill>
-                            <a:srgbClr val="25342A"/>
-                          </a:solidFill>
-                          <a:latin typeface="Roboto"/>
-                        </a:rPr>
-                        <a:t>$262,158</a:t>
-                      </a:r>
-                    </a:p>
-                  </a:txBody>
-                  <a:tcPr>
-                    <a:solidFill>
-                      <a:srgbClr val="FFFFFF"/>
-                    </a:solidFill>
-                  </a:tcPr>
-                </a:tc>
-                <a:tc>
-                  <a:txBody>
-                    <a:bodyPr/>
-                    <a:lstStyle/>
-                    <a:p>
-                      <a:pPr algn="r">
-                        <a:defRPr>
-                          <a:latin typeface="Roboto"/>
-                        </a:defRPr>
-                      </a:pPr>
-                      <a:r>
-                        <a:rPr sz="1050">
-                          <a:solidFill>
-                            <a:srgbClr val="25342A"/>
-                          </a:solidFill>
-                          <a:latin typeface="Roboto"/>
-                        </a:rPr>
-                        <a:t>$300,000</a:t>
-                      </a:r>
-                    </a:p>
-                  </a:txBody>
-                  <a:tcPr>
-                    <a:solidFill>
-                      <a:srgbClr val="FFFFFF"/>
-                    </a:solidFill>
-                  </a:tcPr>
-                </a:tc>
-                <a:tc>
-                  <a:txBody>
-                    <a:bodyPr/>
-                    <a:lstStyle/>
-                    <a:p>
-                      <a:pPr algn="r">
-                        <a:defRPr>
-                          <a:latin typeface="Roboto"/>
-                        </a:defRPr>
-                      </a:pPr>
-                      <a:r>
-                        <a:rPr sz="1050">
-                          <a:solidFill>
-                            <a:srgbClr val="25342A"/>
-                          </a:solidFill>
-                          <a:latin typeface="Roboto"/>
-                        </a:rPr>
-                        <a:t>87.4%</a:t>
-                      </a:r>
-                    </a:p>
-                  </a:txBody>
-                  <a:tcPr>
-                    <a:solidFill>
-                      <a:srgbClr val="FFFFFF"/>
-                    </a:solidFill>
-                  </a:tcPr>
-                </a:tc>
-                <a:tc>
-                  <a:txBody>
-                    <a:bodyPr/>
-                    <a:lstStyle/>
-                    <a:p>
-                      <a:pPr algn="r">
-                        <a:defRPr>
-                          <a:latin typeface="Roboto"/>
-                        </a:defRPr>
-                      </a:pPr>
-                      <a:r>
-                        <a:rPr sz="1050">
-                          <a:solidFill>
-                            <a:srgbClr val="25342A"/>
-                          </a:solidFill>
-                          <a:latin typeface="Roboto"/>
-                        </a:rPr>
-                        <a:t>$97,842</a:t>
-                      </a:r>
-                    </a:p>
-                  </a:txBody>
-                  <a:tcPr>
-                    <a:solidFill>
-                      <a:srgbClr val="FFFFFF"/>
-                    </a:solidFill>
-                  </a:tcPr>
-                </a:tc>
-                <a:tc>
-                  <a:txBody>
-                    <a:bodyPr/>
-                    <a:lstStyle/>
-                    <a:p>
-                      <a:pPr algn="r">
-                        <a:defRPr>
-                          <a:latin typeface="Roboto"/>
-                        </a:defRPr>
-                      </a:pPr>
-                      <a:r>
-                        <a:rPr sz="1050">
-                          <a:solidFill>
-                            <a:srgbClr val="25342A"/>
-                          </a:solidFill>
-                          <a:latin typeface="Roboto"/>
-                        </a:rPr>
-                        <a:t>2</a:t>
-                      </a:r>
-                    </a:p>
-                  </a:txBody>
-                  <a:tcPr>
-                    <a:solidFill>
-                      <a:srgbClr val="FFFFFF"/>
-                    </a:solidFill>
-                  </a:tcPr>
-                </a:tc>
-              </a:tr>
-              <a:tr h="329184">
-                <a:tc>
-                  <a:txBody>
-                    <a:bodyPr/>
-                    <a:lstStyle/>
-                    <a:p>
-                      <a:pPr>
-                        <a:defRPr>
-                          <a:latin typeface="Roboto"/>
-                        </a:defRPr>
-                      </a:pPr>
-                      <a:r>
-                        <a:rPr sz="1050">
-                          <a:solidFill>
-                            <a:srgbClr val="25342A"/>
-                          </a:solidFill>
-                          <a:latin typeface="Roboto"/>
-                        </a:rPr>
-                        <a:t>Volunteer coordinator</a:t>
-                      </a:r>
-                    </a:p>
-                  </a:txBody>
-                  <a:tcPr>
-                    <a:solidFill>
-                      <a:srgbClr val="F7FAF7"/>
-                    </a:solidFill>
-                  </a:tcPr>
-                </a:tc>
-                <a:tc>
-                  <a:txBody>
-                    <a:bodyPr/>
-                    <a:lstStyle/>
-                    <a:p>
-                      <a:pPr algn="r">
-                        <a:defRPr>
-                          <a:latin typeface="Roboto"/>
-                        </a:defRPr>
-                      </a:pPr>
-                      <a:r>
-                        <a:rPr sz="1050">
-                          <a:solidFill>
-                            <a:srgbClr val="25342A"/>
-                          </a:solidFill>
-                          <a:latin typeface="Roboto"/>
-                        </a:rPr>
-                        <a:t>$21,429</a:t>
-                      </a:r>
-                    </a:p>
-                  </a:txBody>
-                  <a:tcPr>
-                    <a:solidFill>
-                      <a:srgbClr val="F7FAF7"/>
-                    </a:solidFill>
-                  </a:tcPr>
-                </a:tc>
-                <a:tc>
-                  <a:txBody>
-                    <a:bodyPr/>
-                    <a:lstStyle/>
-                    <a:p>
-                      <a:pPr algn="r">
-                        <a:defRPr>
-                          <a:latin typeface="Roboto"/>
-                        </a:defRPr>
-                      </a:pPr>
-                      <a:r>
-                        <a:rPr sz="1050">
-                          <a:solidFill>
-                            <a:srgbClr val="25342A"/>
-                          </a:solidFill>
-                          <a:latin typeface="Roboto"/>
-                        </a:rPr>
-                        <a:t>$24,000</a:t>
-                      </a:r>
-                    </a:p>
-                  </a:txBody>
-                  <a:tcPr>
-                    <a:solidFill>
-                      <a:srgbClr val="F7FAF7"/>
-                    </a:solidFill>
-                  </a:tcPr>
-                </a:tc>
-                <a:tc>
-                  <a:txBody>
-                    <a:bodyPr/>
-                    <a:lstStyle/>
-                    <a:p>
-                      <a:pPr algn="r">
-                        <a:defRPr>
-                          <a:latin typeface="Roboto"/>
-                        </a:defRPr>
-                      </a:pPr>
-                      <a:r>
-                        <a:rPr sz="1050">
-                          <a:solidFill>
-                            <a:srgbClr val="25342A"/>
-                          </a:solidFill>
-                          <a:latin typeface="Roboto"/>
-                        </a:rPr>
-                        <a:t>89.3%</a:t>
-                      </a:r>
-                    </a:p>
-                  </a:txBody>
-                  <a:tcPr>
-                    <a:solidFill>
-                      <a:srgbClr val="F7FAF7"/>
-                    </a:solidFill>
-                  </a:tcPr>
-                </a:tc>
-                <a:tc>
-                  <a:txBody>
-                    <a:bodyPr/>
-                    <a:lstStyle/>
-                    <a:p>
-                      <a:pPr algn="r">
-                        <a:defRPr>
-                          <a:latin typeface="Roboto"/>
-                        </a:defRPr>
-                      </a:pPr>
-                      <a:r>
-                        <a:rPr sz="1050">
-                          <a:solidFill>
-                            <a:srgbClr val="25342A"/>
-                          </a:solidFill>
-                          <a:latin typeface="Roboto"/>
-                        </a:rPr>
-                        <a:t>$14,571</a:t>
-                      </a:r>
-                    </a:p>
-                  </a:txBody>
-                  <a:tcPr>
-                    <a:solidFill>
-                      <a:srgbClr val="F7FAF7"/>
-                    </a:solidFill>
-                  </a:tcPr>
-                </a:tc>
-                <a:tc>
-                  <a:txBody>
-                    <a:bodyPr/>
-                    <a:lstStyle/>
-                    <a:p>
-                      <a:pPr algn="r">
-                        <a:defRPr>
-                          <a:latin typeface="Roboto"/>
-                        </a:defRPr>
-                      </a:pPr>
-                      <a:r>
-                        <a:rPr sz="1050">
-                          <a:solidFill>
-                            <a:srgbClr val="25342A"/>
-                          </a:solidFill>
-                          <a:latin typeface="Roboto"/>
-                        </a:rPr>
-                        <a:t>4</a:t>
-                      </a:r>
-                    </a:p>
-                  </a:txBody>
-                  <a:tcPr>
-                    <a:solidFill>
-                      <a:srgbClr val="F7FAF7"/>
-                    </a:solidFill>
-                  </a:tcPr>
-                </a:tc>
-              </a:tr>
-              <a:tr h="329184">
-                <a:tc>
-                  <a:txBody>
-                    <a:bodyPr/>
-                    <a:lstStyle/>
-                    <a:p>
-                      <a:pPr>
-                        <a:defRPr>
-                          <a:latin typeface="Roboto"/>
-                        </a:defRPr>
-                      </a:pPr>
-                      <a:r>
-                        <a:rPr sz="1050">
-                          <a:solidFill>
-                            <a:srgbClr val="25342A"/>
-                          </a:solidFill>
-                          <a:latin typeface="Roboto"/>
-                        </a:rPr>
-                        <a:t>Digital literacy</a:t>
-                      </a:r>
-                    </a:p>
-                  </a:txBody>
-                  <a:tcPr>
-                    <a:solidFill>
-                      <a:srgbClr val="FFFFFF"/>
-                    </a:solidFill>
-                  </a:tcPr>
-                </a:tc>
-                <a:tc>
-                  <a:txBody>
-                    <a:bodyPr/>
-                    <a:lstStyle/>
-                    <a:p>
-                      <a:pPr algn="r">
-                        <a:defRPr>
-                          <a:latin typeface="Roboto"/>
-                        </a:defRPr>
-                      </a:pPr>
-                      <a:r>
-                        <a:rPr sz="1050">
-                          <a:solidFill>
-                            <a:srgbClr val="25342A"/>
-                          </a:solidFill>
-                          <a:latin typeface="Roboto"/>
-                        </a:rPr>
-                        <a:t>$60,302</a:t>
-                      </a:r>
-                    </a:p>
-                  </a:txBody>
-                  <a:tcPr>
-                    <a:solidFill>
-                      <a:srgbClr val="FFFFFF"/>
-                    </a:solidFill>
-                  </a:tcPr>
-                </a:tc>
-                <a:tc>
-                  <a:txBody>
-                    <a:bodyPr/>
-                    <a:lstStyle/>
-                    <a:p>
-                      <a:pPr algn="r">
-                        <a:defRPr>
-                          <a:latin typeface="Roboto"/>
-                        </a:defRPr>
-                      </a:pPr>
-                      <a:r>
-                        <a:rPr sz="1050">
-                          <a:solidFill>
-                            <a:srgbClr val="25342A"/>
-                          </a:solidFill>
-                          <a:latin typeface="Roboto"/>
-                        </a:rPr>
-                        <a:t>$65,000</a:t>
-                      </a:r>
-                    </a:p>
-                  </a:txBody>
-                  <a:tcPr>
-                    <a:solidFill>
-                      <a:srgbClr val="FFFFFF"/>
-                    </a:solidFill>
-                  </a:tcPr>
-                </a:tc>
-                <a:tc>
-                  <a:txBody>
-                    <a:bodyPr/>
-                    <a:lstStyle/>
-                    <a:p>
-                      <a:pPr algn="r">
-                        <a:defRPr>
-                          <a:latin typeface="Roboto"/>
-                        </a:defRPr>
-                      </a:pPr>
-                      <a:r>
-                        <a:rPr sz="1050">
-                          <a:solidFill>
-                            <a:srgbClr val="25342A"/>
-                          </a:solidFill>
-                          <a:latin typeface="Roboto"/>
-                        </a:rPr>
-                        <a:t>92.8%</a:t>
-                      </a:r>
-                    </a:p>
-                  </a:txBody>
-                  <a:tcPr>
-                    <a:solidFill>
-                      <a:srgbClr val="FFFFFF"/>
-                    </a:solidFill>
-                  </a:tcPr>
-                </a:tc>
-                <a:tc>
-                  <a:txBody>
-                    <a:bodyPr/>
-                    <a:lstStyle/>
-                    <a:p>
-                      <a:pPr algn="r">
-                        <a:defRPr>
-                          <a:latin typeface="Roboto"/>
-                        </a:defRPr>
-                      </a:pPr>
-                      <a:r>
-                        <a:rPr sz="1050">
-                          <a:solidFill>
-                            <a:srgbClr val="25342A"/>
-                          </a:solidFill>
-                          <a:latin typeface="Roboto"/>
-                        </a:rPr>
-                        <a:t>$29,698</a:t>
-                      </a:r>
-                    </a:p>
-                  </a:txBody>
-                  <a:tcPr>
-                    <a:solidFill>
-                      <a:srgbClr val="FFFFFF"/>
-                    </a:solidFill>
-                  </a:tcPr>
-                </a:tc>
-                <a:tc>
-                  <a:txBody>
-                    <a:bodyPr/>
-                    <a:lstStyle/>
-                    <a:p>
-                      <a:pPr algn="r">
-                        <a:defRPr>
-                          <a:latin typeface="Roboto"/>
-                        </a:defRPr>
-                      </a:pPr>
-                      <a:r>
-                        <a:rPr sz="1050">
-                          <a:solidFill>
-                            <a:srgbClr val="25342A"/>
-                          </a:solidFill>
-                          <a:latin typeface="Roboto"/>
-                        </a:rPr>
-                        <a:t>5</a:t>
-                      </a:r>
-                    </a:p>
-                  </a:txBody>
-                  <a:tcPr>
-                    <a:solidFill>
-                      <a:srgbClr val="FFFFFF"/>
-                    </a:solidFill>
-                  </a:tcPr>
-                </a:tc>
-              </a:tr>
-              <a:tr h="329184">
-                <a:tc>
-                  <a:txBody>
-                    <a:bodyPr/>
-                    <a:lstStyle/>
-                    <a:p>
-                      <a:pPr>
-                        <a:defRPr>
-                          <a:latin typeface="Roboto"/>
-                        </a:defRPr>
-                      </a:pPr>
-                      <a:r>
-                        <a:rPr sz="1050">
-                          <a:solidFill>
-                            <a:srgbClr val="25342A"/>
-                          </a:solidFill>
-                          <a:latin typeface="Roboto"/>
-                        </a:rPr>
-                        <a:t>Mental health first aid</a:t>
-                      </a:r>
-                    </a:p>
-                  </a:txBody>
-                  <a:tcPr>
-                    <a:solidFill>
-                      <a:srgbClr val="F7FAF7"/>
-                    </a:solidFill>
-                  </a:tcPr>
-                </a:tc>
-                <a:tc>
-                  <a:txBody>
-                    <a:bodyPr/>
-                    <a:lstStyle/>
-                    <a:p>
-                      <a:pPr algn="r">
-                        <a:defRPr>
-                          <a:latin typeface="Roboto"/>
-                        </a:defRPr>
-                      </a:pPr>
-                      <a:r>
-                        <a:rPr sz="1050">
-                          <a:solidFill>
-                            <a:srgbClr val="25342A"/>
-                          </a:solidFill>
-                          <a:latin typeface="Roboto"/>
-                        </a:rPr>
-                        <a:t>$58,745</a:t>
-                      </a:r>
-                    </a:p>
-                  </a:txBody>
-                  <a:tcPr>
-                    <a:solidFill>
-                      <a:srgbClr val="F7FAF7"/>
-                    </a:solidFill>
-                  </a:tcPr>
-                </a:tc>
-                <a:tc>
-                  <a:txBody>
-                    <a:bodyPr/>
-                    <a:lstStyle/>
-                    <a:p>
-                      <a:pPr algn="r">
-                        <a:defRPr>
-                          <a:latin typeface="Roboto"/>
-                        </a:defRPr>
-                      </a:pPr>
-                      <a:r>
-                        <a:rPr sz="1050">
-                          <a:solidFill>
-                            <a:srgbClr val="25342A"/>
-                          </a:solidFill>
-                          <a:latin typeface="Roboto"/>
-                        </a:rPr>
-                        <a:t>$70,000</a:t>
-                      </a:r>
-                    </a:p>
-                  </a:txBody>
-                  <a:tcPr>
-                    <a:solidFill>
-                      <a:srgbClr val="F7FAF7"/>
-                    </a:solidFill>
-                  </a:tcPr>
-                </a:tc>
-                <a:tc>
-                  <a:txBody>
-                    <a:bodyPr/>
-                    <a:lstStyle/>
-                    <a:p>
-                      <a:pPr algn="r">
-                        <a:defRPr>
-                          <a:latin typeface="Roboto"/>
-                        </a:defRPr>
-                      </a:pPr>
-                      <a:r>
-                        <a:rPr sz="1050">
-                          <a:solidFill>
-                            <a:srgbClr val="25342A"/>
-                          </a:solidFill>
-                          <a:latin typeface="Roboto"/>
-                        </a:rPr>
-                        <a:t>83.9%</a:t>
-                      </a:r>
-                    </a:p>
-                  </a:txBody>
-                  <a:tcPr>
-                    <a:solidFill>
-                      <a:srgbClr val="F7FAF7"/>
-                    </a:solidFill>
-                  </a:tcPr>
-                </a:tc>
-                <a:tc>
-                  <a:txBody>
-                    <a:bodyPr/>
-                    <a:lstStyle/>
-                    <a:p>
-                      <a:pPr algn="r">
-                        <a:defRPr>
-                          <a:latin typeface="Roboto"/>
-                        </a:defRPr>
-                      </a:pPr>
-                      <a:r>
-                        <a:rPr sz="1050">
-                          <a:solidFill>
-                            <a:srgbClr val="25342A"/>
-                          </a:solidFill>
-                          <a:latin typeface="Roboto"/>
-                        </a:rPr>
-                        <a:t>$61,255</a:t>
-                      </a:r>
-                    </a:p>
-                  </a:txBody>
-                  <a:tcPr>
-                    <a:solidFill>
-                      <a:srgbClr val="F7FAF7"/>
-                    </a:solidFill>
-                  </a:tcPr>
-                </a:tc>
-                <a:tc>
-                  <a:txBody>
-                    <a:bodyPr/>
-                    <a:lstStyle/>
-                    <a:p>
-                      <a:pPr algn="r">
-                        <a:defRPr>
-                          <a:latin typeface="Roboto"/>
-                        </a:defRPr>
-                      </a:pPr>
-                      <a:r>
-                        <a:rPr sz="1050">
-                          <a:solidFill>
-                            <a:srgbClr val="25342A"/>
-                          </a:solidFill>
-                          <a:latin typeface="Roboto"/>
-                        </a:rPr>
-                        <a:t>5</a:t>
-                      </a:r>
-                    </a:p>
-                  </a:txBody>
-                  <a:tcPr>
-                    <a:solidFill>
-                      <a:srgbClr val="F7FAF7"/>
-                    </a:solidFill>
-                  </a:tcPr>
-                </a:tc>
-              </a:tr>
-              <a:tr h="329184">
-                <a:tc>
-                  <a:txBody>
-                    <a:bodyPr/>
-                    <a:lstStyle/>
-                    <a:p>
-                      <a:pPr>
-                        <a:defRPr>
-                          <a:latin typeface="Roboto"/>
-                        </a:defRPr>
-                      </a:pPr>
-                      <a:r>
-                        <a:rPr sz="1050">
-                          <a:solidFill>
-                            <a:srgbClr val="25342A"/>
-                          </a:solidFill>
-                          <a:latin typeface="Roboto"/>
-                        </a:rPr>
-                        <a:t>Youth outreach</a:t>
-                      </a:r>
-                    </a:p>
-                  </a:txBody>
-                  <a:tcPr>
-                    <a:solidFill>
-                      <a:srgbClr val="FFFFFF"/>
-                    </a:solidFill>
-                  </a:tcPr>
-                </a:tc>
-                <a:tc>
-                  <a:txBody>
-                    <a:bodyPr/>
-                    <a:lstStyle/>
-                    <a:p>
-                      <a:pPr algn="r">
-                        <a:defRPr>
-                          <a:latin typeface="Roboto"/>
-                        </a:defRPr>
-                      </a:pPr>
-                      <a:r>
-                        <a:rPr sz="1050">
-                          <a:solidFill>
-                            <a:srgbClr val="25342A"/>
-                          </a:solidFill>
-                          <a:latin typeface="Roboto"/>
-                        </a:rPr>
-                        <a:t>$309,558</a:t>
-                      </a:r>
-                    </a:p>
-                  </a:txBody>
-                  <a:tcPr>
-                    <a:solidFill>
-                      <a:srgbClr val="FFFFFF"/>
-                    </a:solidFill>
-                  </a:tcPr>
-                </a:tc>
-                <a:tc>
-                  <a:txBody>
-                    <a:bodyPr/>
-                    <a:lstStyle/>
-                    <a:p>
-                      <a:pPr algn="r">
-                        <a:defRPr>
-                          <a:latin typeface="Roboto"/>
-                        </a:defRPr>
-                      </a:pPr>
-                      <a:r>
-                        <a:rPr sz="1050">
-                          <a:solidFill>
-                            <a:srgbClr val="25342A"/>
-                          </a:solidFill>
-                          <a:latin typeface="Roboto"/>
-                        </a:rPr>
-                        <a:t>$320,000</a:t>
-                      </a:r>
-                    </a:p>
-                  </a:txBody>
-                  <a:tcPr>
-                    <a:solidFill>
-                      <a:srgbClr val="FFFFFF"/>
-                    </a:solidFill>
-                  </a:tcPr>
-                </a:tc>
-                <a:tc>
-                  <a:txBody>
-                    <a:bodyPr/>
-                    <a:lstStyle/>
-                    <a:p>
-                      <a:pPr algn="r">
-                        <a:defRPr>
-                          <a:latin typeface="Roboto"/>
-                        </a:defRPr>
-                      </a:pPr>
-                      <a:r>
-                        <a:rPr sz="1050">
-                          <a:solidFill>
-                            <a:srgbClr val="25342A"/>
-                          </a:solidFill>
-                          <a:latin typeface="Roboto"/>
-                        </a:rPr>
-                        <a:t>96.7%</a:t>
-                      </a:r>
-                    </a:p>
-                  </a:txBody>
-                  <a:tcPr>
-                    <a:solidFill>
-                      <a:srgbClr val="FFFFFF"/>
-                    </a:solidFill>
-                  </a:tcPr>
-                </a:tc>
-                <a:tc>
-                  <a:txBody>
-                    <a:bodyPr/>
-                    <a:lstStyle/>
-                    <a:p>
-                      <a:pPr algn="r">
-                        <a:defRPr>
-                          <a:latin typeface="Roboto"/>
-                        </a:defRPr>
-                      </a:pPr>
-                      <a:r>
-                        <a:rPr sz="1050">
-                          <a:solidFill>
-                            <a:srgbClr val="25342A"/>
-                          </a:solidFill>
-                          <a:latin typeface="Roboto"/>
-                        </a:rPr>
-                        <a:t>$170,442</a:t>
-                      </a:r>
-                    </a:p>
-                  </a:txBody>
-                  <a:tcPr>
-                    <a:solidFill>
-                      <a:srgbClr val="FFFFFF"/>
-                    </a:solidFill>
-                  </a:tcPr>
-                </a:tc>
-                <a:tc>
-                  <a:txBody>
-                    <a:bodyPr/>
-                    <a:lstStyle/>
-                    <a:p>
-                      <a:pPr algn="r">
-                        <a:defRPr>
-                          <a:latin typeface="Roboto"/>
-                        </a:defRPr>
-                      </a:pPr>
-                      <a:r>
-                        <a:rPr sz="1050">
-                          <a:solidFill>
-                            <a:srgbClr val="25342A"/>
-                          </a:solidFill>
-                          <a:latin typeface="Roboto"/>
-                        </a:rPr>
-                        <a:t>8</a:t>
-                      </a:r>
-                    </a:p>
-                  </a:txBody>
-                  <a:tcPr>
-                    <a:solidFill>
-                      <a:srgbClr val="FFFFFF"/>
-                    </a:solidFill>
-                  </a:tcPr>
-                </a:tc>
-              </a:tr>
-              <a:tr h="329184">
-                <a:tc>
-                  <a:txBody>
-                    <a:bodyPr/>
-                    <a:lstStyle/>
-                    <a:p>
-                      <a:pPr>
-                        <a:defRPr>
-                          <a:latin typeface="Roboto"/>
-                        </a:defRPr>
-                      </a:pPr>
-                      <a:r>
-                        <a:rPr sz="1050">
-                          <a:solidFill>
-                            <a:srgbClr val="25342A"/>
-                          </a:solidFill>
-                          <a:latin typeface="Roboto"/>
-                        </a:rPr>
-                        <a:t>Community meals</a:t>
-                      </a:r>
-                    </a:p>
-                  </a:txBody>
-                  <a:tcPr>
-                    <a:solidFill>
-                      <a:srgbClr val="F7FAF7"/>
-                    </a:solidFill>
-                  </a:tcPr>
-                </a:tc>
-                <a:tc>
-                  <a:txBody>
-                    <a:bodyPr/>
-                    <a:lstStyle/>
-                    <a:p>
-                      <a:pPr algn="r">
-                        <a:defRPr>
-                          <a:latin typeface="Roboto"/>
-                        </a:defRPr>
-                      </a:pPr>
-                      <a:r>
-                        <a:rPr sz="1050">
-                          <a:solidFill>
-                            <a:srgbClr val="25342A"/>
-                          </a:solidFill>
-                          <a:latin typeface="Roboto"/>
-                        </a:rPr>
-                        <a:t>$12,615</a:t>
-                      </a:r>
-                    </a:p>
-                  </a:txBody>
-                  <a:tcPr>
-                    <a:solidFill>
-                      <a:srgbClr val="F7FAF7"/>
-                    </a:solidFill>
-                  </a:tcPr>
-                </a:tc>
-                <a:tc>
-                  <a:txBody>
-                    <a:bodyPr/>
-                    <a:lstStyle/>
-                    <a:p>
-                      <a:pPr algn="r">
-                        <a:defRPr>
-                          <a:latin typeface="Roboto"/>
-                        </a:defRPr>
-                      </a:pPr>
-                      <a:r>
-                        <a:rPr sz="1050">
-                          <a:solidFill>
-                            <a:srgbClr val="25342A"/>
-                          </a:solidFill>
-                          <a:latin typeface="Roboto"/>
-                        </a:rPr>
-                        <a:t>$16,000</a:t>
-                      </a:r>
-                    </a:p>
-                  </a:txBody>
-                  <a:tcPr>
-                    <a:solidFill>
-                      <a:srgbClr val="F7FAF7"/>
-                    </a:solidFill>
-                  </a:tcPr>
-                </a:tc>
-                <a:tc>
-                  <a:txBody>
-                    <a:bodyPr/>
-                    <a:lstStyle/>
-                    <a:p>
-                      <a:pPr algn="r">
-                        <a:defRPr>
-                          <a:latin typeface="Roboto"/>
-                        </a:defRPr>
-                      </a:pPr>
-                      <a:r>
-                        <a:rPr sz="1050">
-                          <a:solidFill>
-                            <a:srgbClr val="25342A"/>
-                          </a:solidFill>
-                          <a:latin typeface="Roboto"/>
-                        </a:rPr>
-                        <a:t>78.8%</a:t>
-                      </a:r>
-                    </a:p>
-                  </a:txBody>
-                  <a:tcPr>
-                    <a:solidFill>
-                      <a:srgbClr val="F7FAF7"/>
-                    </a:solidFill>
-                  </a:tcPr>
-                </a:tc>
-                <a:tc>
-                  <a:txBody>
-                    <a:bodyPr/>
-                    <a:lstStyle/>
-                    <a:p>
-                      <a:pPr algn="r">
-                        <a:defRPr>
-                          <a:latin typeface="Roboto"/>
-                        </a:defRPr>
-                      </a:pPr>
-                      <a:r>
-                        <a:rPr sz="1050">
-                          <a:solidFill>
-                            <a:srgbClr val="25342A"/>
-                          </a:solidFill>
-                          <a:latin typeface="Roboto"/>
-                        </a:rPr>
-                        <a:t>$35,385</a:t>
-                      </a:r>
-                    </a:p>
-                  </a:txBody>
-                  <a:tcPr>
-                    <a:solidFill>
-                      <a:srgbClr val="F7FAF7"/>
-                    </a:solidFill>
-                  </a:tcPr>
-                </a:tc>
-                <a:tc>
-                  <a:txBody>
-                    <a:bodyPr/>
-                    <a:lstStyle/>
-                    <a:p>
-                      <a:pPr algn="r">
-                        <a:defRPr>
-                          <a:latin typeface="Roboto"/>
-                        </a:defRPr>
-                      </a:pPr>
-                      <a:r>
-                        <a:rPr sz="1050">
-                          <a:solidFill>
-                            <a:srgbClr val="25342A"/>
-                          </a:solidFill>
-                          <a:latin typeface="Roboto"/>
-                        </a:rPr>
-                        <a:t>8</a:t>
-                      </a:r>
-                    </a:p>
-                  </a:txBody>
-                  <a:tcPr>
-                    <a:solidFill>
-                      <a:srgbClr val="F7FAF7"/>
-                    </a:solidFill>
-                  </a:tcPr>
-                </a:tc>
-              </a:tr>
-            </a:tbl>
-          </a:graphicData>
-        </a:graphic>
-      </p:graphicFrame>
-      <p:sp>
-        <p:nvSpPr>
-          <p:cNvPr id="6" name="TextBox 5"/>
-          <p:cNvSpPr txBox="1"/>
-          <p:nvPr/>
-        </p:nvSpPr>
-        <p:spPr>
-          <a:xfrm>
-            <a:off x="457200" y="6492240"/>
-            <a:ext cx="3657600" cy="274320"/>
-          </a:xfrm>
-          <a:prstGeom prst="rect">
-            <a:avLst/>
-          </a:prstGeom>
-          <a:noFill/>
-        </p:spPr>
-        <p:txBody>
-          <a:bodyPr wrap="square">
-            <a:spAutoFit/>
-          </a:bodyPr>
-          <a:lstStyle/>
-          <a:p>
-            <a:pPr>
-              <a:defRPr>
-                <a:latin typeface="Roboto"/>
-              </a:defRPr>
-            </a:pPr>
-            <a:r>
-              <a:rPr sz="900" b="0">
-                <a:solidFill>
-                  <a:srgbClr val="5F6F63"/>
-                </a:solidFill>
-                <a:latin typeface="Roboto"/>
-              </a:rPr>
-              <a:t>board.pptx</a:t>
-            </a:r>
-          </a:p>
-        </p:txBody>
-      </p:sp>
-      <p:sp>
-        <p:nvSpPr>
-          <p:cNvPr id="7" name="TextBox 6"/>
-          <p:cNvSpPr txBox="1"/>
-          <p:nvPr/>
-        </p:nvSpPr>
-        <p:spPr>
-          <a:xfrm>
-            <a:off x="4297680" y="6492240"/>
-            <a:ext cx="3657600" cy="274320"/>
-          </a:xfrm>
-          <a:prstGeom prst="rect">
-            <a:avLst/>
-          </a:prstGeom>
-          <a:noFill/>
-        </p:spPr>
-        <p:txBody>
-          <a:bodyPr wrap="square">
-            <a:spAutoFit/>
-          </a:bodyPr>
-          <a:lstStyle/>
-          <a:p>
-            <a:pPr algn="ctr">
-              <a:defRPr>
-                <a:latin typeface="Roboto"/>
-              </a:defRPr>
-            </a:pPr>
-            <a:r>
-              <a:rPr sz="900" b="0">
-                <a:solidFill>
-                  <a:srgbClr val="5F6F63"/>
-                </a:solidFill>
-                <a:latin typeface="Roboto"/>
-              </a:rPr>
-              <a:t>Data retrieved 2pm, Tue 6 Oct 2026 · Sample data</a:t>
-            </a:r>
-          </a:p>
-        </p:txBody>
-      </p:sp>
-      <p:sp>
-        <p:nvSpPr>
-          <p:cNvPr id="8" name="TextBox 7"/>
-          <p:cNvSpPr txBox="1"/>
-          <p:nvPr/>
-        </p:nvSpPr>
-        <p:spPr>
-          <a:xfrm>
-            <a:off x="8503920" y="6492240"/>
-            <a:ext cx="3200400" cy="274320"/>
-          </a:xfrm>
-          <a:prstGeom prst="rect">
-            <a:avLst/>
-          </a:prstGeom>
-          <a:noFill/>
-        </p:spPr>
-        <p:txBody>
-          <a:bodyPr wrap="square">
-            <a:spAutoFit/>
-          </a:bodyPr>
-          <a:lstStyle/>
-          <a:p>
-            <a:pPr algn="r">
-              <a:defRPr>
-                <a:latin typeface="Roboto"/>
-              </a:defRPr>
-            </a:pPr>
-            <a:r>
-              <a:rPr sz="900" b="0">
-                <a:solidFill>
-                  <a:srgbClr val="5F6F63"/>
-                </a:solidFill>
-                <a:latin typeface="Roboto"/>
-              </a:rPr>
-              <a:t>Slide 4 of 5</a:t>
-            </a:r>
-          </a:p>
-        </p:txBody>
-      </p:sp>
-    </p:spTree>
-  </p:cSld>
-  <p:clrMapOvr>
-    <a:masterClrMapping/>
-  </p:clrMapOvr>
-</p:sld>
-</file>
-
-<file path=ppt/slides/slide5.xml><?xml version="1.0" encoding="utf-8"?>
-<p:sld xmlns:a="http://schemas.openxmlformats.org/drawingml/2006/main" xmlns:p="http://schemas.openxmlformats.org/presentationml/2006/main" xmlns:r="http://schemas.openxmlformats.org/officeDocument/2006/relationships">
-  <p:cSld>
-    <p:spTree>
-      <p:nvGrpSpPr>
-        <p:cNvPr id="1" name=""/>
-        <p:cNvGrpSpPr/>
-        <p:nvPr/>
-      </p:nvGrpSpPr>
-      <p:grpSpPr/>
-      <p:sp>
-        <p:nvSpPr>
-          <p:cNvPr id="2" name="Rectangle 1"/>
-          <p:cNvSpPr/>
-          <p:nvPr/>
-        </p:nvSpPr>
-        <p:spPr>
-          <a:xfrm>
-            <a:off x="0" y="0"/>
-            <a:ext cx="12191695" cy="73152"/>
-          </a:xfrm>
-          <a:prstGeom prst="rect">
-            <a:avLst/>
-          </a:prstGeom>
-          <a:solidFill>
-            <a:srgbClr val="2F7A5D"/>
-          </a:solidFill>
-          <a:ln>
-            <a:noFill/>
-          </a:ln>
-        </p:spPr>
-        <p:style>
-          <a:lnRef idx="1">
-            <a:schemeClr val="accent1"/>
-          </a:lnRef>
-          <a:fillRef idx="3">
-            <a:schemeClr val="accent1"/>
-          </a:fillRef>
-          <a:effectRef idx="2">
-            <a:schemeClr val="accent1"/>
-          </a:effectRef>
-          <a:fontRef idx="minor">
-            <a:schemeClr val="lt1"/>
-          </a:fontRef>
-        </p:style>
-        <p:txBody>
-          <a:bodyPr rtlCol="0" anchor="ctr"/>
-          <a:lstStyle/>
-          <a:p>
-            <a:pPr algn="ctr">
-              <a:defRPr>
-                <a:latin typeface="Roboto"/>
-              </a:defRPr>
-            </a:pPr>
-          </a:p>
-        </p:txBody>
-      </p:sp>
-      <p:sp>
-        <p:nvSpPr>
-          <p:cNvPr id="3" name="TextBox 2"/>
-          <p:cNvSpPr txBox="1"/>
-          <p:nvPr/>
-        </p:nvSpPr>
-        <p:spPr>
-          <a:xfrm>
-            <a:off x="457200" y="164592"/>
-            <a:ext cx="7315200" cy="274320"/>
-          </a:xfrm>
-          <a:prstGeom prst="rect">
-            <a:avLst/>
-          </a:prstGeom>
-          <a:noFill/>
-        </p:spPr>
-        <p:txBody>
-          <a:bodyPr wrap="square">
-            <a:spAutoFit/>
-          </a:bodyPr>
-          <a:lstStyle/>
-          <a:p>
-            <a:pPr>
-              <a:defRPr>
-                <a:latin typeface="Roboto"/>
-              </a:defRPr>
-            </a:pPr>
-            <a:r>
-              <a:rPr sz="1000" b="0">
-                <a:solidFill>
-                  <a:srgbClr val="5F6F63"/>
-                </a:solidFill>
-                <a:latin typeface="Roboto"/>
-              </a:rPr>
-              <a:t>Sample Community Services Ltd · What does the board need to see?</a:t>
-            </a:r>
-          </a:p>
-        </p:txBody>
-      </p:sp>
-      <p:sp>
-        <p:nvSpPr>
-          <p:cNvPr id="4" name="TextBox 3"/>
-          <p:cNvSpPr txBox="1"/>
-          <p:nvPr/>
-        </p:nvSpPr>
-        <p:spPr>
-          <a:xfrm>
-            <a:off x="457200" y="411480"/>
-            <a:ext cx="11247120" cy="548640"/>
-          </a:xfrm>
-          <a:prstGeom prst="rect">
-            <a:avLst/>
-          </a:prstGeom>
-          <a:noFill/>
-        </p:spPr>
-        <p:txBody>
-          <a:bodyPr wrap="square">
-            <a:spAutoFit/>
-          </a:bodyPr>
-          <a:lstStyle/>
-          <a:p>
-            <a:pPr>
-              <a:defRPr>
-                <a:latin typeface="Roboto"/>
-              </a:defRPr>
-            </a:pPr>
-            <a:r>
-              <a:rPr sz="2400" b="1">
-                <a:solidFill>
-                  <a:srgbClr val="25342A"/>
-                </a:solidFill>
-                <a:latin typeface="Roboto"/>
-              </a:rPr>
-              <a:t>Decisions to make</a:t>
-            </a:r>
-          </a:p>
-        </p:txBody>
-      </p:sp>
-      <p:sp>
-        <p:nvSpPr>
-          <p:cNvPr id="5" name="Rectangle 4"/>
-          <p:cNvSpPr/>
-          <p:nvPr/>
-        </p:nvSpPr>
-        <p:spPr>
-          <a:xfrm>
-            <a:off x="457200" y="1554480"/>
-            <a:ext cx="11277295" cy="4389120"/>
-          </a:xfrm>
-          <a:prstGeom prst="rect">
-            <a:avLst/>
-          </a:prstGeom>
-          <a:solidFill>
-            <a:srgbClr val="FFFFFF"/>
+            <a:srgbClr val="EEF5F0"/>
           </a:solidFill>
           <a:ln>
             <a:solidFill>
@@ -6506,14 +5031,14 @@
       </p:sp>
       <p:sp>
         <p:nvSpPr>
-          <p:cNvPr id="6" name="TextBox 5"/>
+          <p:cNvPr id="25" name="TextBox 24"/>
           <p:cNvSpPr txBox="1"/>
           <p:nvPr/>
         </p:nvSpPr>
         <p:spPr>
           <a:xfrm>
-            <a:off x="685800" y="1691640"/>
-            <a:ext cx="10820095" cy="365760"/>
+            <a:off x="6370167" y="2340864"/>
+            <a:ext cx="5227167" cy="274320"/>
           </a:xfrm>
           <a:prstGeom prst="rect">
             <a:avLst/>
@@ -6521,7 +5046,7 @@
           <a:noFill/>
         </p:spPr>
         <p:txBody>
-          <a:bodyPr wrap="square">
+          <a:bodyPr wrap="square" lIns="45720" rIns="45720">
             <a:spAutoFit/>
           </a:bodyPr>
           <a:lstStyle/>
@@ -6532,7 +5057,7 @@
               </a:defRPr>
             </a:pPr>
             <a:r>
-              <a:rPr sz="1100" b="1">
+              <a:rPr sz="1000" b="1">
                 <a:solidFill>
                   <a:srgbClr val="5F6F63"/>
                 </a:solidFill>
@@ -6545,14 +5070,14 @@
       </p:sp>
       <p:sp>
         <p:nvSpPr>
-          <p:cNvPr id="7" name="TextBox 6"/>
+          <p:cNvPr id="26" name="TextBox 25"/>
           <p:cNvSpPr txBox="1"/>
           <p:nvPr/>
         </p:nvSpPr>
         <p:spPr>
           <a:xfrm>
-            <a:off x="685800" y="2103120"/>
-            <a:ext cx="10820095" cy="3749039"/>
+            <a:off x="6370167" y="2615184"/>
+            <a:ext cx="5227167" cy="1524000"/>
           </a:xfrm>
           <a:prstGeom prst="rect">
             <a:avLst/>
@@ -6560,7 +5085,7 @@
           <a:noFill/>
         </p:spPr>
         <p:txBody>
-          <a:bodyPr wrap="square">
+          <a:bodyPr wrap="square" lIns="45720" rIns="45720">
             <a:spAutoFit/>
           </a:bodyPr>
           <a:lstStyle/>
@@ -6571,13 +5096,13 @@
               </a:defRPr>
             </a:pPr>
             <a:r>
-              <a:rPr sz="1600" b="0">
+              <a:rPr sz="1200" b="0">
                 <a:solidFill>
                   <a:srgbClr val="25342A"/>
                 </a:solidFill>
                 <a:latin typeface="Roboto"/>
               </a:rPr>
-              <a:t>• Housing support: lift spending to $48,921 a month, or ask State Housing Program about carrying the balance over.</a:t>
+              <a:t>1. Housing support: lift spending to $48,921 a month, or ask State Housing Program about carrying the balance over.</a:t>
             </a:r>
           </a:p>
           <a:p>
@@ -6587,13 +5112,13 @@
               </a:defRPr>
             </a:pPr>
             <a:r>
-              <a:rPr sz="1600" b="0">
+              <a:rPr sz="1200" b="0">
                 <a:solidFill>
                   <a:srgbClr val="25342A"/>
                 </a:solidFill>
                 <a:latin typeface="Roboto"/>
               </a:rPr>
-              <a:t>• Reserves: how much of each month's surplus goes to reserves, and by when the target is reached.</a:t>
+              <a:t>2. Reserves: how much of each month's surplus goes to reserves, and by when the target is reached.</a:t>
             </a:r>
           </a:p>
           <a:p>
@@ -6603,27 +5128,27 @@
               </a:defRPr>
             </a:pPr>
             <a:r>
-              <a:rPr sz="1600" b="0">
+              <a:rPr sz="1200" b="0">
                 <a:solidFill>
                   <a:srgbClr val="25342A"/>
                 </a:solidFill>
                 <a:latin typeface="Roboto"/>
               </a:rPr>
-              <a:t>• Fundraising: where the next spare hours go, given what each source costs to raise.</a:t>
-            </a:r>
-          </a:p>
-        </p:txBody>
-      </p:sp>
-      <p:sp>
-        <p:nvSpPr>
-          <p:cNvPr id="8" name="TextBox 7"/>
+              <a:t>3. Fundraising: where the next spare hours go, given what each source costs to raise.</a:t>
+            </a:r>
+          </a:p>
+        </p:txBody>
+      </p:sp>
+      <p:sp>
+        <p:nvSpPr>
+          <p:cNvPr id="27" name="TextBox 26"/>
           <p:cNvSpPr txBox="1"/>
           <p:nvPr/>
         </p:nvSpPr>
         <p:spPr>
           <a:xfrm>
-            <a:off x="457200" y="6492240"/>
-            <a:ext cx="3657600" cy="274320"/>
+            <a:off x="457200" y="4312920"/>
+            <a:ext cx="11277295" cy="274320"/>
           </a:xfrm>
           <a:prstGeom prst="rect">
             <a:avLst/>
@@ -6631,7 +5156,7 @@
           <a:noFill/>
         </p:spPr>
         <p:txBody>
-          <a:bodyPr wrap="square">
+          <a:bodyPr wrap="square" lIns="45720" rIns="45720">
             <a:spAutoFit/>
           </a:bodyPr>
           <a:lstStyle/>
@@ -6642,27 +5167,1205 @@
               </a:defRPr>
             </a:pPr>
             <a:r>
-              <a:rPr sz="900" b="0">
+              <a:rPr sz="1000" b="1">
                 <a:solidFill>
                   <a:srgbClr val="5F6F63"/>
                 </a:solidFill>
                 <a:latin typeface="Roboto"/>
               </a:rPr>
-              <a:t>board.pptx</a:t>
-            </a:r>
-          </a:p>
-        </p:txBody>
-      </p:sp>
-      <p:sp>
-        <p:nvSpPr>
-          <p:cNvPr id="9" name="TextBox 8"/>
+              <a:t>GRANTS · AGAINST BUDGET: RED WHEN SPENDING IS MORE THAN 1% OVER OR UNDER BUDGET TO DATE, AMBER WITHIN 1%.</a:t>
+            </a:r>
+          </a:p>
+        </p:txBody>
+      </p:sp>
+      <p:graphicFrame>
+        <p:nvGraphicFramePr>
+          <p:cNvPr id="28" name="Table 27"/>
+          <p:cNvGraphicFramePr>
+            <a:graphicFrameLocks noGrp="1"/>
+          </p:cNvGraphicFramePr>
+          <p:nvPr/>
+        </p:nvGraphicFramePr>
+        <p:xfrm>
+          <a:off x="457200" y="4587240"/>
+          <a:ext cx="11277295" cy="1728216"/>
+        </p:xfrm>
+        <a:graphic>
+          <a:graphicData uri="http://schemas.openxmlformats.org/drawingml/2006/table">
+            <a:tbl>
+              <a:tblPr firstRow="1" bandRow="1">
+                <a:tableStyleId>{5C22544A-7EE6-4342-B048-85BDC9FD1C3A}</a:tableStyleId>
+              </a:tblPr>
+              <a:tblGrid>
+                <a:gridCol w="1879549"/>
+                <a:gridCol w="1879549"/>
+                <a:gridCol w="1879549"/>
+                <a:gridCol w="1879549"/>
+                <a:gridCol w="1879549"/>
+                <a:gridCol w="1879550"/>
+              </a:tblGrid>
+              <a:tr h="246888">
+                <a:tc>
+                  <a:txBody>
+                    <a:bodyPr/>
+                    <a:lstStyle/>
+                    <a:p>
+                      <a:pPr algn="l">
+                        <a:defRPr>
+                          <a:latin typeface="Roboto"/>
+                        </a:defRPr>
+                      </a:pPr>
+                      <a:r>
+                        <a:rPr sz="1050" b="1">
+                          <a:solidFill>
+                            <a:srgbClr val="FFFFFF"/>
+                          </a:solidFill>
+                          <a:latin typeface="Roboto"/>
+                        </a:rPr>
+                        <a:t>Program</a:t>
+                      </a:r>
+                    </a:p>
+                  </a:txBody>
+                  <a:tcPr>
+                    <a:solidFill>
+                      <a:srgbClr val="2F7A5D"/>
+                    </a:solidFill>
+                  </a:tcPr>
+                </a:tc>
+                <a:tc>
+                  <a:txBody>
+                    <a:bodyPr/>
+                    <a:lstStyle/>
+                    <a:p>
+                      <a:pPr algn="r">
+                        <a:defRPr>
+                          <a:latin typeface="Roboto"/>
+                        </a:defRPr>
+                      </a:pPr>
+                      <a:r>
+                        <a:rPr sz="1050" b="1">
+                          <a:solidFill>
+                            <a:srgbClr val="FFFFFF"/>
+                          </a:solidFill>
+                          <a:latin typeface="Roboto"/>
+                        </a:rPr>
+                        <a:t>Spent to date</a:t>
+                      </a:r>
+                    </a:p>
+                  </a:txBody>
+                  <a:tcPr>
+                    <a:solidFill>
+                      <a:srgbClr val="2F7A5D"/>
+                    </a:solidFill>
+                  </a:tcPr>
+                </a:tc>
+                <a:tc>
+                  <a:txBody>
+                    <a:bodyPr/>
+                    <a:lstStyle/>
+                    <a:p>
+                      <a:pPr algn="r">
+                        <a:defRPr>
+                          <a:latin typeface="Roboto"/>
+                        </a:defRPr>
+                      </a:pPr>
+                      <a:r>
+                        <a:rPr sz="1050" b="1">
+                          <a:solidFill>
+                            <a:srgbClr val="FFFFFF"/>
+                          </a:solidFill>
+                          <a:latin typeface="Roboto"/>
+                        </a:rPr>
+                        <a:t>Budget to date</a:t>
+                      </a:r>
+                    </a:p>
+                  </a:txBody>
+                  <a:tcPr>
+                    <a:solidFill>
+                      <a:srgbClr val="2F7A5D"/>
+                    </a:solidFill>
+                  </a:tcPr>
+                </a:tc>
+                <a:tc>
+                  <a:txBody>
+                    <a:bodyPr/>
+                    <a:lstStyle/>
+                    <a:p>
+                      <a:pPr algn="r">
+                        <a:defRPr>
+                          <a:latin typeface="Roboto"/>
+                        </a:defRPr>
+                      </a:pPr>
+                      <a:r>
+                        <a:rPr sz="1050" b="1">
+                          <a:solidFill>
+                            <a:srgbClr val="FFFFFF"/>
+                          </a:solidFill>
+                          <a:latin typeface="Roboto"/>
+                        </a:rPr>
+                        <a:t>Against budget</a:t>
+                      </a:r>
+                    </a:p>
+                  </a:txBody>
+                  <a:tcPr>
+                    <a:solidFill>
+                      <a:srgbClr val="2F7A5D"/>
+                    </a:solidFill>
+                  </a:tcPr>
+                </a:tc>
+                <a:tc>
+                  <a:txBody>
+                    <a:bodyPr/>
+                    <a:lstStyle/>
+                    <a:p>
+                      <a:pPr algn="r">
+                        <a:defRPr>
+                          <a:latin typeface="Roboto"/>
+                        </a:defRPr>
+                      </a:pPr>
+                      <a:r>
+                        <a:rPr sz="1050" b="1">
+                          <a:solidFill>
+                            <a:srgbClr val="FFFFFF"/>
+                          </a:solidFill>
+                          <a:latin typeface="Roboto"/>
+                        </a:rPr>
+                        <a:t>Still to spend</a:t>
+                      </a:r>
+                    </a:p>
+                  </a:txBody>
+                  <a:tcPr>
+                    <a:solidFill>
+                      <a:srgbClr val="2F7A5D"/>
+                    </a:solidFill>
+                  </a:tcPr>
+                </a:tc>
+                <a:tc>
+                  <a:txBody>
+                    <a:bodyPr/>
+                    <a:lstStyle/>
+                    <a:p>
+                      <a:pPr algn="r">
+                        <a:defRPr>
+                          <a:latin typeface="Roboto"/>
+                        </a:defRPr>
+                      </a:pPr>
+                      <a:r>
+                        <a:rPr sz="1050" b="1">
+                          <a:solidFill>
+                            <a:srgbClr val="FFFFFF"/>
+                          </a:solidFill>
+                          <a:latin typeface="Roboto"/>
+                        </a:rPr>
+                        <a:t>Months left</a:t>
+                      </a:r>
+                    </a:p>
+                  </a:txBody>
+                  <a:tcPr>
+                    <a:solidFill>
+                      <a:srgbClr val="2F7A5D"/>
+                    </a:solidFill>
+                  </a:tcPr>
+                </a:tc>
+              </a:tr>
+              <a:tr h="246888">
+                <a:tc>
+                  <a:txBody>
+                    <a:bodyPr/>
+                    <a:lstStyle/>
+                    <a:p>
+                      <a:pPr algn="l">
+                        <a:defRPr>
+                          <a:latin typeface="Roboto"/>
+                        </a:defRPr>
+                      </a:pPr>
+                      <a:r>
+                        <a:rPr sz="1000">
+                          <a:solidFill>
+                            <a:srgbClr val="25342A"/>
+                          </a:solidFill>
+                          <a:latin typeface="Roboto"/>
+                        </a:rPr>
+                        <a:t>Housing support</a:t>
+                      </a:r>
+                    </a:p>
+                  </a:txBody>
+                  <a:tcPr>
+                    <a:solidFill>
+                      <a:srgbClr val="FFFFFF"/>
+                    </a:solidFill>
+                  </a:tcPr>
+                </a:tc>
+                <a:tc>
+                  <a:txBody>
+                    <a:bodyPr/>
+                    <a:lstStyle/>
+                    <a:p>
+                      <a:pPr algn="r">
+                        <a:defRPr>
+                          <a:latin typeface="Roboto"/>
+                        </a:defRPr>
+                      </a:pPr>
+                      <a:r>
+                        <a:rPr sz="1000">
+                          <a:solidFill>
+                            <a:srgbClr val="25342A"/>
+                          </a:solidFill>
+                          <a:latin typeface="Roboto"/>
+                        </a:rPr>
+                        <a:t>$262,158</a:t>
+                      </a:r>
+                    </a:p>
+                  </a:txBody>
+                  <a:tcPr>
+                    <a:solidFill>
+                      <a:srgbClr val="FFFFFF"/>
+                    </a:solidFill>
+                  </a:tcPr>
+                </a:tc>
+                <a:tc>
+                  <a:txBody>
+                    <a:bodyPr/>
+                    <a:lstStyle/>
+                    <a:p>
+                      <a:pPr algn="r">
+                        <a:defRPr>
+                          <a:latin typeface="Roboto"/>
+                        </a:defRPr>
+                      </a:pPr>
+                      <a:r>
+                        <a:rPr sz="1000">
+                          <a:solidFill>
+                            <a:srgbClr val="25342A"/>
+                          </a:solidFill>
+                          <a:latin typeface="Roboto"/>
+                        </a:rPr>
+                        <a:t>$300,000</a:t>
+                      </a:r>
+                    </a:p>
+                  </a:txBody>
+                  <a:tcPr>
+                    <a:solidFill>
+                      <a:srgbClr val="FFFFFF"/>
+                    </a:solidFill>
+                  </a:tcPr>
+                </a:tc>
+                <a:tc>
+                  <a:txBody>
+                    <a:bodyPr/>
+                    <a:lstStyle/>
+                    <a:p>
+                      <a:pPr algn="r">
+                        <a:defRPr>
+                          <a:latin typeface="Roboto"/>
+                        </a:defRPr>
+                      </a:pPr>
+                      <a:r>
+                        <a:rPr sz="1000" b="1">
+                          <a:solidFill>
+                            <a:srgbClr val="B42318"/>
+                          </a:solidFill>
+                          <a:latin typeface="Roboto"/>
+                        </a:rPr>
+                        <a:t>87.4%</a:t>
+                      </a:r>
+                    </a:p>
+                  </a:txBody>
+                  <a:tcPr>
+                    <a:solidFill>
+                      <a:srgbClr val="FFFFFF"/>
+                    </a:solidFill>
+                  </a:tcPr>
+                </a:tc>
+                <a:tc>
+                  <a:txBody>
+                    <a:bodyPr/>
+                    <a:lstStyle/>
+                    <a:p>
+                      <a:pPr algn="r">
+                        <a:defRPr>
+                          <a:latin typeface="Roboto"/>
+                        </a:defRPr>
+                      </a:pPr>
+                      <a:r>
+                        <a:rPr sz="1000">
+                          <a:solidFill>
+                            <a:srgbClr val="25342A"/>
+                          </a:solidFill>
+                          <a:latin typeface="Roboto"/>
+                        </a:rPr>
+                        <a:t>$97,842</a:t>
+                      </a:r>
+                    </a:p>
+                  </a:txBody>
+                  <a:tcPr>
+                    <a:solidFill>
+                      <a:srgbClr val="FFFFFF"/>
+                    </a:solidFill>
+                  </a:tcPr>
+                </a:tc>
+                <a:tc>
+                  <a:txBody>
+                    <a:bodyPr/>
+                    <a:lstStyle/>
+                    <a:p>
+                      <a:pPr algn="r">
+                        <a:defRPr>
+                          <a:latin typeface="Roboto"/>
+                        </a:defRPr>
+                      </a:pPr>
+                      <a:r>
+                        <a:rPr sz="1000">
+                          <a:solidFill>
+                            <a:srgbClr val="25342A"/>
+                          </a:solidFill>
+                          <a:latin typeface="Roboto"/>
+                        </a:rPr>
+                        <a:t>2</a:t>
+                      </a:r>
+                    </a:p>
+                  </a:txBody>
+                  <a:tcPr>
+                    <a:solidFill>
+                      <a:srgbClr val="FFFFFF"/>
+                    </a:solidFill>
+                  </a:tcPr>
+                </a:tc>
+              </a:tr>
+              <a:tr h="246888">
+                <a:tc>
+                  <a:txBody>
+                    <a:bodyPr/>
+                    <a:lstStyle/>
+                    <a:p>
+                      <a:pPr algn="l">
+                        <a:defRPr>
+                          <a:latin typeface="Roboto"/>
+                        </a:defRPr>
+                      </a:pPr>
+                      <a:r>
+                        <a:rPr sz="1000">
+                          <a:solidFill>
+                            <a:srgbClr val="25342A"/>
+                          </a:solidFill>
+                          <a:latin typeface="Roboto"/>
+                        </a:rPr>
+                        <a:t>Volunteer coordinator</a:t>
+                      </a:r>
+                    </a:p>
+                  </a:txBody>
+                  <a:tcPr>
+                    <a:solidFill>
+                      <a:srgbClr val="F7FAF7"/>
+                    </a:solidFill>
+                  </a:tcPr>
+                </a:tc>
+                <a:tc>
+                  <a:txBody>
+                    <a:bodyPr/>
+                    <a:lstStyle/>
+                    <a:p>
+                      <a:pPr algn="r">
+                        <a:defRPr>
+                          <a:latin typeface="Roboto"/>
+                        </a:defRPr>
+                      </a:pPr>
+                      <a:r>
+                        <a:rPr sz="1000">
+                          <a:solidFill>
+                            <a:srgbClr val="25342A"/>
+                          </a:solidFill>
+                          <a:latin typeface="Roboto"/>
+                        </a:rPr>
+                        <a:t>$21,429</a:t>
+                      </a:r>
+                    </a:p>
+                  </a:txBody>
+                  <a:tcPr>
+                    <a:solidFill>
+                      <a:srgbClr val="F7FAF7"/>
+                    </a:solidFill>
+                  </a:tcPr>
+                </a:tc>
+                <a:tc>
+                  <a:txBody>
+                    <a:bodyPr/>
+                    <a:lstStyle/>
+                    <a:p>
+                      <a:pPr algn="r">
+                        <a:defRPr>
+                          <a:latin typeface="Roboto"/>
+                        </a:defRPr>
+                      </a:pPr>
+                      <a:r>
+                        <a:rPr sz="1000">
+                          <a:solidFill>
+                            <a:srgbClr val="25342A"/>
+                          </a:solidFill>
+                          <a:latin typeface="Roboto"/>
+                        </a:rPr>
+                        <a:t>$24,000</a:t>
+                      </a:r>
+                    </a:p>
+                  </a:txBody>
+                  <a:tcPr>
+                    <a:solidFill>
+                      <a:srgbClr val="F7FAF7"/>
+                    </a:solidFill>
+                  </a:tcPr>
+                </a:tc>
+                <a:tc>
+                  <a:txBody>
+                    <a:bodyPr/>
+                    <a:lstStyle/>
+                    <a:p>
+                      <a:pPr algn="r">
+                        <a:defRPr>
+                          <a:latin typeface="Roboto"/>
+                        </a:defRPr>
+                      </a:pPr>
+                      <a:r>
+                        <a:rPr sz="1000" b="1">
+                          <a:solidFill>
+                            <a:srgbClr val="B42318"/>
+                          </a:solidFill>
+                          <a:latin typeface="Roboto"/>
+                        </a:rPr>
+                        <a:t>89.3%</a:t>
+                      </a:r>
+                    </a:p>
+                  </a:txBody>
+                  <a:tcPr>
+                    <a:solidFill>
+                      <a:srgbClr val="F7FAF7"/>
+                    </a:solidFill>
+                  </a:tcPr>
+                </a:tc>
+                <a:tc>
+                  <a:txBody>
+                    <a:bodyPr/>
+                    <a:lstStyle/>
+                    <a:p>
+                      <a:pPr algn="r">
+                        <a:defRPr>
+                          <a:latin typeface="Roboto"/>
+                        </a:defRPr>
+                      </a:pPr>
+                      <a:r>
+                        <a:rPr sz="1000">
+                          <a:solidFill>
+                            <a:srgbClr val="25342A"/>
+                          </a:solidFill>
+                          <a:latin typeface="Roboto"/>
+                        </a:rPr>
+                        <a:t>$14,571</a:t>
+                      </a:r>
+                    </a:p>
+                  </a:txBody>
+                  <a:tcPr>
+                    <a:solidFill>
+                      <a:srgbClr val="F7FAF7"/>
+                    </a:solidFill>
+                  </a:tcPr>
+                </a:tc>
+                <a:tc>
+                  <a:txBody>
+                    <a:bodyPr/>
+                    <a:lstStyle/>
+                    <a:p>
+                      <a:pPr algn="r">
+                        <a:defRPr>
+                          <a:latin typeface="Roboto"/>
+                        </a:defRPr>
+                      </a:pPr>
+                      <a:r>
+                        <a:rPr sz="1000">
+                          <a:solidFill>
+                            <a:srgbClr val="25342A"/>
+                          </a:solidFill>
+                          <a:latin typeface="Roboto"/>
+                        </a:rPr>
+                        <a:t>4</a:t>
+                      </a:r>
+                    </a:p>
+                  </a:txBody>
+                  <a:tcPr>
+                    <a:solidFill>
+                      <a:srgbClr val="F7FAF7"/>
+                    </a:solidFill>
+                  </a:tcPr>
+                </a:tc>
+              </a:tr>
+              <a:tr h="246888">
+                <a:tc>
+                  <a:txBody>
+                    <a:bodyPr/>
+                    <a:lstStyle/>
+                    <a:p>
+                      <a:pPr algn="l">
+                        <a:defRPr>
+                          <a:latin typeface="Roboto"/>
+                        </a:defRPr>
+                      </a:pPr>
+                      <a:r>
+                        <a:rPr sz="1000">
+                          <a:solidFill>
+                            <a:srgbClr val="25342A"/>
+                          </a:solidFill>
+                          <a:latin typeface="Roboto"/>
+                        </a:rPr>
+                        <a:t>Digital literacy</a:t>
+                      </a:r>
+                    </a:p>
+                  </a:txBody>
+                  <a:tcPr>
+                    <a:solidFill>
+                      <a:srgbClr val="FFFFFF"/>
+                    </a:solidFill>
+                  </a:tcPr>
+                </a:tc>
+                <a:tc>
+                  <a:txBody>
+                    <a:bodyPr/>
+                    <a:lstStyle/>
+                    <a:p>
+                      <a:pPr algn="r">
+                        <a:defRPr>
+                          <a:latin typeface="Roboto"/>
+                        </a:defRPr>
+                      </a:pPr>
+                      <a:r>
+                        <a:rPr sz="1000">
+                          <a:solidFill>
+                            <a:srgbClr val="25342A"/>
+                          </a:solidFill>
+                          <a:latin typeface="Roboto"/>
+                        </a:rPr>
+                        <a:t>$60,302</a:t>
+                      </a:r>
+                    </a:p>
+                  </a:txBody>
+                  <a:tcPr>
+                    <a:solidFill>
+                      <a:srgbClr val="FFFFFF"/>
+                    </a:solidFill>
+                  </a:tcPr>
+                </a:tc>
+                <a:tc>
+                  <a:txBody>
+                    <a:bodyPr/>
+                    <a:lstStyle/>
+                    <a:p>
+                      <a:pPr algn="r">
+                        <a:defRPr>
+                          <a:latin typeface="Roboto"/>
+                        </a:defRPr>
+                      </a:pPr>
+                      <a:r>
+                        <a:rPr sz="1000">
+                          <a:solidFill>
+                            <a:srgbClr val="25342A"/>
+                          </a:solidFill>
+                          <a:latin typeface="Roboto"/>
+                        </a:rPr>
+                        <a:t>$65,000</a:t>
+                      </a:r>
+                    </a:p>
+                  </a:txBody>
+                  <a:tcPr>
+                    <a:solidFill>
+                      <a:srgbClr val="FFFFFF"/>
+                    </a:solidFill>
+                  </a:tcPr>
+                </a:tc>
+                <a:tc>
+                  <a:txBody>
+                    <a:bodyPr/>
+                    <a:lstStyle/>
+                    <a:p>
+                      <a:pPr algn="r">
+                        <a:defRPr>
+                          <a:latin typeface="Roboto"/>
+                        </a:defRPr>
+                      </a:pPr>
+                      <a:r>
+                        <a:rPr sz="1000" b="1">
+                          <a:solidFill>
+                            <a:srgbClr val="B42318"/>
+                          </a:solidFill>
+                          <a:latin typeface="Roboto"/>
+                        </a:rPr>
+                        <a:t>92.8%</a:t>
+                      </a:r>
+                    </a:p>
+                  </a:txBody>
+                  <a:tcPr>
+                    <a:solidFill>
+                      <a:srgbClr val="FFFFFF"/>
+                    </a:solidFill>
+                  </a:tcPr>
+                </a:tc>
+                <a:tc>
+                  <a:txBody>
+                    <a:bodyPr/>
+                    <a:lstStyle/>
+                    <a:p>
+                      <a:pPr algn="r">
+                        <a:defRPr>
+                          <a:latin typeface="Roboto"/>
+                        </a:defRPr>
+                      </a:pPr>
+                      <a:r>
+                        <a:rPr sz="1000">
+                          <a:solidFill>
+                            <a:srgbClr val="25342A"/>
+                          </a:solidFill>
+                          <a:latin typeface="Roboto"/>
+                        </a:rPr>
+                        <a:t>$29,698</a:t>
+                      </a:r>
+                    </a:p>
+                  </a:txBody>
+                  <a:tcPr>
+                    <a:solidFill>
+                      <a:srgbClr val="FFFFFF"/>
+                    </a:solidFill>
+                  </a:tcPr>
+                </a:tc>
+                <a:tc>
+                  <a:txBody>
+                    <a:bodyPr/>
+                    <a:lstStyle/>
+                    <a:p>
+                      <a:pPr algn="r">
+                        <a:defRPr>
+                          <a:latin typeface="Roboto"/>
+                        </a:defRPr>
+                      </a:pPr>
+                      <a:r>
+                        <a:rPr sz="1000">
+                          <a:solidFill>
+                            <a:srgbClr val="25342A"/>
+                          </a:solidFill>
+                          <a:latin typeface="Roboto"/>
+                        </a:rPr>
+                        <a:t>5</a:t>
+                      </a:r>
+                    </a:p>
+                  </a:txBody>
+                  <a:tcPr>
+                    <a:solidFill>
+                      <a:srgbClr val="FFFFFF"/>
+                    </a:solidFill>
+                  </a:tcPr>
+                </a:tc>
+              </a:tr>
+              <a:tr h="246888">
+                <a:tc>
+                  <a:txBody>
+                    <a:bodyPr/>
+                    <a:lstStyle/>
+                    <a:p>
+                      <a:pPr algn="l">
+                        <a:defRPr>
+                          <a:latin typeface="Roboto"/>
+                        </a:defRPr>
+                      </a:pPr>
+                      <a:r>
+                        <a:rPr sz="1000">
+                          <a:solidFill>
+                            <a:srgbClr val="25342A"/>
+                          </a:solidFill>
+                          <a:latin typeface="Roboto"/>
+                        </a:rPr>
+                        <a:t>Mental health first aid</a:t>
+                      </a:r>
+                    </a:p>
+                  </a:txBody>
+                  <a:tcPr>
+                    <a:solidFill>
+                      <a:srgbClr val="F7FAF7"/>
+                    </a:solidFill>
+                  </a:tcPr>
+                </a:tc>
+                <a:tc>
+                  <a:txBody>
+                    <a:bodyPr/>
+                    <a:lstStyle/>
+                    <a:p>
+                      <a:pPr algn="r">
+                        <a:defRPr>
+                          <a:latin typeface="Roboto"/>
+                        </a:defRPr>
+                      </a:pPr>
+                      <a:r>
+                        <a:rPr sz="1000">
+                          <a:solidFill>
+                            <a:srgbClr val="25342A"/>
+                          </a:solidFill>
+                          <a:latin typeface="Roboto"/>
+                        </a:rPr>
+                        <a:t>$58,745</a:t>
+                      </a:r>
+                    </a:p>
+                  </a:txBody>
+                  <a:tcPr>
+                    <a:solidFill>
+                      <a:srgbClr val="F7FAF7"/>
+                    </a:solidFill>
+                  </a:tcPr>
+                </a:tc>
+                <a:tc>
+                  <a:txBody>
+                    <a:bodyPr/>
+                    <a:lstStyle/>
+                    <a:p>
+                      <a:pPr algn="r">
+                        <a:defRPr>
+                          <a:latin typeface="Roboto"/>
+                        </a:defRPr>
+                      </a:pPr>
+                      <a:r>
+                        <a:rPr sz="1000">
+                          <a:solidFill>
+                            <a:srgbClr val="25342A"/>
+                          </a:solidFill>
+                          <a:latin typeface="Roboto"/>
+                        </a:rPr>
+                        <a:t>$70,000</a:t>
+                      </a:r>
+                    </a:p>
+                  </a:txBody>
+                  <a:tcPr>
+                    <a:solidFill>
+                      <a:srgbClr val="F7FAF7"/>
+                    </a:solidFill>
+                  </a:tcPr>
+                </a:tc>
+                <a:tc>
+                  <a:txBody>
+                    <a:bodyPr/>
+                    <a:lstStyle/>
+                    <a:p>
+                      <a:pPr algn="r">
+                        <a:defRPr>
+                          <a:latin typeface="Roboto"/>
+                        </a:defRPr>
+                      </a:pPr>
+                      <a:r>
+                        <a:rPr sz="1000" b="1">
+                          <a:solidFill>
+                            <a:srgbClr val="B42318"/>
+                          </a:solidFill>
+                          <a:latin typeface="Roboto"/>
+                        </a:rPr>
+                        <a:t>83.9%</a:t>
+                      </a:r>
+                    </a:p>
+                  </a:txBody>
+                  <a:tcPr>
+                    <a:solidFill>
+                      <a:srgbClr val="F7FAF7"/>
+                    </a:solidFill>
+                  </a:tcPr>
+                </a:tc>
+                <a:tc>
+                  <a:txBody>
+                    <a:bodyPr/>
+                    <a:lstStyle/>
+                    <a:p>
+                      <a:pPr algn="r">
+                        <a:defRPr>
+                          <a:latin typeface="Roboto"/>
+                        </a:defRPr>
+                      </a:pPr>
+                      <a:r>
+                        <a:rPr sz="1000">
+                          <a:solidFill>
+                            <a:srgbClr val="25342A"/>
+                          </a:solidFill>
+                          <a:latin typeface="Roboto"/>
+                        </a:rPr>
+                        <a:t>$61,255</a:t>
+                      </a:r>
+                    </a:p>
+                  </a:txBody>
+                  <a:tcPr>
+                    <a:solidFill>
+                      <a:srgbClr val="F7FAF7"/>
+                    </a:solidFill>
+                  </a:tcPr>
+                </a:tc>
+                <a:tc>
+                  <a:txBody>
+                    <a:bodyPr/>
+                    <a:lstStyle/>
+                    <a:p>
+                      <a:pPr algn="r">
+                        <a:defRPr>
+                          <a:latin typeface="Roboto"/>
+                        </a:defRPr>
+                      </a:pPr>
+                      <a:r>
+                        <a:rPr sz="1000">
+                          <a:solidFill>
+                            <a:srgbClr val="25342A"/>
+                          </a:solidFill>
+                          <a:latin typeface="Roboto"/>
+                        </a:rPr>
+                        <a:t>5</a:t>
+                      </a:r>
+                    </a:p>
+                  </a:txBody>
+                  <a:tcPr>
+                    <a:solidFill>
+                      <a:srgbClr val="F7FAF7"/>
+                    </a:solidFill>
+                  </a:tcPr>
+                </a:tc>
+              </a:tr>
+              <a:tr h="246888">
+                <a:tc>
+                  <a:txBody>
+                    <a:bodyPr/>
+                    <a:lstStyle/>
+                    <a:p>
+                      <a:pPr algn="l">
+                        <a:defRPr>
+                          <a:latin typeface="Roboto"/>
+                        </a:defRPr>
+                      </a:pPr>
+                      <a:r>
+                        <a:rPr sz="1000">
+                          <a:solidFill>
+                            <a:srgbClr val="25342A"/>
+                          </a:solidFill>
+                          <a:latin typeface="Roboto"/>
+                        </a:rPr>
+                        <a:t>Youth outreach</a:t>
+                      </a:r>
+                    </a:p>
+                  </a:txBody>
+                  <a:tcPr>
+                    <a:solidFill>
+                      <a:srgbClr val="FFFFFF"/>
+                    </a:solidFill>
+                  </a:tcPr>
+                </a:tc>
+                <a:tc>
+                  <a:txBody>
+                    <a:bodyPr/>
+                    <a:lstStyle/>
+                    <a:p>
+                      <a:pPr algn="r">
+                        <a:defRPr>
+                          <a:latin typeface="Roboto"/>
+                        </a:defRPr>
+                      </a:pPr>
+                      <a:r>
+                        <a:rPr sz="1000">
+                          <a:solidFill>
+                            <a:srgbClr val="25342A"/>
+                          </a:solidFill>
+                          <a:latin typeface="Roboto"/>
+                        </a:rPr>
+                        <a:t>$309,558</a:t>
+                      </a:r>
+                    </a:p>
+                  </a:txBody>
+                  <a:tcPr>
+                    <a:solidFill>
+                      <a:srgbClr val="FFFFFF"/>
+                    </a:solidFill>
+                  </a:tcPr>
+                </a:tc>
+                <a:tc>
+                  <a:txBody>
+                    <a:bodyPr/>
+                    <a:lstStyle/>
+                    <a:p>
+                      <a:pPr algn="r">
+                        <a:defRPr>
+                          <a:latin typeface="Roboto"/>
+                        </a:defRPr>
+                      </a:pPr>
+                      <a:r>
+                        <a:rPr sz="1000">
+                          <a:solidFill>
+                            <a:srgbClr val="25342A"/>
+                          </a:solidFill>
+                          <a:latin typeface="Roboto"/>
+                        </a:rPr>
+                        <a:t>$320,000</a:t>
+                      </a:r>
+                    </a:p>
+                  </a:txBody>
+                  <a:tcPr>
+                    <a:solidFill>
+                      <a:srgbClr val="FFFFFF"/>
+                    </a:solidFill>
+                  </a:tcPr>
+                </a:tc>
+                <a:tc>
+                  <a:txBody>
+                    <a:bodyPr/>
+                    <a:lstStyle/>
+                    <a:p>
+                      <a:pPr algn="r">
+                        <a:defRPr>
+                          <a:latin typeface="Roboto"/>
+                        </a:defRPr>
+                      </a:pPr>
+                      <a:r>
+                        <a:rPr sz="1000" b="1">
+                          <a:solidFill>
+                            <a:srgbClr val="B42318"/>
+                          </a:solidFill>
+                          <a:latin typeface="Roboto"/>
+                        </a:rPr>
+                        <a:t>96.7%</a:t>
+                      </a:r>
+                    </a:p>
+                  </a:txBody>
+                  <a:tcPr>
+                    <a:solidFill>
+                      <a:srgbClr val="FFFFFF"/>
+                    </a:solidFill>
+                  </a:tcPr>
+                </a:tc>
+                <a:tc>
+                  <a:txBody>
+                    <a:bodyPr/>
+                    <a:lstStyle/>
+                    <a:p>
+                      <a:pPr algn="r">
+                        <a:defRPr>
+                          <a:latin typeface="Roboto"/>
+                        </a:defRPr>
+                      </a:pPr>
+                      <a:r>
+                        <a:rPr sz="1000">
+                          <a:solidFill>
+                            <a:srgbClr val="25342A"/>
+                          </a:solidFill>
+                          <a:latin typeface="Roboto"/>
+                        </a:rPr>
+                        <a:t>$170,442</a:t>
+                      </a:r>
+                    </a:p>
+                  </a:txBody>
+                  <a:tcPr>
+                    <a:solidFill>
+                      <a:srgbClr val="FFFFFF"/>
+                    </a:solidFill>
+                  </a:tcPr>
+                </a:tc>
+                <a:tc>
+                  <a:txBody>
+                    <a:bodyPr/>
+                    <a:lstStyle/>
+                    <a:p>
+                      <a:pPr algn="r">
+                        <a:defRPr>
+                          <a:latin typeface="Roboto"/>
+                        </a:defRPr>
+                      </a:pPr>
+                      <a:r>
+                        <a:rPr sz="1000">
+                          <a:solidFill>
+                            <a:srgbClr val="25342A"/>
+                          </a:solidFill>
+                          <a:latin typeface="Roboto"/>
+                        </a:rPr>
+                        <a:t>8</a:t>
+                      </a:r>
+                    </a:p>
+                  </a:txBody>
+                  <a:tcPr>
+                    <a:solidFill>
+                      <a:srgbClr val="FFFFFF"/>
+                    </a:solidFill>
+                  </a:tcPr>
+                </a:tc>
+              </a:tr>
+              <a:tr h="246888">
+                <a:tc>
+                  <a:txBody>
+                    <a:bodyPr/>
+                    <a:lstStyle/>
+                    <a:p>
+                      <a:pPr algn="l">
+                        <a:defRPr>
+                          <a:latin typeface="Roboto"/>
+                        </a:defRPr>
+                      </a:pPr>
+                      <a:r>
+                        <a:rPr sz="1000">
+                          <a:solidFill>
+                            <a:srgbClr val="25342A"/>
+                          </a:solidFill>
+                          <a:latin typeface="Roboto"/>
+                        </a:rPr>
+                        <a:t>Community meals</a:t>
+                      </a:r>
+                    </a:p>
+                  </a:txBody>
+                  <a:tcPr>
+                    <a:solidFill>
+                      <a:srgbClr val="F7FAF7"/>
+                    </a:solidFill>
+                  </a:tcPr>
+                </a:tc>
+                <a:tc>
+                  <a:txBody>
+                    <a:bodyPr/>
+                    <a:lstStyle/>
+                    <a:p>
+                      <a:pPr algn="r">
+                        <a:defRPr>
+                          <a:latin typeface="Roboto"/>
+                        </a:defRPr>
+                      </a:pPr>
+                      <a:r>
+                        <a:rPr sz="1000">
+                          <a:solidFill>
+                            <a:srgbClr val="25342A"/>
+                          </a:solidFill>
+                          <a:latin typeface="Roboto"/>
+                        </a:rPr>
+                        <a:t>$12,615</a:t>
+                      </a:r>
+                    </a:p>
+                  </a:txBody>
+                  <a:tcPr>
+                    <a:solidFill>
+                      <a:srgbClr val="F7FAF7"/>
+                    </a:solidFill>
+                  </a:tcPr>
+                </a:tc>
+                <a:tc>
+                  <a:txBody>
+                    <a:bodyPr/>
+                    <a:lstStyle/>
+                    <a:p>
+                      <a:pPr algn="r">
+                        <a:defRPr>
+                          <a:latin typeface="Roboto"/>
+                        </a:defRPr>
+                      </a:pPr>
+                      <a:r>
+                        <a:rPr sz="1000">
+                          <a:solidFill>
+                            <a:srgbClr val="25342A"/>
+                          </a:solidFill>
+                          <a:latin typeface="Roboto"/>
+                        </a:rPr>
+                        <a:t>$16,000</a:t>
+                      </a:r>
+                    </a:p>
+                  </a:txBody>
+                  <a:tcPr>
+                    <a:solidFill>
+                      <a:srgbClr val="F7FAF7"/>
+                    </a:solidFill>
+                  </a:tcPr>
+                </a:tc>
+                <a:tc>
+                  <a:txBody>
+                    <a:bodyPr/>
+                    <a:lstStyle/>
+                    <a:p>
+                      <a:pPr algn="r">
+                        <a:defRPr>
+                          <a:latin typeface="Roboto"/>
+                        </a:defRPr>
+                      </a:pPr>
+                      <a:r>
+                        <a:rPr sz="1000" b="1">
+                          <a:solidFill>
+                            <a:srgbClr val="B42318"/>
+                          </a:solidFill>
+                          <a:latin typeface="Roboto"/>
+                        </a:rPr>
+                        <a:t>78.8%</a:t>
+                      </a:r>
+                    </a:p>
+                  </a:txBody>
+                  <a:tcPr>
+                    <a:solidFill>
+                      <a:srgbClr val="F7FAF7"/>
+                    </a:solidFill>
+                  </a:tcPr>
+                </a:tc>
+                <a:tc>
+                  <a:txBody>
+                    <a:bodyPr/>
+                    <a:lstStyle/>
+                    <a:p>
+                      <a:pPr algn="r">
+                        <a:defRPr>
+                          <a:latin typeface="Roboto"/>
+                        </a:defRPr>
+                      </a:pPr>
+                      <a:r>
+                        <a:rPr sz="1000">
+                          <a:solidFill>
+                            <a:srgbClr val="25342A"/>
+                          </a:solidFill>
+                          <a:latin typeface="Roboto"/>
+                        </a:rPr>
+                        <a:t>$35,385</a:t>
+                      </a:r>
+                    </a:p>
+                  </a:txBody>
+                  <a:tcPr>
+                    <a:solidFill>
+                      <a:srgbClr val="F7FAF7"/>
+                    </a:solidFill>
+                  </a:tcPr>
+                </a:tc>
+                <a:tc>
+                  <a:txBody>
+                    <a:bodyPr/>
+                    <a:lstStyle/>
+                    <a:p>
+                      <a:pPr algn="r">
+                        <a:defRPr>
+                          <a:latin typeface="Roboto"/>
+                        </a:defRPr>
+                      </a:pPr>
+                      <a:r>
+                        <a:rPr sz="1000">
+                          <a:solidFill>
+                            <a:srgbClr val="25342A"/>
+                          </a:solidFill>
+                          <a:latin typeface="Roboto"/>
+                        </a:rPr>
+                        <a:t>8</a:t>
+                      </a:r>
+                    </a:p>
+                  </a:txBody>
+                  <a:tcPr>
+                    <a:solidFill>
+                      <a:srgbClr val="F7FAF7"/>
+                    </a:solidFill>
+                  </a:tcPr>
+                </a:tc>
+              </a:tr>
+            </a:tbl>
+          </a:graphicData>
+        </a:graphic>
+      </p:graphicFrame>
+      <p:sp>
+        <p:nvSpPr>
+          <p:cNvPr id="29" name="TextBox 28"/>
           <p:cNvSpPr txBox="1"/>
           <p:nvPr/>
         </p:nvSpPr>
         <p:spPr>
           <a:xfrm>
-            <a:off x="4297680" y="6492240"/>
-            <a:ext cx="3657600" cy="274320"/>
+            <a:off x="457200" y="6492240"/>
+            <a:ext cx="2926080" cy="274320"/>
           </a:xfrm>
           <a:prstGeom prst="rect">
             <a:avLst/>
@@ -6670,12 +6373,12 @@
           <a:noFill/>
         </p:spPr>
         <p:txBody>
-          <a:bodyPr wrap="square">
+          <a:bodyPr wrap="square" lIns="45720" rIns="45720">
             <a:spAutoFit/>
           </a:bodyPr>
           <a:lstStyle/>
           <a:p>
-            <a:pPr algn="ctr">
+            <a:pPr>
               <a:defRPr>
                 <a:latin typeface="Roboto"/>
               </a:defRPr>
@@ -6687,14 +6390,53 @@
                 </a:solidFill>
                 <a:latin typeface="Roboto"/>
               </a:rPr>
-              <a:t>Data retrieved 2pm, Tue 6 Oct 2026 · Sample data</a:t>
-            </a:r>
-          </a:p>
-        </p:txBody>
-      </p:sp>
-      <p:sp>
-        <p:nvSpPr>
-          <p:cNvPr id="10" name="TextBox 9"/>
+              <a:t>board.pptx</a:t>
+            </a:r>
+          </a:p>
+        </p:txBody>
+      </p:sp>
+      <p:sp>
+        <p:nvSpPr>
+          <p:cNvPr id="30" name="TextBox 29"/>
+          <p:cNvSpPr txBox="1"/>
+          <p:nvPr/>
+        </p:nvSpPr>
+        <p:spPr>
+          <a:xfrm>
+            <a:off x="3108960" y="6492240"/>
+            <a:ext cx="5943600" cy="274320"/>
+          </a:xfrm>
+          <a:prstGeom prst="rect">
+            <a:avLst/>
+          </a:prstGeom>
+          <a:noFill/>
+        </p:spPr>
+        <p:txBody>
+          <a:bodyPr wrap="square" lIns="45720" rIns="45720">
+            <a:spAutoFit/>
+          </a:bodyPr>
+          <a:lstStyle/>
+          <a:p>
+            <a:pPr algn="ctr">
+              <a:defRPr>
+                <a:latin typeface="Roboto"/>
+              </a:defRPr>
+            </a:pPr>
+            <a:r>
+              <a:rPr sz="900" b="0">
+                <a:solidFill>
+                  <a:srgbClr val="5F6F63"/>
+                </a:solidFill>
+                <a:latin typeface="Roboto"/>
+              </a:rPr>
+              <a:t>Data retrieved 2pm, Tue 6 Oct 2026 · Generated 8 Oct 2026, 9:35am · Sample data · Made with Python (python-pptx)</a:t>
+            </a:r>
+          </a:p>
+        </p:txBody>
+      </p:sp>
+      <p:sp>
+        <p:nvSpPr>
+          <p:cNvPr id="31" name="TextBox 30"/>
           <p:cNvSpPr txBox="1"/>
           <p:nvPr/>
         </p:nvSpPr>
@@ -6709,7 +6451,7 @@
           <a:noFill/>
         </p:spPr>
         <p:txBody>
-          <a:bodyPr wrap="square">
+          <a:bodyPr wrap="square" lIns="45720" rIns="45720">
             <a:spAutoFit/>
           </a:bodyPr>
           <a:lstStyle/>
@@ -6726,7 +6468,7 @@
                 </a:solidFill>
                 <a:latin typeface="Roboto"/>
               </a:rPr>
-              <a:t>Slide 5 of 5</a:t>
+              <a:t>Slide 2 of 2</a:t>
             </a:r>
           </a:p>
         </p:txBody>
@@ -6740,6 +6482,326 @@
 </file>
 
 <file path=ppt/theme/theme1.xml><?xml version="1.0" encoding="utf-8"?>
+<a:theme xmlns:a="http://schemas.openxmlformats.org/drawingml/2006/main" name="Office Theme">
+  <a:themeElements>
+    <a:clrScheme name="Office">
+      <a:dk1>
+        <a:sysClr val="windowText" lastClr="000000"/>
+      </a:dk1>
+      <a:lt1>
+        <a:sysClr val="window" lastClr="FFFFFF"/>
+      </a:lt1>
+      <a:dk2>
+        <a:srgbClr val="25342A"/>
+      </a:dk2>
+      <a:lt2>
+        <a:srgbClr val="F4F7F2"/>
+      </a:lt2>
+      <a:accent1>
+        <a:srgbClr val="2F7A5D"/>
+      </a:accent1>
+      <a:accent2>
+        <a:srgbClr val="0E9F6E"/>
+      </a:accent2>
+      <a:accent3>
+        <a:srgbClr val="7D8790"/>
+      </a:accent3>
+      <a:accent4>
+        <a:srgbClr val="8A6D3B"/>
+      </a:accent4>
+      <a:accent5>
+        <a:srgbClr val="B42318"/>
+      </a:accent5>
+      <a:accent6>
+        <a:srgbClr val="8E9CAB"/>
+      </a:accent6>
+      <a:hlink>
+        <a:srgbClr val="0000FF"/>
+      </a:hlink>
+      <a:folHlink>
+        <a:srgbClr val="800080"/>
+      </a:folHlink>
+    </a:clrScheme>
+    <a:fontScheme name="Office">
+      <a:majorFont>
+        <a:latin typeface="Roboto"/>
+        <a:ea typeface=""/>
+        <a:cs typeface=""/>
+        <a:font script="Jpan" typeface="ＭＳ Ｐゴシック"/>
+        <a:font script="Hang" typeface="맑은 고딕"/>
+        <a:font script="Hans" typeface="宋体"/>
+        <a:font script="Hant" typeface="新細明體"/>
+        <a:font script="Arab" typeface="Times New Roman"/>
+        <a:font script="Hebr" typeface="Times New Roman"/>
+        <a:font script="Thai" typeface="Angsana New"/>
+        <a:font script="Ethi" typeface="Nyala"/>
+        <a:font script="Beng" typeface="Vrinda"/>
+        <a:font script="Gujr" typeface="Shruti"/>
+        <a:font script="Khmr" typeface="MoolBoran"/>
+        <a:font script="Knda" typeface="Tunga"/>
+        <a:font script="Guru" typeface="Raavi"/>
+        <a:font script="Cans" typeface="Euphemia"/>
+        <a:font script="Cher" typeface="Plantagenet Cherokee"/>
+        <a:font script="Yiii" typeface="Microsoft Yi Baiti"/>
+        <a:font script="Tibt" typeface="Microsoft Himalaya"/>
+        <a:font script="Thaa" typeface="MV Boli"/>
+        <a:font script="Deva" typeface="Mangal"/>
+        <a:font script="Telu" typeface="Gautami"/>
+        <a:font script="Taml" typeface="Latha"/>
+        <a:font script="Syrc" typeface="Estrangelo Edessa"/>
+        <a:font script="Orya" typeface="Kalinga"/>
+        <a:font script="Mlym" typeface="Kartika"/>
+        <a:font script="Laoo" typeface="DokChampa"/>
+        <a:font script="Sinh" typeface="Iskoola Pota"/>
+        <a:font script="Mong" typeface="Mongolian Baiti"/>
+        <a:font script="Viet" typeface="Times New Roman"/>
+        <a:font script="Uigh" typeface="Microsoft Uighur"/>
+        <a:font script="Geor" typeface="Sylfaen"/>
+      </a:majorFont>
+      <a:minorFont>
+        <a:latin typeface="Roboto"/>
+        <a:ea typeface=""/>
+        <a:cs typeface=""/>
+        <a:font script="Jpan" typeface="ＭＳ Ｐゴシック"/>
+        <a:font script="Hang" typeface="맑은 고딕"/>
+        <a:font script="Hans" typeface="宋体"/>
+        <a:font script="Hant" typeface="新細明體"/>
+        <a:font script="Arab" typeface="Arial"/>
+        <a:font script="Hebr" typeface="Arial"/>
+        <a:font script="Thai" typeface="Cordia New"/>
+        <a:font script="Ethi" typeface="Nyala"/>
+        <a:font script="Beng" typeface="Vrinda"/>
+        <a:font script="Gujr" typeface="Shruti"/>
+        <a:font script="Khmr" typeface="DaunPenh"/>
+        <a:font script="Knda" typeface="Tunga"/>
+        <a:font script="Guru" typeface="Raavi"/>
+        <a:font script="Cans" typeface="Euphemia"/>
+        <a:font script="Cher" typeface="Plantagenet Cherokee"/>
+        <a:font script="Yiii" typeface="Microsoft Yi Baiti"/>
+        <a:font script="Tibt" typeface="Microsoft Himalaya"/>
+        <a:font script="Thaa" typeface="MV Boli"/>
+        <a:font script="Deva" typeface="Mangal"/>
+        <a:font script="Telu" typeface="Gautami"/>
+        <a:font script="Taml" typeface="Latha"/>
+        <a:font script="Syrc" typeface="Estrangelo Edessa"/>
+        <a:font script="Orya" typeface="Kalinga"/>
+        <a:font script="Mlym" typeface="Kartika"/>
+        <a:font script="Laoo" typeface="DokChampa"/>
+        <a:font script="Sinh" typeface="Iskoola Pota"/>
+        <a:font script="Mong" typeface="Mongolian Baiti"/>
+        <a:font script="Viet" typeface="Arial"/>
+        <a:font script="Uigh" typeface="Microsoft Uighur"/>
+        <a:font script="Geor" typeface="Sylfaen"/>
+      </a:minorFont>
+    </a:fontScheme>
+    <a:fmtScheme name="Office">
+      <a:fillStyleLst>
+        <a:solidFill>
+          <a:schemeClr val="phClr"/>
+        </a:solidFill>
+        <a:gradFill rotWithShape="1">
+          <a:gsLst>
+            <a:gs pos="0">
+              <a:schemeClr val="phClr">
+                <a:tint val="50000"/>
+                <a:satMod val="300000"/>
+              </a:schemeClr>
+            </a:gs>
+            <a:gs pos="35000">
+              <a:schemeClr val="phClr">
+                <a:tint val="37000"/>
+                <a:satMod val="300000"/>
+              </a:schemeClr>
+            </a:gs>
+            <a:gs pos="100000">
+              <a:schemeClr val="phClr">
+                <a:tint val="15000"/>
+                <a:satMod val="350000"/>
+              </a:schemeClr>
+            </a:gs>
+          </a:gsLst>
+          <a:lin ang="16200000" scaled="1"/>
+        </a:gradFill>
+        <a:gradFill rotWithShape="1">
+          <a:gsLst>
+            <a:gs pos="0">
+              <a:schemeClr val="phClr">
+                <a:tint val="100000"/>
+                <a:shade val="100000"/>
+                <a:satMod val="130000"/>
+              </a:schemeClr>
+            </a:gs>
+            <a:gs pos="100000">
+              <a:schemeClr val="phClr">
+                <a:tint val="50000"/>
+                <a:shade val="100000"/>
+                <a:satMod val="350000"/>
+              </a:schemeClr>
+            </a:gs>
+          </a:gsLst>
+          <a:lin ang="16200000" scaled="0"/>
+        </a:gradFill>
+      </a:fillStyleLst>
+      <a:lnStyleLst>
+        <a:ln w="9525" cap="flat" cmpd="sng" algn="ctr">
+          <a:solidFill>
+            <a:schemeClr val="phClr">
+              <a:shade val="95000"/>
+              <a:satMod val="105000"/>
+            </a:schemeClr>
+          </a:solidFill>
+          <a:prstDash val="solid"/>
+        </a:ln>
+        <a:ln w="25400" cap="flat" cmpd="sng" algn="ctr">
+          <a:solidFill>
+            <a:schemeClr val="phClr"/>
+          </a:solidFill>
+          <a:prstDash val="solid"/>
+        </a:ln>
+        <a:ln w="38100" cap="flat" cmpd="sng" algn="ctr">
+          <a:solidFill>
+            <a:schemeClr val="phClr"/>
+          </a:solidFill>
+          <a:prstDash val="solid"/>
+        </a:ln>
+      </a:lnStyleLst>
+      <a:effectStyleLst>
+        <a:effectStyle>
+          <a:effectLst>
+            <a:outerShdw blurRad="40000" dist="20000" dir="5400000" rotWithShape="0">
+              <a:srgbClr val="000000">
+                <a:alpha val="38000"/>
+              </a:srgbClr>
+            </a:outerShdw>
+          </a:effectLst>
+        </a:effectStyle>
+        <a:effectStyle>
+          <a:effectLst>
+            <a:outerShdw blurRad="40000" dist="23000" dir="5400000" rotWithShape="0">
+              <a:srgbClr val="000000">
+                <a:alpha val="35000"/>
+              </a:srgbClr>
+            </a:outerShdw>
+          </a:effectLst>
+        </a:effectStyle>
+        <a:effectStyle>
+          <a:effectLst>
+            <a:outerShdw blurRad="40000" dist="23000" dir="5400000" rotWithShape="0">
+              <a:srgbClr val="000000">
+                <a:alpha val="35000"/>
+              </a:srgbClr>
+            </a:outerShdw>
+          </a:effectLst>
+          <a:scene3d>
+            <a:camera prst="orthographicFront">
+              <a:rot lat="0" lon="0" rev="0"/>
+            </a:camera>
+            <a:lightRig rig="threePt" dir="t">
+              <a:rot lat="0" lon="0" rev="1200000"/>
+            </a:lightRig>
+          </a:scene3d>
+          <a:sp3d>
+            <a:bevelT w="63500" h="25400"/>
+          </a:sp3d>
+        </a:effectStyle>
+      </a:effectStyleLst>
+      <a:bgFillStyleLst>
+        <a:solidFill>
+          <a:schemeClr val="phClr"/>
+        </a:solidFill>
+        <a:gradFill rotWithShape="1">
+          <a:gsLst>
+            <a:gs pos="0">
+              <a:schemeClr val="phClr">
+                <a:tint val="40000"/>
+                <a:satMod val="350000"/>
+              </a:schemeClr>
+            </a:gs>
+            <a:gs pos="40000">
+              <a:schemeClr val="phClr">
+                <a:tint val="45000"/>
+                <a:shade val="99000"/>
+                <a:satMod val="350000"/>
+              </a:schemeClr>
+            </a:gs>
+            <a:gs pos="100000">
+              <a:schemeClr val="phClr">
+                <a:shade val="20000"/>
+                <a:satMod val="255000"/>
+              </a:schemeClr>
+            </a:gs>
+          </a:gsLst>
+          <a:path path="circle">
+            <a:fillToRect l="50000" t="-80000" r="50000" b="180000"/>
+          </a:path>
+        </a:gradFill>
+        <a:gradFill rotWithShape="1">
+          <a:gsLst>
+            <a:gs pos="0">
+              <a:schemeClr val="phClr">
+                <a:tint val="80000"/>
+                <a:satMod val="300000"/>
+              </a:schemeClr>
+            </a:gs>
+            <a:gs pos="100000">
+              <a:schemeClr val="phClr">
+                <a:shade val="30000"/>
+                <a:satMod val="200000"/>
+              </a:schemeClr>
+            </a:gs>
+          </a:gsLst>
+          <a:path path="circle">
+            <a:fillToRect l="50000" t="50000" r="50000" b="50000"/>
+          </a:path>
+        </a:gradFill>
+      </a:bgFillStyleLst>
+    </a:fmtScheme>
+  </a:themeElements>
+  <a:objectDefaults>
+    <a:spDef>
+      <a:spPr/>
+      <a:bodyPr/>
+      <a:lstStyle/>
+      <a:style>
+        <a:lnRef idx="1">
+          <a:schemeClr val="accent1"/>
+        </a:lnRef>
+        <a:fillRef idx="3">
+          <a:schemeClr val="accent1"/>
+        </a:fillRef>
+        <a:effectRef idx="2">
+          <a:schemeClr val="accent1"/>
+        </a:effectRef>
+        <a:fontRef idx="minor">
+          <a:schemeClr val="lt1"/>
+        </a:fontRef>
+      </a:style>
+    </a:spDef>
+    <a:lnDef>
+      <a:spPr/>
+      <a:bodyPr/>
+      <a:lstStyle/>
+      <a:style>
+        <a:lnRef idx="2">
+          <a:schemeClr val="accent1"/>
+        </a:lnRef>
+        <a:fillRef idx="0">
+          <a:schemeClr val="accent1"/>
+        </a:fillRef>
+        <a:effectRef idx="1">
+          <a:schemeClr val="accent1"/>
+        </a:effectRef>
+        <a:fontRef idx="minor">
+          <a:schemeClr val="tx1"/>
+        </a:fontRef>
+      </a:style>
+    </a:lnDef>
+  </a:objectDefaults>
+  <a:extraClrSchemeLst/>
+</a:theme>
+</file>
+
+<file path=ppt/theme/theme2.xml><?xml version="1.0" encoding="utf-8"?>
 <a:theme xmlns:a="http://schemas.openxmlformats.org/drawingml/2006/main" name="Office Theme">
   <a:themeElements>
     <a:clrScheme name="Office">

--- a/media/exports/reports/2026-10/board.pptx
+++ b/media/exports/reports/2026-10/board.pptx
@@ -3972,7 +3972,7 @@
                 </a:solidFill>
                 <a:latin typeface="Roboto"/>
               </a:rPr>
-              <a:t>Data retrieved 2pm, Tue 6 Oct 2026 · Generated 8 Oct 2026, 9:35am · Sample data · Made with Python (python-pptx)</a:t>
+              <a:t>Data retrieved 2pm, Tue 6 Oct 2026 · Generated 8 Oct 2026, 10:34am · Sample data · Made with Python (python-pptx)</a:t>
             </a:r>
           </a:p>
         </p:txBody>
@@ -5173,7 +5173,7 @@
                 </a:solidFill>
                 <a:latin typeface="Roboto"/>
               </a:rPr>
-              <a:t>GRANTS · AGAINST BUDGET: RED WHEN SPENDING IS MORE THAN 1% OVER OR UNDER BUDGET TO DATE, AMBER WITHIN 1%.</a:t>
+              <a:t>GRANTS · AGAINST BUDGET: RED WHEN SPENDING IS MORE THAN 1% OVER BUDGET TO DATE, GREEN MORE THAN 1% UNDER, AMBER WITHIN 1%.</a:t>
             </a:r>
           </a:p>
         </p:txBody>
@@ -5463,7 +5463,7 @@
                       <a:r>
                         <a:rPr sz="1000" b="1">
                           <a:solidFill>
-                            <a:srgbClr val="B42318"/>
+                            <a:srgbClr val="2F7A5D"/>
                           </a:solidFill>
                           <a:latin typeface="Roboto"/>
                         </a:rPr>
@@ -5627,7 +5627,7 @@
                       <a:r>
                         <a:rPr sz="1000" b="1">
                           <a:solidFill>
-                            <a:srgbClr val="B42318"/>
+                            <a:srgbClr val="2F7A5D"/>
                           </a:solidFill>
                           <a:latin typeface="Roboto"/>
                         </a:rPr>
@@ -5791,7 +5791,7 @@
                       <a:r>
                         <a:rPr sz="1000" b="1">
                           <a:solidFill>
-                            <a:srgbClr val="B42318"/>
+                            <a:srgbClr val="2F7A5D"/>
                           </a:solidFill>
                           <a:latin typeface="Roboto"/>
                         </a:rPr>
@@ -5955,7 +5955,7 @@
                       <a:r>
                         <a:rPr sz="1000" b="1">
                           <a:solidFill>
-                            <a:srgbClr val="B42318"/>
+                            <a:srgbClr val="2F7A5D"/>
                           </a:solidFill>
                           <a:latin typeface="Roboto"/>
                         </a:rPr>
@@ -6119,7 +6119,7 @@
                       <a:r>
                         <a:rPr sz="1000" b="1">
                           <a:solidFill>
-                            <a:srgbClr val="B42318"/>
+                            <a:srgbClr val="2F7A5D"/>
                           </a:solidFill>
                           <a:latin typeface="Roboto"/>
                         </a:rPr>
@@ -6283,7 +6283,7 @@
                       <a:r>
                         <a:rPr sz="1000" b="1">
                           <a:solidFill>
-                            <a:srgbClr val="B42318"/>
+                            <a:srgbClr val="2F7A5D"/>
                           </a:solidFill>
                           <a:latin typeface="Roboto"/>
                         </a:rPr>
@@ -6429,7 +6429,7 @@
                 </a:solidFill>
                 <a:latin typeface="Roboto"/>
               </a:rPr>
-              <a:t>Data retrieved 2pm, Tue 6 Oct 2026 · Generated 8 Oct 2026, 9:35am · Sample data · Made with Python (python-pptx)</a:t>
+              <a:t>Data retrieved 2pm, Tue 6 Oct 2026 · Generated 8 Oct 2026, 10:34am · Sample data · Made with Python (python-pptx)</a:t>
             </a:r>
           </a:p>
         </p:txBody>

--- a/media/exports/reports/2026-10/board.pptx
+++ b/media/exports/reports/2026-10/board.pptx
@@ -573,7 +573,7 @@
           <a:lstStyle/>
           <a:p>
             <a:r>
-              <a:t>What does the board need to see?. Surplus, October so far: ($10,737); Surplus (deficit), year to date: ($49,527); Unrestricted cash runway: 1.8 months; Cost to raise a dollar, October so far: 9¢.</a:t>
+              <a:t>What does the board need to see?. Surplus, October so far: ($10,737); Surplus (deficit), year to date: ($49,527); Unrestricted cash runway: 1.7 months; Cost to raise a dollar, October so far: 9¢.</a:t>
             </a:r>
           </a:p>
         </p:txBody>
@@ -3972,7 +3972,7 @@
                 </a:solidFill>
                 <a:latin typeface="Roboto"/>
               </a:rPr>
-              <a:t>Data retrieved 2pm, Tue 6 Oct 2026 · Generated 8 Oct 2026, 10:34am · Sample data · Made with Python (python-pptx)</a:t>
+              <a:t>Data retrieved 2pm, Tue 6 Oct 2026 · Generated 9 Oct 2026, 8:56am · Sample data · Made with Python (python-pptx)</a:t>
             </a:r>
           </a:p>
         </p:txBody>
@@ -4611,7 +4611,7 @@
                 </a:solidFill>
                 <a:latin typeface="Roboto"/>
               </a:rPr>
-              <a:t>1.8 months</a:t>
+              <a:t>1.7 months</a:t>
             </a:r>
           </a:p>
         </p:txBody>
@@ -4943,7 +4943,7 @@
                 </a:solidFill>
                 <a:latin typeface="Roboto"/>
               </a:rPr>
-              <a:t>• Unrestricted cash covers 1.8 months of spending, against a 3.0 months reserves target.</a:t>
+              <a:t>• Unrestricted cash covers 1.7 months of spending, against a 3.0 months reserves target.</a:t>
             </a:r>
           </a:p>
           <a:p>
@@ -6429,7 +6429,7 @@
                 </a:solidFill>
                 <a:latin typeface="Roboto"/>
               </a:rPr>
-              <a:t>Data retrieved 2pm, Tue 6 Oct 2026 · Generated 8 Oct 2026, 10:34am · Sample data · Made with Python (python-pptx)</a:t>
+              <a:t>Data retrieved 2pm, Tue 6 Oct 2026 · Generated 9 Oct 2026, 8:56am · Sample data · Made with Python (python-pptx)</a:t>
             </a:r>
           </a:p>
         </p:txBody>

--- a/media/exports/reports/2026-10/board.pptx
+++ b/media/exports/reports/2026-10/board.pptx
@@ -503,7 +503,7 @@
           <a:lstStyle/>
           <a:p>
             <a:r>
-              <a:t>What does the board need to see?. Sample Community Services Ltd. Period: October 2026 to date. A one-page board summary for October 2026 to date: the result, the money, the risks, and the decisions to make. The full statements are in the downloads.</a:t>
+              <a:t>What does the board need to see?. Sample Community Services Ltd. Period: October 2026 to date. In short: A ($10,737) deficit in October so far, 1.7 months of runway, and 4 grants ending within 6 months. A one-page board summary for October 2026 to date: the result, the money, the risks, and the decisions to make. The full statements are in the downloads.</a:t>
             </a:r>
           </a:p>
         </p:txBody>
@@ -3798,7 +3798,7 @@
         <p:spPr>
           <a:xfrm>
             <a:off x="457200" y="3703320"/>
-            <a:ext cx="11277295" cy="535940"/>
+            <a:ext cx="11277295" cy="758190"/>
           </a:xfrm>
           <a:prstGeom prst="rect">
             <a:avLst/>
@@ -3823,7 +3823,7 @@
                 </a:solidFill>
                 <a:latin typeface="Roboto"/>
               </a:rPr>
-              <a:t>Period: October 2026 to date. A one-page board summary for October 2026 to date: the result, the money, the risks, and the decisions to make. The full statements are in the downloads.</a:t>
+              <a:t>Period: October 2026 to date. In short: A ($10,737) deficit in October so far, 1.7 months of runway, and 4 grants ending within 6 months. A one-page board summary for October 2026 to date: the result, the money, the risks, and the decisions to make. The full statements are in the downloads.</a:t>
             </a:r>
           </a:p>
         </p:txBody>
@@ -3836,7 +3836,7 @@
         </p:nvSpPr>
         <p:spPr>
           <a:xfrm>
-            <a:off x="457200" y="4330700"/>
+            <a:off x="457200" y="4552950"/>
             <a:ext cx="11277295" cy="1097280"/>
           </a:xfrm>
           <a:prstGeom prst="rect">
@@ -3972,7 +3972,7 @@
                 </a:solidFill>
                 <a:latin typeface="Roboto"/>
               </a:rPr>
-              <a:t>Data retrieved 2pm, Tue 6 Oct 2026 · Generated 9 Oct 2026, 8:56am · Sample data · Made with Python (python-pptx)</a:t>
+              <a:t>Data retrieved 2pm, Tue 6 Oct 2026 · Generated 10 Oct 2026, 9:55pm · Sample data · Made with Python (python-pptx)</a:t>
             </a:r>
           </a:p>
         </p:txBody>
@@ -6429,7 +6429,7 @@
                 </a:solidFill>
                 <a:latin typeface="Roboto"/>
               </a:rPr>
-              <a:t>Data retrieved 2pm, Tue 6 Oct 2026 · Generated 9 Oct 2026, 8:56am · Sample data · Made with Python (python-pptx)</a:t>
+              <a:t>Data retrieved 2pm, Tue 6 Oct 2026 · Generated 10 Oct 2026, 9:55pm · Sample data · Made with Python (python-pptx)</a:t>
             </a:r>
           </a:p>
         </p:txBody>
